--- a/vault/03-deliverables/templates/powerpoint/PLANTILLA_PRESENTACION.pptx
+++ b/vault/03-deliverables/templates/powerpoint/PLANTILLA_PRESENTACION.pptx
@@ -43,23 +43,30 @@
   <p:notesSz cx="6858000" cy="9144000"/>
   <p:embeddedFontLst>
     <p:embeddedFont>
-      <p:font typeface="Calibri" panose="020F0502020204030204" pitchFamily="34" charset="0"/>
+      <p:font typeface="Gill Sans" panose="020B0604020202020204" charset="0"/>
       <p:regular r:id="rId33"/>
       <p:bold r:id="rId34"/>
-      <p:italic r:id="rId35"/>
-      <p:boldItalic r:id="rId36"/>
+    </p:embeddedFont>
+    <p:embeddedFont>
+      <p:font typeface="Consolas" panose="020B0609020204030204" pitchFamily="49" charset="0"/>
+      <p:regular r:id="rId35"/>
+      <p:bold r:id="rId36"/>
+      <p:italic r:id="rId37"/>
+      <p:boldItalic r:id="rId38"/>
     </p:embeddedFont>
     <p:embeddedFont>
       <p:font typeface="Cambria" panose="02040503050406030204" pitchFamily="18" charset="0"/>
-      <p:regular r:id="rId37"/>
-      <p:bold r:id="rId38"/>
-      <p:italic r:id="rId39"/>
-      <p:boldItalic r:id="rId40"/>
+      <p:regular r:id="rId39"/>
+      <p:bold r:id="rId40"/>
+      <p:italic r:id="rId41"/>
+      <p:boldItalic r:id="rId42"/>
     </p:embeddedFont>
     <p:embeddedFont>
-      <p:font typeface="Gill Sans" panose="020B0604020202020204" charset="0"/>
-      <p:regular r:id="rId41"/>
-      <p:bold r:id="rId42"/>
+      <p:font typeface="Calibri" panose="020F0502020204030204" pitchFamily="34" charset="0"/>
+      <p:regular r:id="rId43"/>
+      <p:bold r:id="rId44"/>
+      <p:italic r:id="rId45"/>
+      <p:boldItalic r:id="rId46"/>
     </p:embeddedFont>
   </p:embeddedFontLst>
   <p:defaultTextStyle>
@@ -292,6 +299,9 @@
     </a:lvl9pPr>
   </p:defaultTextStyle>
   <p:extLst>
+    <p:ext uri="{EFAFB233-063F-42B5-8137-9DF3F51BA10A}">
+      <p15:sldGuideLst xmlns:p15="http://schemas.microsoft.com/office/powerpoint/2012/main"/>
+    </p:ext>
     <p:ext uri="GoogleSlidesCustomDataVersion2">
       <go:slidesCustomData xmlns:go="http://customooxmlschemas.google.com/" xmlns:ahyp="http://schemas.microsoft.com/office/drawing/2018/hyperlinkcolor" xmlns:p15="http://schemas.microsoft.com/office/powerpoint/2012/main" xmlns:p14="http://schemas.microsoft.com/office/powerpoint/2010/main" xmlns:com="http://schemas.openxmlformats.org/drawingml/2006/compatibility" xmlns:pvml="urn:schemas-microsoft-com:office:powerpoint" xmlns:v="urn:schemas-microsoft-com:vml" xmlns:o="urn:schemas-microsoft-com:office:office" xmlns:dgm="http://schemas.openxmlformats.org/drawingml/2006/diagram" xmlns:c="http://schemas.openxmlformats.org/drawingml/2006/chart" xmlns:mv="urn:schemas-microsoft-com:mac:vml" xmlns:mc="http://schemas.openxmlformats.org/markup-compatibility/2006" xmlns="" r:id="rId55" roundtripDataSignature="AMtx7mhoWsaXMVBtv1HF1G3ccxKxe1iUlA=="/>
     </p:ext>
@@ -644,6 +654,11 @@
         </p:txBody>
       </p:sp>
     </p:spTree>
+    <p:extLst>
+      <p:ext uri="{BB962C8B-B14F-4D97-AF65-F5344CB8AC3E}">
+        <p14:creationId xmlns:p14="http://schemas.microsoft.com/office/powerpoint/2010/main" val="747698154"/>
+      </p:ext>
+    </p:extLst>
   </p:cSld>
   <p:clrMap bg1="lt1" tx1="dk1" bg2="dk2" tx2="lt2" accent1="accent1" accent2="accent2" accent3="accent3" accent4="accent4" accent5="accent5" accent6="accent6" hlink="hlink" folHlink="folHlink"/>
   <p:notesStyle>
@@ -993,6 +1008,11 @@
         </p:spPr>
       </p:sp>
     </p:spTree>
+    <p:extLst>
+      <p:ext uri="{BB962C8B-B14F-4D97-AF65-F5344CB8AC3E}">
+        <p14:creationId xmlns:p14="http://schemas.microsoft.com/office/powerpoint/2010/main" val="2125944923"/>
+      </p:ext>
+    </p:extLst>
   </p:cSld>
   <p:clrMapOvr>
     <a:masterClrMapping/>
@@ -1115,6 +1135,11 @@
         </p:spPr>
       </p:sp>
     </p:spTree>
+    <p:extLst>
+      <p:ext uri="{BB962C8B-B14F-4D97-AF65-F5344CB8AC3E}">
+        <p14:creationId xmlns:p14="http://schemas.microsoft.com/office/powerpoint/2010/main" val="2426703096"/>
+      </p:ext>
+    </p:extLst>
   </p:cSld>
   <p:clrMapOvr>
     <a:masterClrMapping/>
@@ -1237,6 +1262,11 @@
         </p:spPr>
       </p:sp>
     </p:spTree>
+    <p:extLst>
+      <p:ext uri="{BB962C8B-B14F-4D97-AF65-F5344CB8AC3E}">
+        <p14:creationId xmlns:p14="http://schemas.microsoft.com/office/powerpoint/2010/main" val="2880856214"/>
+      </p:ext>
+    </p:extLst>
   </p:cSld>
   <p:clrMapOvr>
     <a:masterClrMapping/>
@@ -1359,6 +1389,11 @@
         </p:spPr>
       </p:sp>
     </p:spTree>
+    <p:extLst>
+      <p:ext uri="{BB962C8B-B14F-4D97-AF65-F5344CB8AC3E}">
+        <p14:creationId xmlns:p14="http://schemas.microsoft.com/office/powerpoint/2010/main" val="496018018"/>
+      </p:ext>
+    </p:extLst>
   </p:cSld>
   <p:clrMapOvr>
     <a:masterClrMapping/>
@@ -1481,6 +1516,11 @@
         </p:spPr>
       </p:sp>
     </p:spTree>
+    <p:extLst>
+      <p:ext uri="{BB962C8B-B14F-4D97-AF65-F5344CB8AC3E}">
+        <p14:creationId xmlns:p14="http://schemas.microsoft.com/office/powerpoint/2010/main" val="2441136525"/>
+      </p:ext>
+    </p:extLst>
   </p:cSld>
   <p:clrMapOvr>
     <a:masterClrMapping/>
@@ -1603,6 +1643,11 @@
         </p:spPr>
       </p:sp>
     </p:spTree>
+    <p:extLst>
+      <p:ext uri="{BB962C8B-B14F-4D97-AF65-F5344CB8AC3E}">
+        <p14:creationId xmlns:p14="http://schemas.microsoft.com/office/powerpoint/2010/main" val="445348141"/>
+      </p:ext>
+    </p:extLst>
   </p:cSld>
   <p:clrMapOvr>
     <a:masterClrMapping/>
@@ -1725,6 +1770,11 @@
         </p:spPr>
       </p:sp>
     </p:spTree>
+    <p:extLst>
+      <p:ext uri="{BB962C8B-B14F-4D97-AF65-F5344CB8AC3E}">
+        <p14:creationId xmlns:p14="http://schemas.microsoft.com/office/powerpoint/2010/main" val="408440886"/>
+      </p:ext>
+    </p:extLst>
   </p:cSld>
   <p:clrMapOvr>
     <a:masterClrMapping/>
@@ -1847,6 +1897,11 @@
         </p:spPr>
       </p:sp>
     </p:spTree>
+    <p:extLst>
+      <p:ext uri="{BB962C8B-B14F-4D97-AF65-F5344CB8AC3E}">
+        <p14:creationId xmlns:p14="http://schemas.microsoft.com/office/powerpoint/2010/main" val="3762062742"/>
+      </p:ext>
+    </p:extLst>
   </p:cSld>
   <p:clrMapOvr>
     <a:masterClrMapping/>
@@ -1969,6 +2024,11 @@
         </p:spPr>
       </p:sp>
     </p:spTree>
+    <p:extLst>
+      <p:ext uri="{BB962C8B-B14F-4D97-AF65-F5344CB8AC3E}">
+        <p14:creationId xmlns:p14="http://schemas.microsoft.com/office/powerpoint/2010/main" val="1075481738"/>
+      </p:ext>
+    </p:extLst>
   </p:cSld>
   <p:clrMapOvr>
     <a:masterClrMapping/>
@@ -2091,6 +2151,11 @@
         </p:spPr>
       </p:sp>
     </p:spTree>
+    <p:extLst>
+      <p:ext uri="{BB962C8B-B14F-4D97-AF65-F5344CB8AC3E}">
+        <p14:creationId xmlns:p14="http://schemas.microsoft.com/office/powerpoint/2010/main" val="652770728"/>
+      </p:ext>
+    </p:extLst>
   </p:cSld>
   <p:clrMapOvr>
     <a:masterClrMapping/>
@@ -2213,6 +2278,11 @@
         </p:spPr>
       </p:sp>
     </p:spTree>
+    <p:extLst>
+      <p:ext uri="{BB962C8B-B14F-4D97-AF65-F5344CB8AC3E}">
+        <p14:creationId xmlns:p14="http://schemas.microsoft.com/office/powerpoint/2010/main" val="4050138663"/>
+      </p:ext>
+    </p:extLst>
   </p:cSld>
   <p:clrMapOvr>
     <a:masterClrMapping/>
@@ -2295,8 +2365,8 @@
         </p:nvSpPr>
         <p:spPr>
           <a:xfrm>
-            <a:off x="1143225" y="685800"/>
-            <a:ext cx="4572225" cy="3429000"/>
+            <a:off x="381000" y="685800"/>
+            <a:ext cx="6096000" cy="3429000"/>
           </a:xfrm>
           <a:custGeom>
             <a:avLst/>
@@ -2335,6 +2405,11 @@
         </p:spPr>
       </p:sp>
     </p:spTree>
+    <p:extLst>
+      <p:ext uri="{BB962C8B-B14F-4D97-AF65-F5344CB8AC3E}">
+        <p14:creationId xmlns:p14="http://schemas.microsoft.com/office/powerpoint/2010/main" val="4279019941"/>
+      </p:ext>
+    </p:extLst>
   </p:cSld>
   <p:clrMapOvr>
     <a:masterClrMapping/>
@@ -2457,6 +2532,11 @@
         </p:spPr>
       </p:sp>
     </p:spTree>
+    <p:extLst>
+      <p:ext uri="{BB962C8B-B14F-4D97-AF65-F5344CB8AC3E}">
+        <p14:creationId xmlns:p14="http://schemas.microsoft.com/office/powerpoint/2010/main" val="2762724318"/>
+      </p:ext>
+    </p:extLst>
   </p:cSld>
   <p:clrMapOvr>
     <a:masterClrMapping/>
@@ -2579,6 +2659,11 @@
         </p:spPr>
       </p:sp>
     </p:spTree>
+    <p:extLst>
+      <p:ext uri="{BB962C8B-B14F-4D97-AF65-F5344CB8AC3E}">
+        <p14:creationId xmlns:p14="http://schemas.microsoft.com/office/powerpoint/2010/main" val="2944093637"/>
+      </p:ext>
+    </p:extLst>
   </p:cSld>
   <p:clrMapOvr>
     <a:masterClrMapping/>
@@ -2701,6 +2786,11 @@
         </p:spPr>
       </p:sp>
     </p:spTree>
+    <p:extLst>
+      <p:ext uri="{BB962C8B-B14F-4D97-AF65-F5344CB8AC3E}">
+        <p14:creationId xmlns:p14="http://schemas.microsoft.com/office/powerpoint/2010/main" val="3952034553"/>
+      </p:ext>
+    </p:extLst>
   </p:cSld>
   <p:clrMapOvr>
     <a:masterClrMapping/>
@@ -2823,6 +2913,11 @@
         </p:spPr>
       </p:sp>
     </p:spTree>
+    <p:extLst>
+      <p:ext uri="{BB962C8B-B14F-4D97-AF65-F5344CB8AC3E}">
+        <p14:creationId xmlns:p14="http://schemas.microsoft.com/office/powerpoint/2010/main" val="3285335400"/>
+      </p:ext>
+    </p:extLst>
   </p:cSld>
   <p:clrMapOvr>
     <a:masterClrMapping/>
@@ -2945,6 +3040,11 @@
         </p:spPr>
       </p:sp>
     </p:spTree>
+    <p:extLst>
+      <p:ext uri="{BB962C8B-B14F-4D97-AF65-F5344CB8AC3E}">
+        <p14:creationId xmlns:p14="http://schemas.microsoft.com/office/powerpoint/2010/main" val="1388965238"/>
+      </p:ext>
+    </p:extLst>
   </p:cSld>
   <p:clrMapOvr>
     <a:masterClrMapping/>
@@ -3067,6 +3167,11 @@
         </p:spPr>
       </p:sp>
     </p:spTree>
+    <p:extLst>
+      <p:ext uri="{BB962C8B-B14F-4D97-AF65-F5344CB8AC3E}">
+        <p14:creationId xmlns:p14="http://schemas.microsoft.com/office/powerpoint/2010/main" val="1705619617"/>
+      </p:ext>
+    </p:extLst>
   </p:cSld>
   <p:clrMapOvr>
     <a:masterClrMapping/>
@@ -3189,6 +3294,11 @@
         </p:spPr>
       </p:sp>
     </p:spTree>
+    <p:extLst>
+      <p:ext uri="{BB962C8B-B14F-4D97-AF65-F5344CB8AC3E}">
+        <p14:creationId xmlns:p14="http://schemas.microsoft.com/office/powerpoint/2010/main" val="1051846802"/>
+      </p:ext>
+    </p:extLst>
   </p:cSld>
   <p:clrMapOvr>
     <a:masterClrMapping/>
@@ -3311,6 +3421,11 @@
         </p:spPr>
       </p:sp>
     </p:spTree>
+    <p:extLst>
+      <p:ext uri="{BB962C8B-B14F-4D97-AF65-F5344CB8AC3E}">
+        <p14:creationId xmlns:p14="http://schemas.microsoft.com/office/powerpoint/2010/main" val="4173058118"/>
+      </p:ext>
+    </p:extLst>
   </p:cSld>
   <p:clrMapOvr>
     <a:masterClrMapping/>
@@ -3433,6 +3548,11 @@
         </p:spPr>
       </p:sp>
     </p:spTree>
+    <p:extLst>
+      <p:ext uri="{BB962C8B-B14F-4D97-AF65-F5344CB8AC3E}">
+        <p14:creationId xmlns:p14="http://schemas.microsoft.com/office/powerpoint/2010/main" val="938296809"/>
+      </p:ext>
+    </p:extLst>
   </p:cSld>
   <p:clrMapOvr>
     <a:masterClrMapping/>
@@ -3555,6 +3675,11 @@
         </p:spPr>
       </p:sp>
     </p:spTree>
+    <p:extLst>
+      <p:ext uri="{BB962C8B-B14F-4D97-AF65-F5344CB8AC3E}">
+        <p14:creationId xmlns:p14="http://schemas.microsoft.com/office/powerpoint/2010/main" val="2631769822"/>
+      </p:ext>
+    </p:extLst>
   </p:cSld>
   <p:clrMapOvr>
     <a:masterClrMapping/>
@@ -3677,6 +3802,11 @@
         </p:spPr>
       </p:sp>
     </p:spTree>
+    <p:extLst>
+      <p:ext uri="{BB962C8B-B14F-4D97-AF65-F5344CB8AC3E}">
+        <p14:creationId xmlns:p14="http://schemas.microsoft.com/office/powerpoint/2010/main" val="2696581019"/>
+      </p:ext>
+    </p:extLst>
   </p:cSld>
   <p:clrMapOvr>
     <a:masterClrMapping/>
@@ -3799,6 +3929,11 @@
         </p:spPr>
       </p:sp>
     </p:spTree>
+    <p:extLst>
+      <p:ext uri="{BB962C8B-B14F-4D97-AF65-F5344CB8AC3E}">
+        <p14:creationId xmlns:p14="http://schemas.microsoft.com/office/powerpoint/2010/main" val="1078926239"/>
+      </p:ext>
+    </p:extLst>
   </p:cSld>
   <p:clrMapOvr>
     <a:masterClrMapping/>
@@ -3921,6 +4056,11 @@
         </p:spPr>
       </p:sp>
     </p:spTree>
+    <p:extLst>
+      <p:ext uri="{BB962C8B-B14F-4D97-AF65-F5344CB8AC3E}">
+        <p14:creationId xmlns:p14="http://schemas.microsoft.com/office/powerpoint/2010/main" val="1034220189"/>
+      </p:ext>
+    </p:extLst>
   </p:cSld>
   <p:clrMapOvr>
     <a:masterClrMapping/>
@@ -4043,6 +4183,11 @@
         </p:spPr>
       </p:sp>
     </p:spTree>
+    <p:extLst>
+      <p:ext uri="{BB962C8B-B14F-4D97-AF65-F5344CB8AC3E}">
+        <p14:creationId xmlns:p14="http://schemas.microsoft.com/office/powerpoint/2010/main" val="286710927"/>
+      </p:ext>
+    </p:extLst>
   </p:cSld>
   <p:clrMapOvr>
     <a:masterClrMapping/>
@@ -4165,6 +4310,11 @@
         </p:spPr>
       </p:sp>
     </p:spTree>
+    <p:extLst>
+      <p:ext uri="{BB962C8B-B14F-4D97-AF65-F5344CB8AC3E}">
+        <p14:creationId xmlns:p14="http://schemas.microsoft.com/office/powerpoint/2010/main" val="2573517910"/>
+      </p:ext>
+    </p:extLst>
   </p:cSld>
   <p:clrMapOvr>
     <a:masterClrMapping/>
@@ -4287,6 +4437,11 @@
         </p:spPr>
       </p:sp>
     </p:spTree>
+    <p:extLst>
+      <p:ext uri="{BB962C8B-B14F-4D97-AF65-F5344CB8AC3E}">
+        <p14:creationId xmlns:p14="http://schemas.microsoft.com/office/powerpoint/2010/main" val="3957045826"/>
+      </p:ext>
+    </p:extLst>
   </p:cSld>
   <p:clrMapOvr>
     <a:masterClrMapping/>
@@ -4409,6 +4564,11 @@
         </p:spPr>
       </p:sp>
     </p:spTree>
+    <p:extLst>
+      <p:ext uri="{BB962C8B-B14F-4D97-AF65-F5344CB8AC3E}">
+        <p14:creationId xmlns:p14="http://schemas.microsoft.com/office/powerpoint/2010/main" val="3457244338"/>
+      </p:ext>
+    </p:extLst>
   </p:cSld>
   <p:clrMapOvr>
     <a:masterClrMapping/>
@@ -4531,6 +4691,11 @@
         </p:spPr>
       </p:sp>
     </p:spTree>
+    <p:extLst>
+      <p:ext uri="{BB962C8B-B14F-4D97-AF65-F5344CB8AC3E}">
+        <p14:creationId xmlns:p14="http://schemas.microsoft.com/office/powerpoint/2010/main" val="2646857064"/>
+      </p:ext>
+    </p:extLst>
   </p:cSld>
   <p:clrMapOvr>
     <a:masterClrMapping/>
@@ -18309,27 +18474,27 @@
               <a:buNone/>
             </a:pPr>
             <a:r>
-              <a:rPr lang="es-ES" dirty="0">
+              <a:rPr lang="pt-BR">
                 <a:solidFill>
                   <a:schemeClr val="lt1"/>
                 </a:solidFill>
               </a:rPr>
-              <a:t>MANUAL</a:t>
+              <a:t>MANUAL TÉCNICO</a:t>
             </a:r>
             <a:br>
-              <a:rPr lang="es-ES" dirty="0">
+              <a:rPr lang="pt-BR">
                 <a:solidFill>
                   <a:schemeClr val="lt1"/>
                 </a:solidFill>
               </a:rPr>
             </a:br>
             <a:r>
-              <a:rPr lang="es-ES" dirty="0">
+              <a:rPr lang="pt-BR">
                 <a:solidFill>
                   <a:schemeClr val="lt1"/>
                 </a:solidFill>
               </a:rPr>
-              <a:t>CONVUNI SOAP JAVA</a:t>
+              <a:t>SOAP JAVA SINBDD GR09</a:t>
             </a:r>
             <a:endParaRPr dirty="0"/>
           </a:p>
@@ -18348,7 +18513,7 @@
         <p:spPr>
           <a:xfrm>
             <a:off x="599226" y="4572000"/>
-            <a:ext cx="4261531" cy="1812758"/>
+            <a:ext cx="6200000" cy="1812758"/>
           </a:xfrm>
           <a:prstGeom prst="rect">
             <a:avLst/>
@@ -18377,41 +18542,82 @@
               <a:buSzPts val="1472"/>
               <a:buNone/>
             </a:pPr>
-            <a:endParaRPr b="1" dirty="0">
-              <a:solidFill>
-                <a:schemeClr val="lt1"/>
-              </a:solidFill>
-            </a:endParaRPr>
-          </a:p>
-          <a:p>
-            <a:pPr marL="0" lvl="0" indent="0" algn="l" rtl="0">
-              <a:lnSpc>
-                <a:spcPct val="100000"/>
-              </a:lnSpc>
-              <a:spcBef>
-                <a:spcPts val="920"/>
-              </a:spcBef>
-              <a:spcAft>
-                <a:spcPts val="0"/>
-              </a:spcAft>
-              <a:buSzPts val="1472"/>
-              <a:buNone/>
-            </a:pPr>
-            <a:r>
-              <a:rPr lang="es-ES" b="1" dirty="0">
+            <a:r>
+              <a:rPr lang="es-ES" b="1">
                 <a:solidFill>
                   <a:schemeClr val="lt1"/>
                 </a:solidFill>
               </a:rPr>
               <a:t>INTEGRANTES:</a:t>
             </a:r>
-            <a:r>
-              <a:rPr lang="es-ES" dirty="0">
+          </a:p>
+          <a:p>
+            <a:pPr marL="0" lvl="0" indent="0" algn="l" rtl="0">
+              <a:lnSpc>
+                <a:spcPct val="100000"/>
+              </a:lnSpc>
+              <a:spcBef>
+                <a:spcPts val="0"/>
+              </a:spcBef>
+              <a:spcAft>
+                <a:spcPts val="0"/>
+              </a:spcAft>
+              <a:buSzPts val="1472"/>
+              <a:buNone/>
+            </a:pPr>
+            <a:r>
+              <a:rPr lang="es-ES" sz="1600" b="1">
                 <a:solidFill>
                   <a:schemeClr val="lt1"/>
                 </a:solidFill>
               </a:rPr>
-              <a:t> 	JOAN COBEÑA			JUAN PASQUEL			EDISON VERDESOTO</a:t>
+              <a:t>MURILLO MEDINA, GABRIEL OMAR</a:t>
+            </a:r>
+          </a:p>
+          <a:p>
+            <a:pPr marL="0" lvl="0" indent="0" algn="l" rtl="0">
+              <a:lnSpc>
+                <a:spcPct val="100000"/>
+              </a:lnSpc>
+              <a:spcBef>
+                <a:spcPts val="0"/>
+              </a:spcBef>
+              <a:spcAft>
+                <a:spcPts val="0"/>
+              </a:spcAft>
+              <a:buSzPts val="1472"/>
+              <a:buNone/>
+            </a:pPr>
+            <a:r>
+              <a:rPr lang="es-ES" sz="1600" b="1">
+                <a:solidFill>
+                  <a:schemeClr val="lt1"/>
+                </a:solidFill>
+              </a:rPr>
+              <a:t>VICHE CASTILLO, JULIO ENRIQUE</a:t>
+            </a:r>
+          </a:p>
+          <a:p>
+            <a:pPr marL="0" lvl="0" indent="0" algn="l" rtl="0">
+              <a:lnSpc>
+                <a:spcPct val="100000"/>
+              </a:lnSpc>
+              <a:spcBef>
+                <a:spcPts val="0"/>
+              </a:spcBef>
+              <a:spcAft>
+                <a:spcPts val="0"/>
+              </a:spcAft>
+              <a:buSzPts val="1472"/>
+              <a:buNone/>
+            </a:pPr>
+            <a:r>
+              <a:rPr lang="es-ES" b="1">
+                <a:solidFill>
+                  <a:schemeClr val="lt1"/>
+                </a:solidFill>
+              </a:rPr>
+              <a:t>GRUPO: GR09</a:t>
             </a:r>
             <a:endParaRPr dirty="0">
               <a:solidFill>
@@ -18456,8 +18662,8 @@
         </p:nvSpPr>
         <p:spPr>
           <a:xfrm>
-            <a:off x="9037063" y="5301801"/>
-            <a:ext cx="4261531" cy="1235358"/>
+            <a:off x="7619999" y="5301801"/>
+            <a:ext cx="4318000" cy="1235358"/>
           </a:xfrm>
           <a:prstGeom prst="rect">
             <a:avLst/>
@@ -18491,7 +18697,7 @@
               <a:buNone/>
             </a:pPr>
             <a:r>
-              <a:rPr lang="es-ES" sz="1600" b="1" i="0" u="none" strike="noStrike" cap="none" dirty="0">
+              <a:rPr lang="es-ES" sz="1600" b="1" i="0" u="none" strike="noStrike" cap="none">
                 <a:solidFill>
                   <a:srgbClr val="FFFFFF"/>
                 </a:solidFill>
@@ -18500,41 +18706,8 @@
                 <a:cs typeface="Gill Sans"/>
                 <a:sym typeface="Gill Sans"/>
               </a:rPr>
-              <a:t>FECHA:  </a:t>
-            </a:r>
-            <a:r>
-              <a:rPr lang="es-ES" sz="1600" b="1" dirty="0">
-                <a:solidFill>
-                  <a:srgbClr val="FFFFFF"/>
-                </a:solidFill>
-                <a:latin typeface="Gill Sans"/>
-                <a:ea typeface="Gill Sans"/>
-                <a:cs typeface="Gill Sans"/>
-                <a:sym typeface="Gill Sans"/>
-              </a:rPr>
-              <a:t>12</a:t>
-            </a:r>
-            <a:r>
-              <a:rPr lang="es-ES" sz="1600" b="1" i="0" u="none" strike="noStrike" cap="none" dirty="0">
-                <a:solidFill>
-                  <a:srgbClr val="FFFFFF"/>
-                </a:solidFill>
-                <a:latin typeface="Gill Sans"/>
-                <a:ea typeface="Gill Sans"/>
-                <a:cs typeface="Gill Sans"/>
-                <a:sym typeface="Gill Sans"/>
-              </a:rPr>
-              <a:t>/05/2026</a:t>
-            </a:r>
-            <a:endParaRPr sz="1600" b="0" i="0" u="none" strike="noStrike" cap="none" dirty="0">
-              <a:solidFill>
-                <a:srgbClr val="FFFFFF"/>
-              </a:solidFill>
-              <a:latin typeface="Gill Sans"/>
-              <a:ea typeface="Gill Sans"/>
-              <a:cs typeface="Gill Sans"/>
-              <a:sym typeface="Gill Sans"/>
-            </a:endParaRPr>
+              <a:t>FECHA: 27/10/2026</a:t>
+            </a:r>
           </a:p>
           <a:p>
             <a:pPr marL="0" marR="0" lvl="0" indent="0" algn="l" rtl="0">
@@ -18542,7 +18715,7 @@
                 <a:spcPct val="100000"/>
               </a:lnSpc>
               <a:spcBef>
-                <a:spcPts val="920"/>
+                <a:spcPts val="0"/>
               </a:spcBef>
               <a:spcAft>
                 <a:spcPts val="0"/>
@@ -18555,7 +18728,7 @@
               <a:buNone/>
             </a:pPr>
             <a:r>
-              <a:rPr lang="es-ES" sz="1600" b="1" i="0" u="none" strike="noStrike" cap="none" dirty="0">
+              <a:rPr lang="es-ES" sz="1600" b="1" i="0" u="none" strike="noStrike" cap="none">
                 <a:solidFill>
                   <a:srgbClr val="FFFFFF"/>
                 </a:solidFill>
@@ -18564,19 +18737,7 @@
                 <a:cs typeface="Gill Sans"/>
                 <a:sym typeface="Gill Sans"/>
               </a:rPr>
-              <a:t>ING: </a:t>
-            </a:r>
-            <a:r>
-              <a:rPr lang="es-ES" sz="1600" b="0" i="0" u="none" strike="noStrike" cap="none" dirty="0">
-                <a:solidFill>
-                  <a:srgbClr val="FFFFFF"/>
-                </a:solidFill>
-                <a:latin typeface="Gill Sans"/>
-                <a:ea typeface="Gill Sans"/>
-                <a:cs typeface="Gill Sans"/>
-                <a:sym typeface="Gill Sans"/>
-              </a:rPr>
-              <a:t>CAMPAÑA MAURICIO</a:t>
+              <a:t>ASIGNATURA: ARQUITECTURA DE SOFTWARE</a:t>
             </a:r>
             <a:endParaRPr sz="1600" b="1" i="0" u="none" strike="noStrike" cap="none" dirty="0">
               <a:solidFill>
@@ -18778,7 +18939,7 @@
               <a:buNone/>
             </a:pPr>
             <a:r>
-              <a:rPr lang="es-ES" sz="1564" b="1" dirty="0">
+              <a:rPr lang="es-ES" sz="1564" b="1">
                 <a:latin typeface="Cambria"/>
                 <a:ea typeface="Cambria"/>
                 <a:cs typeface="Cambria"/>
@@ -18786,15 +18947,9 @@
               </a:rPr>
               <a:t>Modelo del Proyecto</a:t>
             </a:r>
-            <a:endParaRPr sz="1564" b="1" dirty="0">
-              <a:latin typeface="Cambria"/>
-              <a:ea typeface="Cambria"/>
-              <a:cs typeface="Cambria"/>
-              <a:sym typeface="Cambria"/>
-            </a:endParaRPr>
-          </a:p>
-          <a:p>
-            <a:pPr marL="129241" lvl="0" indent="0" algn="l" rtl="0">
+          </a:p>
+          <a:p>
+            <a:pPr marL="0" lvl="0" indent="0" algn="l" rtl="0">
               <a:lnSpc>
                 <a:spcPct val="115000"/>
               </a:lnSpc>
@@ -18804,35 +18959,17 @@
               <a:spcAft>
                 <a:spcPts val="0"/>
               </a:spcAft>
-              <a:buSzPts val="1565"/>
-              <a:buNone/>
-            </a:pPr>
-            <a:r>
-              <a:rPr lang="es-MX" sz="1564" b="1" dirty="0">
+              <a:buSzPts val="1656"/>
+              <a:buNone/>
+            </a:pPr>
+            <a:r>
+              <a:rPr lang="es-ES" sz="1564" b="1">
                 <a:latin typeface="Cambria"/>
                 <a:ea typeface="Cambria"/>
                 <a:cs typeface="Cambria"/>
                 <a:sym typeface="Cambria"/>
               </a:rPr>
-              <a:t>Se crea la clase </a:t>
-            </a:r>
-            <a:r>
-              <a:rPr lang="es-MX" sz="1564" b="1" dirty="0" err="1">
-                <a:latin typeface="Cambria"/>
-                <a:ea typeface="Cambria"/>
-                <a:cs typeface="Cambria"/>
-                <a:sym typeface="Cambria"/>
-              </a:rPr>
-              <a:t>CatalogoUnidades</a:t>
-            </a:r>
-            <a:r>
-              <a:rPr lang="es-MX" sz="1564" b="1" dirty="0">
-                <a:latin typeface="Cambria"/>
-                <a:ea typeface="Cambria"/>
-                <a:cs typeface="Cambria"/>
-                <a:sym typeface="Cambria"/>
-              </a:rPr>
-              <a:t> dentro del paquete modelo para gestionar paramétricamente los tipos de unidades de medida disponibles</a:t>
+              <a:t>ConversionRequest representa los datos de magnitud, valor y unidades que se envían al servicio.</a:t>
             </a:r>
             <a:endParaRPr lang="es-MX" sz="1670" dirty="0">
               <a:latin typeface="Cambria"/>
@@ -19183,7 +19320,7 @@
                 <a:cs typeface="Gill Sans"/>
                 <a:sym typeface="Gill Sans"/>
               </a:rPr>
-              <a:t>CREACIÓN DEL PROYECTO – CLIENTE MOVIL</a:t>
+              <a:t>CREACIÓN DEL PROYECTO – CLIENTE MÓVIL</a:t>
             </a:r>
             <a:endParaRPr sz="1400" b="0" i="0" u="none" strike="noStrike" cap="none">
               <a:solidFill>
@@ -19347,6 +19484,39 @@
               <a:buSzPts val="1656"/>
               <a:buNone/>
             </a:pPr>
+            <a:r>
+              <a:rPr lang="es-ES" sz="1564" b="1">
+                <a:latin typeface="Cambria"/>
+                <a:ea typeface="Cambria"/>
+                <a:cs typeface="Cambria"/>
+                <a:sym typeface="Cambria"/>
+              </a:rPr>
+              <a:t>Controlador del Proyecto</a:t>
+            </a:r>
+          </a:p>
+          <a:p>
+            <a:pPr marL="0" lvl="0" indent="0" algn="l" rtl="0">
+              <a:lnSpc>
+                <a:spcPct val="115000"/>
+              </a:lnSpc>
+              <a:spcBef>
+                <a:spcPts val="1200"/>
+              </a:spcBef>
+              <a:spcAft>
+                <a:spcPts val="0"/>
+              </a:spcAft>
+              <a:buSzPts val="1656"/>
+              <a:buNone/>
+            </a:pPr>
+            <a:r>
+              <a:rPr lang="es-ES" sz="1564" b="1">
+                <a:latin typeface="Cambria"/>
+                <a:ea typeface="Cambria"/>
+                <a:cs typeface="Cambria"/>
+                <a:sym typeface="Cambria"/>
+              </a:rPr>
+              <a:t>El controlador valida la sesión, prepara las llamadas SOAP y presenta al usuario el resultado de cada conversión.</a:t>
+            </a:r>
             <a:endParaRPr sz="1564" b="1" dirty="0">
               <a:latin typeface="Cambria"/>
               <a:ea typeface="Cambria"/>
@@ -19354,111 +19524,91 @@
               <a:sym typeface="Cambria"/>
             </a:endParaRPr>
           </a:p>
-          <a:p>
-            <a:pPr marL="0" lvl="0" indent="0" algn="l" rtl="0">
-              <a:lnSpc>
-                <a:spcPct val="115000"/>
-              </a:lnSpc>
-              <a:spcBef>
-                <a:spcPts val="1200"/>
-              </a:spcBef>
-              <a:spcAft>
-                <a:spcPts val="0"/>
-              </a:spcAft>
-              <a:buClr>
-                <a:schemeClr val="dk1"/>
-              </a:buClr>
-              <a:buSzPts val="1099"/>
-              <a:buFont typeface="Arial"/>
-              <a:buNone/>
-            </a:pPr>
-            <a:r>
-              <a:rPr lang="es-ES" sz="1564" b="1" dirty="0">
-                <a:latin typeface="Cambria"/>
-                <a:ea typeface="Cambria"/>
-                <a:cs typeface="Cambria"/>
-                <a:sym typeface="Cambria"/>
-              </a:rPr>
-              <a:t>Controlador del Proyecto</a:t>
-            </a:r>
-            <a:endParaRPr sz="1564" b="1" dirty="0">
-              <a:latin typeface="Cambria"/>
-              <a:ea typeface="Cambria"/>
-              <a:cs typeface="Cambria"/>
-              <a:sym typeface="Cambria"/>
-            </a:endParaRPr>
-          </a:p>
-          <a:p>
-            <a:pPr marL="0" lvl="0" indent="0" algn="l" rtl="0">
-              <a:lnSpc>
-                <a:spcPct val="115000"/>
-              </a:lnSpc>
-              <a:spcBef>
-                <a:spcPts val="1200"/>
-              </a:spcBef>
-              <a:spcAft>
-                <a:spcPts val="0"/>
-              </a:spcAft>
-              <a:buClr>
-                <a:schemeClr val="dk1"/>
-              </a:buClr>
-              <a:buSzPts val="1100"/>
-              <a:buFont typeface="Arial"/>
-              <a:buNone/>
-            </a:pPr>
-            <a:r>
-              <a:rPr lang="es-MX" sz="1564" b="1" dirty="0">
-                <a:latin typeface="Cambria"/>
-                <a:ea typeface="Cambria"/>
-                <a:cs typeface="Cambria"/>
-                <a:sym typeface="Cambria"/>
-              </a:rPr>
-              <a:t>Esta clase centraliza la comunicación y se encarga de instanciar los puertos de los servicios SOAP </a:t>
-            </a:r>
-          </a:p>
-          <a:p>
-            <a:pPr marL="0" lvl="0" indent="0" algn="l" rtl="0">
-              <a:lnSpc>
-                <a:spcPct val="115000"/>
-              </a:lnSpc>
-              <a:spcBef>
-                <a:spcPts val="1200"/>
-              </a:spcBef>
-              <a:spcAft>
-                <a:spcPts val="1200"/>
-              </a:spcAft>
-              <a:buSzPts val="1656"/>
-              <a:buNone/>
-            </a:pPr>
-            <a:endParaRPr sz="1564" b="1" dirty="0">
-              <a:latin typeface="Cambria"/>
-              <a:ea typeface="Cambria"/>
-              <a:cs typeface="Cambria"/>
-              <a:sym typeface="Cambria"/>
-            </a:endParaRPr>
-          </a:p>
         </p:txBody>
       </p:sp>
-      <p:pic>
-        <p:nvPicPr>
-          <p:cNvPr id="3" name="Imagen 2">
+      <p:sp>
+        <p:nvSpPr>
+          <p:cNvPr id="2" name="Código editable - ConversionController">
             <a:extLst>
               <a:ext uri="{FF2B5EF4-FFF2-40B4-BE49-F238E27FC236}">
-                <a16:creationId xmlns:a16="http://schemas.microsoft.com/office/drawing/2014/main" id="{D60D6DAE-7B2E-4DD1-BDFA-3477B65BA3E9}"/>
+                <a16:creationId xmlns:a16="http://schemas.microsoft.com/office/drawing/2014/main" xmlns="" id="{7DD048F7-291C-4466-917F-C53A70400149}"/>
               </a:ext>
             </a:extLst>
           </p:cNvPr>
-          <p:cNvPicPr>
-            <a:picLocks noChangeAspect="1"/>
-          </p:cNvPicPr>
+          <p:cNvSpPr/>
           <p:nvPr/>
-        </p:nvPicPr>
-        <p:blipFill>
-          <a:blip r:embed="rId3"/>
-          <a:stretch>
-            <a:fillRect/>
-          </a:stretch>
-        </p:blipFill>
+        </p:nvSpPr>
+        <p:spPr>
+          <a:xfrm>
+            <a:off x="4100618" y="4064763"/>
+            <a:ext cx="5172027" cy="1777483"/>
+          </a:xfrm>
+          <a:prstGeom prst="rect">
+            <a:avLst/>
+          </a:prstGeom>
+          <a:solidFill>
+            <a:srgbClr val="FFFFFF"/>
+          </a:solidFill>
+          <a:ln w="15875">
+            <a:solidFill>
+              <a:srgbClr val="D9D9D9"/>
+            </a:solidFill>
+          </a:ln>
+        </p:spPr>
+        <p:style>
+          <a:lnRef idx="2">
+            <a:schemeClr val="accent1">
+              <a:shade val="50000"/>
+            </a:schemeClr>
+          </a:lnRef>
+          <a:fillRef idx="1">
+            <a:schemeClr val="accent1"/>
+          </a:fillRef>
+          <a:effectRef idx="0">
+            <a:schemeClr val="accent1"/>
+          </a:effectRef>
+          <a:fontRef idx="minor">
+            <a:schemeClr val="lt1"/>
+          </a:fontRef>
+        </p:style>
+        <p:txBody>
+          <a:bodyPr wrap="square" lIns="101600" tIns="63500" rIns="101600" bIns="63500" rtlCol="0" anchor="t">
+            <a:noAutofit/>
+          </a:bodyPr>
+          <a:lstStyle/>
+          <a:p>
+            <a:r>
+              <a:rPr lang="es-ES" sz="1000" smtClean="0">
+                <a:solidFill>
+                  <a:srgbClr val="000000"/>
+                </a:solidFill>
+                <a:latin typeface="Consolas" panose="020B0609020204030204" pitchFamily="49" charset="0"/>
+              </a:rPr>
+              <a:t>IServicioConversion convService = clientManager.getConversionService();
+String token = sessionModel.getToken();
+String magnitud = request.getMagnitud().toLowerCase();</a:t>
+            </a:r>
+            <a:endParaRPr lang="en-US" sz="1000">
+              <a:solidFill>
+                <a:srgbClr val="000000"/>
+              </a:solidFill>
+              <a:latin typeface="Consolas" panose="020B0609020204030204" pitchFamily="49" charset="0"/>
+            </a:endParaRPr>
+          </a:p>
+        </p:txBody>
+      </p:sp>
+      <p:sp>
+        <p:nvSpPr>
+          <p:cNvPr id="4" name="Código editable - ConversionRequest">
+            <a:extLst>
+              <a:ext uri="{FF2B5EF4-FFF2-40B4-BE49-F238E27FC236}">
+                <a16:creationId xmlns:a16="http://schemas.microsoft.com/office/drawing/2014/main" xmlns="" id="{BE1FDCDF-BB08-4024-ACC0-08D4758E0B68}"/>
+              </a:ext>
+            </a:extLst>
+          </p:cNvPr>
+          <p:cNvSpPr/>
+          <p:nvPr/>
+        </p:nvSpPr>
         <p:spPr>
           <a:xfrm>
             <a:off x="811793" y="4064763"/>
@@ -19467,38 +19617,58 @@
           <a:prstGeom prst="rect">
             <a:avLst/>
           </a:prstGeom>
+          <a:solidFill>
+            <a:srgbClr val="FFFFFF"/>
+          </a:solidFill>
+          <a:ln w="15875">
+            <a:solidFill>
+              <a:srgbClr val="D9D9D9"/>
+            </a:solidFill>
+          </a:ln>
         </p:spPr>
-      </p:pic>
-      <p:pic>
-        <p:nvPicPr>
-          <p:cNvPr id="5" name="Imagen 4">
-            <a:extLst>
-              <a:ext uri="{FF2B5EF4-FFF2-40B4-BE49-F238E27FC236}">
-                <a16:creationId xmlns:a16="http://schemas.microsoft.com/office/drawing/2014/main" id="{0889830E-4E34-407B-9710-CAB715991793}"/>
-              </a:ext>
-            </a:extLst>
-          </p:cNvPr>
-          <p:cNvPicPr>
-            <a:picLocks noChangeAspect="1"/>
-          </p:cNvPicPr>
-          <p:nvPr/>
-        </p:nvPicPr>
-        <p:blipFill>
-          <a:blip r:embed="rId4"/>
-          <a:stretch>
-            <a:fillRect/>
-          </a:stretch>
-        </p:blipFill>
-        <p:spPr>
-          <a:xfrm>
-            <a:off x="4100618" y="4064763"/>
-            <a:ext cx="5172027" cy="1777483"/>
-          </a:xfrm>
-          <a:prstGeom prst="rect">
-            <a:avLst/>
-          </a:prstGeom>
-        </p:spPr>
-      </p:pic>
+        <p:style>
+          <a:lnRef idx="2">
+            <a:schemeClr val="accent1">
+              <a:shade val="50000"/>
+            </a:schemeClr>
+          </a:lnRef>
+          <a:fillRef idx="1">
+            <a:schemeClr val="accent1"/>
+          </a:fillRef>
+          <a:effectRef idx="0">
+            <a:schemeClr val="accent1"/>
+          </a:effectRef>
+          <a:fontRef idx="minor">
+            <a:schemeClr val="lt1"/>
+          </a:fontRef>
+        </p:style>
+        <p:txBody>
+          <a:bodyPr wrap="square" lIns="101600" tIns="63500" rIns="101600" bIns="63500" rtlCol="0" anchor="t">
+            <a:noAutofit/>
+          </a:bodyPr>
+          <a:lstStyle/>
+          <a:p>
+            <a:r>
+              <a:rPr lang="nb-NO" sz="1200" smtClean="0">
+                <a:solidFill>
+                  <a:srgbClr val="000000"/>
+                </a:solidFill>
+                <a:latin typeface="Consolas" panose="020B0609020204030204" pitchFamily="49" charset="0"/>
+              </a:rPr>
+              <a:t>private String magnitud;
+private String unidadOrigen;
+private String unidadDestino;
+private double valor;</a:t>
+            </a:r>
+            <a:endParaRPr lang="en-US" sz="1200">
+              <a:solidFill>
+                <a:srgbClr val="000000"/>
+              </a:solidFill>
+              <a:latin typeface="Consolas" panose="020B0609020204030204" pitchFamily="49" charset="0"/>
+            </a:endParaRPr>
+          </a:p>
+        </p:txBody>
+      </p:sp>
     </p:spTree>
   </p:cSld>
   <p:clrMapOvr>
@@ -19621,7 +19791,7 @@
               <a:buNone/>
             </a:pPr>
             <a:r>
-              <a:rPr lang="es-ES" sz="1564" b="1" dirty="0">
+              <a:rPr lang="es-ES" sz="1564" b="1">
                 <a:latin typeface="Cambria"/>
                 <a:ea typeface="Cambria"/>
                 <a:cs typeface="Cambria"/>
@@ -19629,12 +19799,6 @@
               </a:rPr>
               <a:t>Vista del Proyecto</a:t>
             </a:r>
-            <a:endParaRPr sz="1564" b="1" dirty="0">
-              <a:latin typeface="Cambria"/>
-              <a:ea typeface="Cambria"/>
-              <a:cs typeface="Cambria"/>
-              <a:sym typeface="Cambria"/>
-            </a:endParaRPr>
           </a:p>
           <a:p>
             <a:pPr marL="0" lvl="0" indent="0" algn="l" rtl="0">
@@ -19645,55 +19809,19 @@
                 <a:spcPts val="1200"/>
               </a:spcBef>
               <a:spcAft>
-                <a:spcPts val="1200"/>
+                <a:spcPts val="0"/>
               </a:spcAft>
               <a:buSzPts val="1656"/>
               <a:buNone/>
             </a:pPr>
             <a:r>
-              <a:rPr lang="es-MX" sz="1564" b="1" dirty="0">
+              <a:rPr lang="es-ES" sz="1564" b="1">
                 <a:latin typeface="Cambria"/>
                 <a:ea typeface="Cambria"/>
                 <a:cs typeface="Cambria"/>
                 <a:sym typeface="Cambria"/>
               </a:rPr>
-              <a:t>En la capa de interacción, dentro del paquete vista, se implementan las clases </a:t>
-            </a:r>
-            <a:r>
-              <a:rPr lang="es-MX" sz="1564" b="1" dirty="0" err="1">
-                <a:latin typeface="Cambria"/>
-                <a:ea typeface="Cambria"/>
-                <a:cs typeface="Cambria"/>
-                <a:sym typeface="Cambria"/>
-              </a:rPr>
-              <a:t>InterfazConsola</a:t>
-            </a:r>
-            <a:r>
-              <a:rPr lang="es-MX" sz="1564" b="1" dirty="0">
-                <a:latin typeface="Cambria"/>
-                <a:ea typeface="Cambria"/>
-                <a:cs typeface="Cambria"/>
-                <a:sym typeface="Cambria"/>
-              </a:rPr>
-              <a:t> y el enumerador </a:t>
-            </a:r>
-            <a:r>
-              <a:rPr lang="es-MX" sz="1564" b="1" dirty="0" err="1">
-                <a:latin typeface="Cambria"/>
-                <a:ea typeface="Cambria"/>
-                <a:cs typeface="Cambria"/>
-                <a:sym typeface="Cambria"/>
-              </a:rPr>
-              <a:t>OpcionMenu</a:t>
-            </a:r>
-            <a:r>
-              <a:rPr lang="es-MX" sz="1564" b="1" dirty="0">
-                <a:latin typeface="Cambria"/>
-                <a:ea typeface="Cambria"/>
-                <a:cs typeface="Cambria"/>
-                <a:sym typeface="Cambria"/>
-              </a:rPr>
-              <a:t>. </a:t>
+              <a:t>La vista de consola guía el inicio de sesión y ofrece opciones para convertir longitud, masa o temperatura. Muestra mensajes de validación y el resultado con dos decimales.</a:t>
             </a:r>
             <a:endParaRPr lang="es-MX" sz="1670" dirty="0">
               <a:latin typeface="Cambria"/>
@@ -20044,7 +20172,7 @@
                 <a:cs typeface="Gill Sans"/>
                 <a:sym typeface="Gill Sans"/>
               </a:rPr>
-              <a:t>CREACIÓN DEL PROYECTO – CLIENTE MOVIL</a:t>
+              <a:t>CREACIÓN DEL PROYECTO – CLIENTE MÓVIL</a:t>
             </a:r>
             <a:endParaRPr sz="1400" b="0" i="0" u="none" strike="noStrike" cap="none">
               <a:solidFill>
@@ -20168,13 +20296,7 @@
       </p:sp>
       <p:pic>
         <p:nvPicPr>
-          <p:cNvPr id="3" name="Imagen 2">
-            <a:extLst>
-              <a:ext uri="{FF2B5EF4-FFF2-40B4-BE49-F238E27FC236}">
-                <a16:creationId xmlns:a16="http://schemas.microsoft.com/office/drawing/2014/main" id="{3FC07DC6-C9F5-45D0-971B-30ED654F1AAA}"/>
-              </a:ext>
-            </a:extLst>
-          </p:cNvPr>
+          <p:cNvPr id="2" name="Captura 11 evidencia_ti-1-1-soap-java_s11-2.png" descr="Cliente de consola SOAP Java: selección y resultado"/>
           <p:cNvPicPr>
             <a:picLocks noChangeAspect="1"/>
           </p:cNvPicPr>
@@ -20188,8 +20310,8 @@
         </p:blipFill>
         <p:spPr>
           <a:xfrm>
-            <a:off x="4361215" y="2617179"/>
-            <a:ext cx="4878473" cy="2609244"/>
+            <a:off x="4811554" y="2617179"/>
+            <a:ext cx="3977795" cy="2609244"/>
           </a:xfrm>
           <a:prstGeom prst="rect">
             <a:avLst/>
@@ -20287,8 +20409,8 @@
         </p:nvSpPr>
         <p:spPr>
           <a:xfrm>
-            <a:off x="581200" y="702138"/>
-            <a:ext cx="4178100" cy="3707100"/>
+            <a:off x="581660" y="1930400"/>
+            <a:ext cx="2413000" cy="698500"/>
           </a:xfrm>
           <a:prstGeom prst="rect">
             <a:avLst/>
@@ -20326,27 +20448,6 @@
               </a:rPr>
               <a:t>Ejecución del Proyecto</a:t>
             </a:r>
-            <a:endParaRPr sz="1564">
-              <a:latin typeface="Cambria"/>
-              <a:ea typeface="Cambria"/>
-              <a:cs typeface="Cambria"/>
-              <a:sym typeface="Cambria"/>
-            </a:endParaRPr>
-          </a:p>
-          <a:p>
-            <a:pPr marL="0" lvl="0" indent="0" algn="l" rtl="0">
-              <a:lnSpc>
-                <a:spcPct val="115000"/>
-              </a:lnSpc>
-              <a:spcBef>
-                <a:spcPts val="1200"/>
-              </a:spcBef>
-              <a:spcAft>
-                <a:spcPts val="1200"/>
-              </a:spcAft>
-              <a:buSzPts val="1656"/>
-              <a:buNone/>
-            </a:pPr>
             <a:endParaRPr sz="1564" b="1">
               <a:latin typeface="Cambria"/>
               <a:ea typeface="Cambria"/>
@@ -20696,7 +20797,7 @@
                 <a:cs typeface="Gill Sans"/>
                 <a:sym typeface="Gill Sans"/>
               </a:rPr>
-              <a:t>CREACIÓN DEL PROYECTO – CLIENTE MOVIL</a:t>
+              <a:t>CREACIÓN DEL PROYECTO – CLIENTE MÓVIL</a:t>
             </a:r>
             <a:endParaRPr sz="1400" b="0" i="0" u="none" strike="noStrike" cap="none">
               <a:solidFill>
@@ -20820,13 +20921,7 @@
       </p:sp>
       <p:pic>
         <p:nvPicPr>
-          <p:cNvPr id="9" name="image16.png">
-            <a:extLst>
-              <a:ext uri="{FF2B5EF4-FFF2-40B4-BE49-F238E27FC236}">
-                <a16:creationId xmlns:a16="http://schemas.microsoft.com/office/drawing/2014/main" id="{FDC047A1-8147-471E-A1A5-BE791B7D7DA6}"/>
-              </a:ext>
-            </a:extLst>
-          </p:cNvPr>
+          <p:cNvPr id="201" name="soap_clicon_login.png"/>
           <p:cNvPicPr/>
           <p:nvPr/>
         </p:nvPicPr>
@@ -20839,24 +20934,22 @@
         </p:blipFill>
         <p:spPr>
           <a:xfrm>
-            <a:off x="3227647" y="1933668"/>
-            <a:ext cx="2868295" cy="803275"/>
+            <a:off x="581200" y="2700000"/>
+            <a:ext cx="4150000" cy="1850000"/>
           </a:xfrm>
           <a:prstGeom prst="rect">
             <a:avLst/>
           </a:prstGeom>
-          <a:ln/>
+          <a:ln w="12700">
+            <a:solidFill>
+              <a:srgbClr val="CCCCCC"/>
+            </a:solidFill>
+          </a:ln>
         </p:spPr>
       </p:pic>
       <p:pic>
         <p:nvPicPr>
-          <p:cNvPr id="10" name="image33.png">
-            <a:extLst>
-              <a:ext uri="{FF2B5EF4-FFF2-40B4-BE49-F238E27FC236}">
-                <a16:creationId xmlns:a16="http://schemas.microsoft.com/office/drawing/2014/main" id="{4AC94074-97F6-4613-A0DD-F4EF075B8E98}"/>
-              </a:ext>
-            </a:extLst>
-          </p:cNvPr>
+          <p:cNvPr id="202" name="soap_clicon_longitud.png"/>
           <p:cNvPicPr/>
           <p:nvPr/>
         </p:nvPicPr>
@@ -20869,24 +20962,22 @@
         </p:blipFill>
         <p:spPr>
           <a:xfrm>
-            <a:off x="311657" y="3004463"/>
-            <a:ext cx="2808061" cy="2643675"/>
+            <a:off x="4900000" y="2700000"/>
+            <a:ext cx="4150000" cy="1850000"/>
           </a:xfrm>
           <a:prstGeom prst="rect">
             <a:avLst/>
           </a:prstGeom>
-          <a:ln/>
+          <a:ln w="12700">
+            <a:solidFill>
+              <a:srgbClr val="CCCCCC"/>
+            </a:solidFill>
+          </a:ln>
         </p:spPr>
       </p:pic>
       <p:pic>
         <p:nvPicPr>
-          <p:cNvPr id="11" name="image47.png">
-            <a:extLst>
-              <a:ext uri="{FF2B5EF4-FFF2-40B4-BE49-F238E27FC236}">
-                <a16:creationId xmlns:a16="http://schemas.microsoft.com/office/drawing/2014/main" id="{AE40CA26-5CE1-4635-A4AE-E153AE6B2FC9}"/>
-              </a:ext>
-            </a:extLst>
-          </p:cNvPr>
+          <p:cNvPr id="203" name="soap_clicon_masa.png"/>
           <p:cNvPicPr/>
           <p:nvPr/>
         </p:nvPicPr>
@@ -20899,43 +20990,45 @@
         </p:blipFill>
         <p:spPr>
           <a:xfrm>
-            <a:off x="3227647" y="3004463"/>
-            <a:ext cx="2808301" cy="2643675"/>
+            <a:off x="581200" y="4700000"/>
+            <a:ext cx="4150000" cy="1850000"/>
           </a:xfrm>
           <a:prstGeom prst="rect">
             <a:avLst/>
           </a:prstGeom>
-          <a:ln/>
+          <a:ln w="12700">
+            <a:solidFill>
+              <a:srgbClr val="CCCCCC"/>
+            </a:solidFill>
+          </a:ln>
         </p:spPr>
       </p:pic>
       <p:pic>
         <p:nvPicPr>
-          <p:cNvPr id="12" name="image15.png">
-            <a:extLst>
-              <a:ext uri="{FF2B5EF4-FFF2-40B4-BE49-F238E27FC236}">
-                <a16:creationId xmlns:a16="http://schemas.microsoft.com/office/drawing/2014/main" id="{26DAED8E-2180-4ECC-B457-80F01B8AA7C0}"/>
-              </a:ext>
-            </a:extLst>
-          </p:cNvPr>
+          <p:cNvPr id="204" name="soap_clicon_temperatura.png"/>
           <p:cNvPicPr/>
           <p:nvPr/>
         </p:nvPicPr>
         <p:blipFill>
           <a:blip r:embed="rId6"/>
-          <a:srcRect b="17680"/>
+          <a:srcRect/>
           <a:stretch>
             <a:fillRect/>
           </a:stretch>
         </p:blipFill>
         <p:spPr>
           <a:xfrm>
-            <a:off x="6143877" y="3004463"/>
-            <a:ext cx="2928407" cy="2643675"/>
+            <a:off x="4900000" y="4700000"/>
+            <a:ext cx="4150000" cy="1850000"/>
           </a:xfrm>
           <a:prstGeom prst="rect">
             <a:avLst/>
           </a:prstGeom>
-          <a:ln/>
+          <a:ln w="12700">
+            <a:solidFill>
+              <a:srgbClr val="CCCCCC"/>
+            </a:solidFill>
+          </a:ln>
         </p:spPr>
       </p:pic>
     </p:spTree>
@@ -21357,7 +21450,7 @@
                 <a:cs typeface="Gill Sans"/>
                 <a:sym typeface="Gill Sans"/>
               </a:rPr>
-              <a:t>CREACIÓN DEL PROYECTO – CLIENTE MOVIL</a:t>
+              <a:t>CREACIÓN DEL PROYECTO – CLIENTE MÓVIL</a:t>
             </a:r>
             <a:endParaRPr sz="1400" b="0" i="0" u="none" strike="noStrike" cap="none">
               <a:solidFill>
@@ -21522,73 +21615,58 @@
               <a:buNone/>
             </a:pPr>
             <a:r>
-              <a:rPr lang="es-ES" b="1" dirty="0">
+              <a:rPr lang="es-ES" b="1">
                 <a:latin typeface="Cambria"/>
                 <a:ea typeface="Cambria"/>
                 <a:cs typeface="Cambria"/>
                 <a:sym typeface="Cambria"/>
               </a:rPr>
-              <a:t>1.4 </a:t>
-            </a:r>
-            <a:r>
-              <a:rPr lang="es-ES" sz="1800" b="1" dirty="0">
+              <a:t>1.4 CREACIÓN DEL PROYECTO – CLIENTE ESCRITORIO</a:t>
+            </a:r>
+          </a:p>
+          <a:p>
+            <a:pPr marL="0" marR="0" lvl="0" indent="0" algn="just" rtl="0">
+              <a:lnSpc>
+                <a:spcPct val="107000"/>
+              </a:lnSpc>
+              <a:spcBef>
+                <a:spcPts val="0"/>
+              </a:spcBef>
+              <a:spcAft>
+                <a:spcPts val="0"/>
+              </a:spcAft>
+              <a:buSzPct val="118709"/>
+              <a:buNone/>
+            </a:pPr>
+            <a:endParaRPr lang="es-ES" b="1">
+              <a:latin typeface="Cambria"/>
+              <a:ea typeface="Cambria"/>
+              <a:cs typeface="Cambria"/>
+              <a:sym typeface="Cambria"/>
+            </a:endParaRPr>
+          </a:p>
+          <a:p>
+            <a:pPr marL="0" marR="0" lvl="0" indent="0" algn="just" rtl="0">
+              <a:lnSpc>
+                <a:spcPct val="107000"/>
+              </a:lnSpc>
+              <a:spcBef>
+                <a:spcPts val="0"/>
+              </a:spcBef>
+              <a:spcAft>
+                <a:spcPts val="0"/>
+              </a:spcAft>
+              <a:buSzPct val="118709"/>
+              <a:buNone/>
+            </a:pPr>
+            <a:r>
+              <a:rPr lang="es-ES" b="1">
                 <a:latin typeface="Cambria"/>
                 <a:ea typeface="Cambria"/>
                 <a:cs typeface="Cambria"/>
                 <a:sym typeface="Cambria"/>
               </a:rPr>
-              <a:t>	CREACIÓN DEL PROYECTO – CLIENTE </a:t>
-            </a:r>
-            <a:r>
-              <a:rPr lang="es-ES" b="1" dirty="0">
-                <a:latin typeface="Cambria"/>
-                <a:ea typeface="Cambria"/>
-                <a:cs typeface="Cambria"/>
-                <a:sym typeface="Cambria"/>
-              </a:rPr>
-              <a:t>ESCRITORIO</a:t>
-            </a:r>
-            <a:br>
-              <a:rPr lang="es-ES" sz="1800" b="1" dirty="0">
-                <a:latin typeface="Cambria"/>
-                <a:ea typeface="Cambria"/>
-                <a:cs typeface="Cambria"/>
-                <a:sym typeface="Cambria"/>
-              </a:rPr>
-            </a:br>
-            <a:endParaRPr b="1" dirty="0"/>
-          </a:p>
-          <a:p>
-            <a:pPr marL="457200" lvl="0" indent="-317981" algn="just" rtl="0">
-              <a:lnSpc>
-                <a:spcPct val="107000"/>
-              </a:lnSpc>
-              <a:spcBef>
-                <a:spcPts val="0"/>
-              </a:spcBef>
-              <a:spcAft>
-                <a:spcPts val="0"/>
-              </a:spcAft>
-              <a:buSzPct val="91998"/>
-              <a:buChar char="●"/>
-            </a:pPr>
-            <a:r>
-              <a:rPr lang="es-MX" dirty="0">
-                <a:latin typeface="Cambria"/>
-                <a:ea typeface="Cambria"/>
-                <a:cs typeface="Cambria"/>
-                <a:sym typeface="Cambria"/>
-              </a:rPr>
-              <a:t>El proyecto se crea de igual manera que el cliente de consola Java </a:t>
-            </a:r>
-            <a:r>
-              <a:rPr lang="es-MX" dirty="0" err="1">
-                <a:latin typeface="Cambria"/>
-                <a:ea typeface="Cambria"/>
-                <a:cs typeface="Cambria"/>
-                <a:sym typeface="Cambria"/>
-              </a:rPr>
-              <a:t>Application</a:t>
+              <a:t>Crea la aplicación Java de escritorio con Maven. La interfaz Swing consume los mismos endpoints SOAP y sigue el patrón Modelo-Vista-Controlador.</a:t>
             </a:r>
             <a:endParaRPr lang="es-MX" dirty="0">
               <a:latin typeface="Cambria"/>
@@ -21601,19 +21679,20 @@
       </p:sp>
       <p:pic>
         <p:nvPicPr>
-          <p:cNvPr id="6" name="image8.png">
-            <a:extLst>
-              <a:ext uri="{FF2B5EF4-FFF2-40B4-BE49-F238E27FC236}">
-                <a16:creationId xmlns:a16="http://schemas.microsoft.com/office/drawing/2014/main" id="{0E3249E6-53D8-43ED-B978-3E4B0E9D73F6}"/>
-              </a:ext>
-            </a:extLst>
-          </p:cNvPr>
-          <p:cNvPicPr/>
+          <p:cNvPr id="3" name="Captura propia - desktop-project-tree"/>
+          <p:cNvPicPr>
+            <a:picLocks/>
+          </p:cNvPicPr>
           <p:nvPr/>
         </p:nvPicPr>
         <p:blipFill>
-          <a:blip r:embed="rId3"/>
-          <a:srcRect/>
+          <a:blip r:embed="rId3">
+            <a:extLst>
+              <a:ext uri="{28A0092B-C50C-407E-A947-70E740481C1C}">
+                <a14:useLocalDpi xmlns:a14="http://schemas.microsoft.com/office/drawing/2010/main" val="0"/>
+              </a:ext>
+            </a:extLst>
+          </a:blip>
           <a:stretch>
             <a:fillRect/>
           </a:stretch>
@@ -21621,12 +21700,11 @@
         <p:spPr>
           <a:xfrm>
             <a:off x="2544819" y="3270983"/>
-            <a:ext cx="4144010" cy="2828290"/>
+            <a:ext cx="4140200" cy="2832100"/>
           </a:xfrm>
           <a:prstGeom prst="rect">
             <a:avLst/>
           </a:prstGeom>
-          <a:ln/>
         </p:spPr>
       </p:pic>
     </p:spTree>
@@ -22048,7 +22126,7 @@
                 <a:cs typeface="Gill Sans"/>
                 <a:sym typeface="Gill Sans"/>
               </a:rPr>
-              <a:t>CREACIÓN DEL PROYECTO – CLIENTE MOVIL</a:t>
+              <a:t>CREACIÓN DEL PROYECTO – CLIENTE MÓVIL</a:t>
             </a:r>
             <a:endParaRPr sz="1400" b="0" i="0" u="none" strike="noStrike" cap="none">
               <a:solidFill>
@@ -22214,13 +22292,13 @@
               <a:buChar char="●"/>
             </a:pPr>
             <a:r>
-              <a:rPr lang="es-MX" dirty="0">
+              <a:rPr lang="es-ES">
                 <a:latin typeface="Cambria"/>
                 <a:ea typeface="Cambria"/>
                 <a:cs typeface="Cambria"/>
                 <a:sym typeface="Cambria"/>
               </a:rPr>
-              <a:t>El cliente de escritorio con interfaz gráfica se estructuró bajo el patrón MVC. Se crearon los paquetes modelo, vista y controlador para separar el diseño visual de la lógica de consumo del servicio web.</a:t>
+              <a:t>El cliente Swing organiza la interfaz, el estado de conversión y el consumo SOAP con el patrón MVC.</a:t>
             </a:r>
             <a:endParaRPr lang="es-MX" sz="1800" dirty="0">
               <a:latin typeface="Cambria"/>
@@ -22231,42 +22309,12 @@
           </a:p>
         </p:txBody>
       </p:sp>
-      <p:pic>
-        <p:nvPicPr>
-          <p:cNvPr id="6" name="image14.png">
-            <a:extLst>
-              <a:ext uri="{FF2B5EF4-FFF2-40B4-BE49-F238E27FC236}">
-                <a16:creationId xmlns:a16="http://schemas.microsoft.com/office/drawing/2014/main" id="{476A83D9-2A28-4174-9A6B-007610FFEE78}"/>
-              </a:ext>
-            </a:extLst>
-          </p:cNvPr>
-          <p:cNvPicPr/>
-          <p:nvPr/>
-        </p:nvPicPr>
-        <p:blipFill>
-          <a:blip r:embed="rId3"/>
-          <a:srcRect/>
-          <a:stretch>
-            <a:fillRect/>
-          </a:stretch>
-        </p:blipFill>
-        <p:spPr>
-          <a:xfrm>
-            <a:off x="5088311" y="2609850"/>
-            <a:ext cx="3019425" cy="1028700"/>
-          </a:xfrm>
-          <a:prstGeom prst="rect">
-            <a:avLst/>
-          </a:prstGeom>
-          <a:ln/>
-        </p:spPr>
-      </p:pic>
       <p:sp>
         <p:nvSpPr>
           <p:cNvPr id="12" name="CuadroTexto 11">
             <a:extLst>
               <a:ext uri="{FF2B5EF4-FFF2-40B4-BE49-F238E27FC236}">
-                <a16:creationId xmlns:a16="http://schemas.microsoft.com/office/drawing/2014/main" id="{04F47827-A8E1-4FFA-A232-83861B9D7BF5}"/>
+                <a16:creationId xmlns:a16="http://schemas.microsoft.com/office/drawing/2014/main" xmlns="" id="{04F47827-A8E1-4FFA-A232-83861B9D7BF5}"/>
               </a:ext>
             </a:extLst>
           </p:cNvPr>
@@ -22276,7 +22324,7 @@
         <p:spPr>
           <a:xfrm>
             <a:off x="762109" y="3269217"/>
-            <a:ext cx="1712150" cy="1692771"/>
+            <a:ext cx="1712150" cy="1477328"/>
           </a:xfrm>
           <a:prstGeom prst="rect">
             <a:avLst/>
@@ -22290,7 +22338,7 @@
           <a:lstStyle/>
           <a:p>
             <a:r>
-              <a:rPr kumimoji="0" lang="es-MX" sz="1800" b="0" i="0" u="none" strike="noStrike" kern="0" cap="none" spc="0" normalizeH="0" baseline="0" noProof="0" dirty="0">
+              <a:rPr kumimoji="0" lang="es-ES" sz="1800" b="0" i="0" u="none" strike="noStrike" kern="0" cap="none" spc="0" normalizeH="0" baseline="0" noProof="0">
                 <a:ln>
                   <a:noFill/>
                 </a:ln>
@@ -22305,50 +22353,18 @@
                 <a:cs typeface="Cambria"/>
                 <a:sym typeface="Cambria"/>
               </a:rPr>
-              <a:t>El paquete modelo solo se manejan clases auxiliares y enumeradores</a:t>
-            </a:r>
-          </a:p>
-          <a:p>
+              <a:t>Modelo: conserva los datos de sesión y de la conversión.</a:t>
+            </a:r>
             <a:endParaRPr lang="es-EC" dirty="0"/>
           </a:p>
         </p:txBody>
       </p:sp>
-      <p:pic>
-        <p:nvPicPr>
-          <p:cNvPr id="13" name="image3.png">
-            <a:extLst>
-              <a:ext uri="{FF2B5EF4-FFF2-40B4-BE49-F238E27FC236}">
-                <a16:creationId xmlns:a16="http://schemas.microsoft.com/office/drawing/2014/main" id="{30815916-71A2-41C6-91F1-15E08409BD0E}"/>
-              </a:ext>
-            </a:extLst>
-          </p:cNvPr>
-          <p:cNvPicPr/>
-          <p:nvPr/>
-        </p:nvPicPr>
-        <p:blipFill>
-          <a:blip r:embed="rId4"/>
-          <a:srcRect/>
-          <a:stretch>
-            <a:fillRect/>
-          </a:stretch>
-        </p:blipFill>
-        <p:spPr>
-          <a:xfrm>
-            <a:off x="2611811" y="3836431"/>
-            <a:ext cx="2476500" cy="342900"/>
-          </a:xfrm>
-          <a:prstGeom prst="rect">
-            <a:avLst/>
-          </a:prstGeom>
-          <a:ln/>
-        </p:spPr>
-      </p:pic>
       <p:sp>
         <p:nvSpPr>
           <p:cNvPr id="19" name="CuadroTexto 18">
             <a:extLst>
               <a:ext uri="{FF2B5EF4-FFF2-40B4-BE49-F238E27FC236}">
-                <a16:creationId xmlns:a16="http://schemas.microsoft.com/office/drawing/2014/main" id="{4AE216B3-B851-4BA3-899E-396EB3A18BA2}"/>
+                <a16:creationId xmlns:a16="http://schemas.microsoft.com/office/drawing/2014/main" xmlns="" id="{4AE216B3-B851-4BA3-899E-396EB3A18BA2}"/>
               </a:ext>
             </a:extLst>
           </p:cNvPr>
@@ -22358,7 +22374,7 @@
         <p:spPr>
           <a:xfrm>
             <a:off x="6214191" y="4553152"/>
-            <a:ext cx="2633381" cy="1477328"/>
+            <a:ext cx="2633381" cy="923330"/>
           </a:xfrm>
           <a:prstGeom prst="rect">
             <a:avLst/>
@@ -22372,7 +22388,7 @@
           <a:lstStyle/>
           <a:p>
             <a:r>
-              <a:rPr kumimoji="0" lang="es-MX" sz="1800" b="0" i="0" u="none" strike="noStrike" kern="0" cap="none" spc="0" normalizeH="0" baseline="0" noProof="0" dirty="0">
+              <a:rPr kumimoji="0" lang="es-ES" sz="1800" b="0" i="0" u="none" strike="noStrike" kern="0" cap="none" spc="0" normalizeH="0" baseline="0" noProof="0">
                 <a:ln>
                   <a:noFill/>
                 </a:ln>
@@ -22387,31 +22403,24 @@
                 <a:cs typeface="Cambria"/>
                 <a:sym typeface="Cambria"/>
               </a:rPr>
-              <a:t>En el paquete controlador se crearon las clases que capturan los datos ingresados en las ventanas</a:t>
+              <a:t>Controlador: valida entradas y coordina la llamada SOAP.</a:t>
             </a:r>
             <a:endParaRPr lang="es-EC" dirty="0"/>
           </a:p>
         </p:txBody>
       </p:sp>
-      <p:pic>
-        <p:nvPicPr>
-          <p:cNvPr id="20" name="image24.png">
+      <p:sp>
+        <p:nvSpPr>
+          <p:cNvPr id="3" name="Código de controlador (texto)">
             <a:extLst>
               <a:ext uri="{FF2B5EF4-FFF2-40B4-BE49-F238E27FC236}">
-                <a16:creationId xmlns:a16="http://schemas.microsoft.com/office/drawing/2014/main" id="{5B11FC56-51AA-41A2-9AF4-1F05A14F2B30}"/>
+                <a16:creationId xmlns:a16="http://schemas.microsoft.com/office/drawing/2014/main" xmlns="" id="{8D27FDBE-3262-425D-901F-736C75C67653}"/>
               </a:ext>
             </a:extLst>
           </p:cNvPr>
-          <p:cNvPicPr/>
+          <p:cNvSpPr/>
           <p:nvPr/>
-        </p:nvPicPr>
-        <p:blipFill>
-          <a:blip r:embed="rId5"/>
-          <a:srcRect/>
-          <a:stretch>
-            <a:fillRect/>
-          </a:stretch>
-        </p:blipFill>
+        </p:nvSpPr>
         <p:spPr>
           <a:xfrm>
             <a:off x="5925023" y="3893361"/>
@@ -22420,25 +22429,181 @@
           <a:prstGeom prst="rect">
             <a:avLst/>
           </a:prstGeom>
-          <a:ln/>
+          <a:solidFill>
+            <a:srgbClr val="FFFFFF"/>
+          </a:solidFill>
+          <a:ln w="15875">
+            <a:solidFill>
+              <a:srgbClr val="D9D9D9"/>
+            </a:solidFill>
+          </a:ln>
+        </p:spPr>
+        <p:style>
+          <a:lnRef idx="2">
+            <a:schemeClr val="accent1">
+              <a:shade val="50000"/>
+            </a:schemeClr>
+          </a:lnRef>
+          <a:fillRef idx="1">
+            <a:schemeClr val="accent1"/>
+          </a:fillRef>
+          <a:effectRef idx="0">
+            <a:schemeClr val="accent1"/>
+          </a:effectRef>
+          <a:fontRef idx="minor">
+            <a:schemeClr val="lt1"/>
+          </a:fontRef>
+        </p:style>
+        <p:txBody>
+          <a:bodyPr wrap="square" lIns="38100" tIns="12700" rIns="25400" bIns="12700" rtlCol="0" anchor="ctr">
+            <a:noAutofit/>
+          </a:bodyPr>
+          <a:lstStyle/>
+          <a:p>
+            <a:r>
+              <a:rPr lang="pt-BR" sz="700" smtClean="0">
+                <a:solidFill>
+                  <a:srgbClr val="000000"/>
+                </a:solidFill>
+                <a:latin typeface="Consolas" panose="020B0609020204030204" pitchFamily="49" charset="0"/>
+              </a:rPr>
+              <a:t>String token = sessionModel.getToken();</a:t>
+            </a:r>
+            <a:endParaRPr lang="en-US" sz="700">
+              <a:solidFill>
+                <a:srgbClr val="000000"/>
+              </a:solidFill>
+              <a:latin typeface="Consolas" panose="020B0609020204030204" pitchFamily="49" charset="0"/>
+            </a:endParaRPr>
+          </a:p>
+        </p:txBody>
+      </p:sp>
+      <p:sp>
+        <p:nvSpPr>
+          <p:cNvPr id="4" name="Código de modelo (texto)">
+            <a:extLst>
+              <a:ext uri="{FF2B5EF4-FFF2-40B4-BE49-F238E27FC236}">
+                <a16:creationId xmlns:a16="http://schemas.microsoft.com/office/drawing/2014/main" xmlns="" id="{D9BA546A-1E15-4A80-AA57-994B60F099F9}"/>
+              </a:ext>
+            </a:extLst>
+          </p:cNvPr>
+          <p:cNvSpPr/>
+          <p:nvPr/>
+        </p:nvSpPr>
+        <p:spPr>
+          <a:xfrm>
+            <a:off x="2611811" y="3836431"/>
+            <a:ext cx="2476500" cy="342900"/>
+          </a:xfrm>
+          <a:prstGeom prst="rect">
+            <a:avLst/>
+          </a:prstGeom>
+          <a:solidFill>
+            <a:srgbClr val="FFFFFF"/>
+          </a:solidFill>
+          <a:ln w="15875">
+            <a:solidFill>
+              <a:srgbClr val="D9D9D9"/>
+            </a:solidFill>
+          </a:ln>
+        </p:spPr>
+        <p:style>
+          <a:lnRef idx="2">
+            <a:schemeClr val="accent1">
+              <a:shade val="50000"/>
+            </a:schemeClr>
+          </a:lnRef>
+          <a:fillRef idx="1">
+            <a:schemeClr val="accent1"/>
+          </a:fillRef>
+          <a:effectRef idx="0">
+            <a:schemeClr val="accent1"/>
+          </a:effectRef>
+          <a:fontRef idx="minor">
+            <a:schemeClr val="lt1"/>
+          </a:fontRef>
+        </p:style>
+        <p:txBody>
+          <a:bodyPr wrap="square" lIns="38100" tIns="12700" rIns="25400" bIns="12700" rtlCol="0" anchor="ctr">
+            <a:noAutofit/>
+          </a:bodyPr>
+          <a:lstStyle/>
+          <a:p>
+            <a:r>
+              <a:rPr lang="nb-NO" sz="700" smtClean="0">
+                <a:solidFill>
+                  <a:srgbClr val="000000"/>
+                </a:solidFill>
+                <a:latin typeface="Consolas" panose="020B0609020204030204" pitchFamily="49" charset="0"/>
+              </a:rPr>
+              <a:t>private String usuario;</a:t>
+            </a:r>
+          </a:p>
+          <a:p>
+            <a:r>
+              <a:rPr lang="nb-NO" sz="700" smtClean="0">
+                <a:solidFill>
+                  <a:srgbClr val="000000"/>
+                </a:solidFill>
+                <a:latin typeface="Consolas" panose="020B0609020204030204" pitchFamily="49" charset="0"/>
+              </a:rPr>
+              <a:t>private String token;</a:t>
+            </a:r>
+            <a:endParaRPr lang="en-US" sz="700">
+              <a:solidFill>
+                <a:srgbClr val="000000"/>
+              </a:solidFill>
+              <a:latin typeface="Consolas" panose="020B0609020204030204" pitchFamily="49" charset="0"/>
+            </a:endParaRPr>
+          </a:p>
+        </p:txBody>
+      </p:sp>
+      <p:pic>
+        <p:nvPicPr>
+          <p:cNvPr id="6" name="Captura propia - desktop-mvc-tree"/>
+          <p:cNvPicPr>
+            <a:picLocks/>
+          </p:cNvPicPr>
+          <p:nvPr/>
+        </p:nvPicPr>
+        <p:blipFill>
+          <a:blip r:embed="rId3">
+            <a:extLst>
+              <a:ext uri="{28A0092B-C50C-407E-A947-70E740481C1C}">
+                <a14:useLocalDpi xmlns:a14="http://schemas.microsoft.com/office/drawing/2010/main" val="0"/>
+              </a:ext>
+            </a:extLst>
+          </a:blip>
+          <a:stretch>
+            <a:fillRect/>
+          </a:stretch>
+        </p:blipFill>
+        <p:spPr>
+          <a:xfrm>
+            <a:off x="5088311" y="2609850"/>
+            <a:ext cx="3022600" cy="1104900"/>
+          </a:xfrm>
+          <a:prstGeom prst="rect">
+            <a:avLst/>
+          </a:prstGeom>
         </p:spPr>
       </p:pic>
       <p:pic>
         <p:nvPicPr>
-          <p:cNvPr id="14" name="Imagen 13">
-            <a:extLst>
-              <a:ext uri="{FF2B5EF4-FFF2-40B4-BE49-F238E27FC236}">
-                <a16:creationId xmlns:a16="http://schemas.microsoft.com/office/drawing/2014/main" id="{72325FBB-9CE0-475A-ADB8-5593A8B0E7F2}"/>
-              </a:ext>
-            </a:extLst>
-          </p:cNvPr>
+          <p:cNvPr id="7" name="Captura propia - desktop-client-classes"/>
           <p:cNvPicPr>
-            <a:picLocks noChangeAspect="1"/>
+            <a:picLocks/>
           </p:cNvPicPr>
           <p:nvPr/>
         </p:nvPicPr>
         <p:blipFill>
-          <a:blip r:embed="rId6"/>
+          <a:blip r:embed="rId4">
+            <a:extLst>
+              <a:ext uri="{28A0092B-C50C-407E-A947-70E740481C1C}">
+                <a14:useLocalDpi xmlns:a14="http://schemas.microsoft.com/office/drawing/2010/main" val="0"/>
+              </a:ext>
+            </a:extLst>
+          </a:blip>
           <a:stretch>
             <a:fillRect/>
           </a:stretch>
@@ -22446,7 +22611,7 @@
         <p:spPr>
           <a:xfrm>
             <a:off x="2474259" y="4377212"/>
-            <a:ext cx="3666875" cy="2355365"/>
+            <a:ext cx="3670300" cy="2349500"/>
           </a:xfrm>
           <a:prstGeom prst="rect">
             <a:avLst/>
@@ -22872,7 +23037,7 @@
                 <a:cs typeface="Gill Sans"/>
                 <a:sym typeface="Gill Sans"/>
               </a:rPr>
-              <a:t>CREACIÓN DEL PROYECTO – CLIENTE MOVIL</a:t>
+              <a:t>CREACIÓN DEL PROYECTO – CLIENTE MÓVIL</a:t>
             </a:r>
             <a:endParaRPr sz="1400" b="0" i="0" u="none" strike="noStrike" cap="none">
               <a:solidFill>
@@ -23038,28 +23203,12 @@
               <a:buChar char="●"/>
             </a:pPr>
             <a:r>
-              <a:rPr lang="es-EC" sz="1800" dirty="0">
+              <a:rPr lang="es-ES" sz="1800">
                 <a:effectLst/>
                 <a:latin typeface="Calibri" panose="020F0502020204030204" pitchFamily="34" charset="0"/>
                 <a:ea typeface="Calibri" panose="020F0502020204030204" pitchFamily="34" charset="0"/>
               </a:rPr>
-              <a:t>En el paquete vista se diseñaron las interfaces gráficas utilizando los formularios (</a:t>
-            </a:r>
-            <a:r>
-              <a:rPr lang="es-EC" sz="1800" dirty="0" err="1">
-                <a:effectLst/>
-                <a:latin typeface="Calibri" panose="020F0502020204030204" pitchFamily="34" charset="0"/>
-                <a:ea typeface="Calibri" panose="020F0502020204030204" pitchFamily="34" charset="0"/>
-              </a:rPr>
-              <a:t>JFrames</a:t>
-            </a:r>
-            <a:r>
-              <a:rPr lang="es-EC" sz="1800" dirty="0">
-                <a:effectLst/>
-                <a:latin typeface="Calibri" panose="020F0502020204030204" pitchFamily="34" charset="0"/>
-                <a:ea typeface="Calibri" panose="020F0502020204030204" pitchFamily="34" charset="0"/>
-              </a:rPr>
-              <a:t>) de NetBeans.</a:t>
+              <a:t>La vista Swing contiene las ventanas de autenticación y conversión. Los controles permiten seleccionar magnitud y unidades, ingresar el valor y consultar el resultado.</a:t>
             </a:r>
             <a:endParaRPr sz="1800" dirty="0">
               <a:latin typeface="Cambria"/>
@@ -23072,13 +23221,7 @@
       </p:sp>
       <p:pic>
         <p:nvPicPr>
-          <p:cNvPr id="3" name="Imagen 2">
-            <a:extLst>
-              <a:ext uri="{FF2B5EF4-FFF2-40B4-BE49-F238E27FC236}">
-                <a16:creationId xmlns:a16="http://schemas.microsoft.com/office/drawing/2014/main" id="{2C03548C-4879-49A7-99D2-2CA15756FB48}"/>
-              </a:ext>
-            </a:extLst>
-          </p:cNvPr>
+          <p:cNvPr id="2" name="Captura 15 evidencia_ti-1-1-soap-java_s15-2.png" descr="Cliente de escritorio SOAP Java: conversión"/>
           <p:cNvPicPr>
             <a:picLocks noChangeAspect="1"/>
           </p:cNvPicPr>
@@ -23092,8 +23235,8 @@
         </p:blipFill>
         <p:spPr>
           <a:xfrm>
-            <a:off x="699248" y="2831802"/>
-            <a:ext cx="8424537" cy="3324041"/>
+            <a:off x="2870858" y="2831802"/>
+            <a:ext cx="4081317" cy="3324041"/>
           </a:xfrm>
           <a:prstGeom prst="rect">
             <a:avLst/>
@@ -23519,7 +23662,7 @@
                 <a:cs typeface="Gill Sans"/>
                 <a:sym typeface="Gill Sans"/>
               </a:rPr>
-              <a:t>CREACIÓN DEL PROYECTO – CLIENTE MOVIL</a:t>
+              <a:t>CREACIÓN DEL PROYECTO – CLIENTE MÓVIL</a:t>
             </a:r>
             <a:endParaRPr sz="1400" b="0" i="0" u="none" strike="noStrike" cap="none">
               <a:solidFill>
@@ -23684,37 +23827,13 @@
               <a:buChar char="●"/>
             </a:pPr>
             <a:r>
-              <a:rPr lang="es-ES" dirty="0">
+              <a:rPr lang="es-ES">
                 <a:latin typeface="Cambria"/>
                 <a:ea typeface="Cambria"/>
                 <a:cs typeface="Cambria"/>
                 <a:sym typeface="Cambria"/>
               </a:rPr>
-              <a:t>Una vez que el servicio se ejecuta de forma paralela con el servidor</a:t>
-            </a:r>
-          </a:p>
-          <a:p>
-            <a:pPr marL="457200" lvl="0" indent="-333756" algn="just" rtl="0">
-              <a:lnSpc>
-                <a:spcPct val="107000"/>
-              </a:lnSpc>
-              <a:spcBef>
-                <a:spcPts val="0"/>
-              </a:spcBef>
-              <a:spcAft>
-                <a:spcPts val="0"/>
-              </a:spcAft>
-              <a:buSzPts val="1656"/>
-              <a:buChar char="●"/>
-            </a:pPr>
-            <a:r>
-              <a:rPr lang="es-ES" dirty="0">
-                <a:latin typeface="Cambria"/>
-                <a:ea typeface="Cambria"/>
-                <a:cs typeface="Cambria"/>
-                <a:sym typeface="Cambria"/>
-              </a:rPr>
-              <a:t>Se ingresan las credenciales válidas y al dar clic en Ingresar se presenta la pantalla de conversión</a:t>
+              <a:t>Inicio de sesión del cliente de escritorio. Ingresa MONSTER / MONSTER9 para acceder al conversor.</a:t>
             </a:r>
             <a:endParaRPr dirty="0">
               <a:latin typeface="Cambria"/>
@@ -23727,13 +23846,7 @@
       </p:sp>
       <p:pic>
         <p:nvPicPr>
-          <p:cNvPr id="6" name="image9.png">
-            <a:extLst>
-              <a:ext uri="{FF2B5EF4-FFF2-40B4-BE49-F238E27FC236}">
-                <a16:creationId xmlns:a16="http://schemas.microsoft.com/office/drawing/2014/main" id="{C3B60F47-85DF-433D-9661-8B43DD4D2AB6}"/>
-              </a:ext>
-            </a:extLst>
-          </p:cNvPr>
+          <p:cNvPr id="301" name="soap_cliesc_login.png"/>
           <p:cNvPicPr/>
           <p:nvPr/>
         </p:nvPicPr>
@@ -23746,13 +23859,17 @@
         </p:blipFill>
         <p:spPr>
           <a:xfrm>
-            <a:off x="581192" y="2329030"/>
-            <a:ext cx="5218973" cy="3336664"/>
+            <a:off x="1466800" y="2100000"/>
+            <a:ext cx="3730000" cy="4200000"/>
           </a:xfrm>
           <a:prstGeom prst="rect">
             <a:avLst/>
           </a:prstGeom>
-          <a:ln/>
+          <a:ln w="12700">
+            <a:solidFill>
+              <a:srgbClr val="CCCCCC"/>
+            </a:solidFill>
+          </a:ln>
         </p:spPr>
       </p:pic>
     </p:spTree>
@@ -24174,7 +24291,7 @@
                 <a:cs typeface="Gill Sans"/>
                 <a:sym typeface="Gill Sans"/>
               </a:rPr>
-              <a:t>CREACIÓN DEL PROYECTO – CLIENTE MOVIL</a:t>
+              <a:t>CREACIÓN DEL PROYECTO – CLIENTE MÓVIL</a:t>
             </a:r>
             <a:endParaRPr sz="1400" b="0" i="0" u="none" strike="noStrike" cap="none">
               <a:solidFill>
@@ -24339,13 +24456,13 @@
               <a:buChar char="●"/>
             </a:pPr>
             <a:r>
-              <a:rPr lang="es-ES" dirty="0">
+              <a:rPr lang="es-ES">
                 <a:latin typeface="Cambria"/>
                 <a:ea typeface="Cambria"/>
                 <a:cs typeface="Cambria"/>
                 <a:sym typeface="Cambria"/>
               </a:rPr>
-              <a:t>En esta pantalla se presentan los tipos de unidades disponibles para conversión y las unidades de origen y destino.</a:t>
+              <a:t>Formulario de conversión. Selecciona la magnitud, las unidades de origen y destino, e ingresa el valor que se enviará al servicio SOAP.</a:t>
             </a:r>
             <a:endParaRPr dirty="0">
               <a:latin typeface="Cambria"/>
@@ -24358,13 +24475,7 @@
       </p:sp>
       <p:pic>
         <p:nvPicPr>
-          <p:cNvPr id="6" name="image2.png">
-            <a:extLst>
-              <a:ext uri="{FF2B5EF4-FFF2-40B4-BE49-F238E27FC236}">
-                <a16:creationId xmlns:a16="http://schemas.microsoft.com/office/drawing/2014/main" id="{5CDAE7E6-9ED3-4D97-82FC-F7BE927514A6}"/>
-              </a:ext>
-            </a:extLst>
-          </p:cNvPr>
+          <p:cNvPr id="302" name="soap_cliesc_conversion.png"/>
           <p:cNvPicPr/>
           <p:nvPr/>
         </p:nvPicPr>
@@ -24377,13 +24488,17 @@
         </p:blipFill>
         <p:spPr>
           <a:xfrm>
-            <a:off x="1131103" y="2513572"/>
-            <a:ext cx="3898097" cy="3116263"/>
+            <a:off x="650000" y="2200000"/>
+            <a:ext cx="4800000" cy="3910000"/>
           </a:xfrm>
           <a:prstGeom prst="rect">
             <a:avLst/>
           </a:prstGeom>
-          <a:ln/>
+          <a:ln w="12700">
+            <a:solidFill>
+              <a:srgbClr val="CCCCCC"/>
+            </a:solidFill>
+          </a:ln>
         </p:spPr>
       </p:pic>
     </p:spTree>
@@ -24805,7 +24920,7 @@
                 <a:cs typeface="Gill Sans"/>
                 <a:sym typeface="Gill Sans"/>
               </a:rPr>
-              <a:t>CREACIÓN DEL PROYECTO – CLIENTE MOVIL</a:t>
+              <a:t>CREACIÓN DEL PROYECTO – CLIENTE MÓVIL</a:t>
             </a:r>
             <a:endParaRPr sz="1400" b="0" i="0" u="none" strike="noStrike" cap="none">
               <a:solidFill>
@@ -24970,7 +25085,7 @@
               <a:buNone/>
             </a:pPr>
             <a:r>
-              <a:rPr lang="es-ES" sz="1800" b="1" i="0" u="none" strike="noStrike" cap="none" dirty="0">
+              <a:rPr lang="es-ES" sz="1800" b="1" i="0" u="none" strike="noStrike" cap="none">
                 <a:solidFill>
                   <a:srgbClr val="3D3D3D"/>
                 </a:solidFill>
@@ -24979,20 +25094,28 @@
                 <a:cs typeface="Cambria"/>
                 <a:sym typeface="Cambria"/>
               </a:rPr>
-              <a:t>1.5 	CREACIÓN DEL PROYECTO – CLIENTE WEB</a:t>
-            </a:r>
-            <a:br>
-              <a:rPr lang="es-ES" sz="1800" b="1" i="0" u="none" strike="noStrike" cap="none" dirty="0">
-                <a:solidFill>
-                  <a:srgbClr val="3D3D3D"/>
-                </a:solidFill>
-                <a:latin typeface="Cambria"/>
-                <a:ea typeface="Cambria"/>
-                <a:cs typeface="Cambria"/>
-                <a:sym typeface="Cambria"/>
-              </a:rPr>
-            </a:br>
-            <a:endParaRPr sz="2000" b="0" i="0" u="none" strike="noStrike" cap="none" dirty="0">
+              <a:t>1.5 CREACIÓN DEL PROYECTO – CLIENTE WEB</a:t>
+            </a:r>
+          </a:p>
+          <a:p>
+            <a:pPr marL="0" marR="0" lvl="0" indent="0" algn="just" rtl="0">
+              <a:lnSpc>
+                <a:spcPct val="107000"/>
+              </a:lnSpc>
+              <a:spcBef>
+                <a:spcPts val="0"/>
+              </a:spcBef>
+              <a:spcAft>
+                <a:spcPts val="0"/>
+              </a:spcAft>
+              <a:buClr>
+                <a:srgbClr val="000000"/>
+              </a:buClr>
+              <a:buSzPct val="100000"/>
+              <a:buFont typeface="Arial"/>
+              <a:buNone/>
+            </a:pPr>
+            <a:endParaRPr lang="es-ES" sz="1800" b="1" i="0" u="none" strike="noStrike" cap="none">
               <a:solidFill>
                 <a:srgbClr val="3D3D3D"/>
               </a:solidFill>
@@ -25003,7 +25126,7 @@
             </a:endParaRPr>
           </a:p>
           <a:p>
-            <a:pPr marL="457200" lvl="0" indent="-307975" algn="just" rtl="0">
+            <a:pPr marL="0" marR="0" lvl="0" indent="0" algn="just" rtl="0">
               <a:lnSpc>
                 <a:spcPct val="107000"/>
               </a:lnSpc>
@@ -25014,14 +25137,14 @@
                 <a:spcPts val="0"/>
               </a:spcAft>
               <a:buClr>
-                <a:srgbClr val="3D3D3D"/>
+                <a:srgbClr val="000000"/>
               </a:buClr>
               <a:buSzPct val="100000"/>
-              <a:buFont typeface="Cambria"/>
-              <a:buChar char="∙"/>
-            </a:pPr>
-            <a:r>
-              <a:rPr lang="es-MX" sz="2000" dirty="0">
+              <a:buFont typeface="Arial"/>
+              <a:buNone/>
+            </a:pPr>
+            <a:r>
+              <a:rPr lang="es-ES" sz="1800" b="1" i="0" u="none" strike="noStrike" cap="none">
                 <a:solidFill>
                   <a:srgbClr val="3D3D3D"/>
                 </a:solidFill>
@@ -25030,31 +25153,7 @@
                 <a:cs typeface="Cambria"/>
                 <a:sym typeface="Cambria"/>
               </a:rPr>
-              <a:t>El proyecto se crea de igual manera que el Servicio Banquito con ‘Web </a:t>
-            </a:r>
-            <a:r>
-              <a:rPr lang="es-MX" sz="2000" dirty="0" err="1">
-                <a:solidFill>
-                  <a:srgbClr val="3D3D3D"/>
-                </a:solidFill>
-                <a:latin typeface="Cambria"/>
-                <a:ea typeface="Cambria"/>
-                <a:cs typeface="Cambria"/>
-                <a:sym typeface="Cambria"/>
-              </a:rPr>
-              <a:t>Application</a:t>
-            </a:r>
-            <a:r>
-              <a:rPr lang="es-MX" sz="2000" dirty="0">
-                <a:solidFill>
-                  <a:srgbClr val="3D3D3D"/>
-                </a:solidFill>
-                <a:latin typeface="Cambria"/>
-                <a:ea typeface="Cambria"/>
-                <a:cs typeface="Cambria"/>
-                <a:sym typeface="Cambria"/>
-              </a:rPr>
-              <a:t>’.</a:t>
+              <a:t>El cliente web se despliega como ClienteWeb.war en Payara Server. Las vistas HTML/JSP presentan las pantallas; LoginServlet y ConversionServlet gestionan la sesión y las solicitudes SOAP.</a:t>
             </a:r>
             <a:endParaRPr sz="2000" dirty="0">
               <a:solidFill>
@@ -25066,150 +25165,62 @@
               <a:sym typeface="Cambria"/>
             </a:endParaRPr>
           </a:p>
-          <a:p>
-            <a:pPr marL="457200" lvl="0" indent="-307975" algn="just" rtl="0">
-              <a:lnSpc>
-                <a:spcPct val="107000"/>
-              </a:lnSpc>
-              <a:spcBef>
-                <a:spcPts val="0"/>
-              </a:spcBef>
-              <a:spcAft>
-                <a:spcPts val="0"/>
-              </a:spcAft>
-              <a:buClr>
-                <a:srgbClr val="3D3D3D"/>
-              </a:buClr>
-              <a:buSzPct val="100000"/>
-              <a:buFont typeface="Cambria"/>
-              <a:buChar char="∙"/>
-            </a:pPr>
-            <a:r>
-              <a:rPr lang="es-MX" sz="2000" dirty="0">
-                <a:solidFill>
-                  <a:srgbClr val="3D3D3D"/>
-                </a:solidFill>
-                <a:latin typeface="Cambria"/>
-                <a:ea typeface="Cambria"/>
-                <a:cs typeface="Cambria"/>
-                <a:sym typeface="Cambria"/>
-              </a:rPr>
-              <a:t>El cliente web se desarrolló siguiendo el patrón MVC utilizando </a:t>
-            </a:r>
-            <a:r>
-              <a:rPr lang="es-MX" sz="2000" dirty="0" err="1">
-                <a:solidFill>
-                  <a:srgbClr val="3D3D3D"/>
-                </a:solidFill>
-                <a:latin typeface="Cambria"/>
-                <a:ea typeface="Cambria"/>
-                <a:cs typeface="Cambria"/>
-                <a:sym typeface="Cambria"/>
-              </a:rPr>
-              <a:t>Servlets</a:t>
-            </a:r>
-            <a:r>
-              <a:rPr lang="es-MX" sz="2000" dirty="0">
-                <a:solidFill>
-                  <a:srgbClr val="3D3D3D"/>
-                </a:solidFill>
-                <a:latin typeface="Cambria"/>
-                <a:ea typeface="Cambria"/>
-                <a:cs typeface="Cambria"/>
-                <a:sym typeface="Cambria"/>
-              </a:rPr>
-              <a:t> y </a:t>
-            </a:r>
-            <a:r>
-              <a:rPr lang="es-MX" sz="2000" dirty="0" err="1">
-                <a:solidFill>
-                  <a:srgbClr val="3D3D3D"/>
-                </a:solidFill>
-                <a:latin typeface="Cambria"/>
-                <a:ea typeface="Cambria"/>
-                <a:cs typeface="Cambria"/>
-                <a:sym typeface="Cambria"/>
-              </a:rPr>
-              <a:t>JavaServer</a:t>
-            </a:r>
-            <a:r>
-              <a:rPr lang="es-MX" sz="2000" dirty="0">
-                <a:solidFill>
-                  <a:srgbClr val="3D3D3D"/>
-                </a:solidFill>
-                <a:latin typeface="Cambria"/>
-                <a:ea typeface="Cambria"/>
-                <a:cs typeface="Cambria"/>
-                <a:sym typeface="Cambria"/>
-              </a:rPr>
-              <a:t> Pages (JSP).</a:t>
-            </a:r>
-            <a:endParaRPr sz="2000" dirty="0">
-              <a:solidFill>
-                <a:srgbClr val="3D3D3D"/>
-              </a:solidFill>
-              <a:latin typeface="Cambria"/>
-              <a:ea typeface="Cambria"/>
-              <a:cs typeface="Cambria"/>
-              <a:sym typeface="Cambria"/>
-            </a:endParaRPr>
-          </a:p>
         </p:txBody>
       </p:sp>
       <p:pic>
         <p:nvPicPr>
-          <p:cNvPr id="7" name="image1.png">
-            <a:extLst>
-              <a:ext uri="{FF2B5EF4-FFF2-40B4-BE49-F238E27FC236}">
-                <a16:creationId xmlns:a16="http://schemas.microsoft.com/office/drawing/2014/main" id="{E8041391-6774-46D9-A527-1951339A5652}"/>
-              </a:ext>
-            </a:extLst>
-          </p:cNvPr>
-          <p:cNvPicPr/>
+          <p:cNvPr id="4" name="Captura propia - web-client-tree"/>
+          <p:cNvPicPr>
+            <a:picLocks/>
+          </p:cNvPicPr>
           <p:nvPr/>
         </p:nvPicPr>
         <p:blipFill>
-          <a:blip r:embed="rId3"/>
-          <a:srcRect/>
+          <a:blip r:embed="rId3">
+            <a:extLst>
+              <a:ext uri="{28A0092B-C50C-407E-A947-70E740481C1C}">
+                <a14:useLocalDpi xmlns:a14="http://schemas.microsoft.com/office/drawing/2010/main" val="0"/>
+              </a:ext>
+            </a:extLst>
+          </a:blip>
           <a:stretch>
             <a:fillRect/>
           </a:stretch>
         </p:blipFill>
         <p:spPr>
           <a:xfrm>
-            <a:off x="1211356" y="3839056"/>
-            <a:ext cx="2095500" cy="561975"/>
+            <a:off x="1206500" y="3835400"/>
+            <a:ext cx="2095500" cy="711200"/>
           </a:xfrm>
           <a:prstGeom prst="rect">
             <a:avLst/>
           </a:prstGeom>
-          <a:ln/>
         </p:spPr>
       </p:pic>
       <p:pic>
         <p:nvPicPr>
-          <p:cNvPr id="5" name="Imagen 4">
-            <a:extLst>
-              <a:ext uri="{FF2B5EF4-FFF2-40B4-BE49-F238E27FC236}">
-                <a16:creationId xmlns:a16="http://schemas.microsoft.com/office/drawing/2014/main" id="{0FF0BB20-C8E1-4331-AC16-69D9110858AD}"/>
-              </a:ext>
-            </a:extLst>
-          </p:cNvPr>
+          <p:cNvPr id="5" name="Captura propia - evidencia_cliente_soap_java_panel"/>
           <p:cNvPicPr>
-            <a:picLocks noChangeAspect="1"/>
+            <a:picLocks/>
           </p:cNvPicPr>
           <p:nvPr/>
         </p:nvPicPr>
         <p:blipFill>
-          <a:blip r:embed="rId4"/>
+          <a:blip r:embed="rId4">
+            <a:extLst>
+              <a:ext uri="{28A0092B-C50C-407E-A947-70E740481C1C}">
+                <a14:useLocalDpi xmlns:a14="http://schemas.microsoft.com/office/drawing/2010/main" val="0"/>
+              </a:ext>
+            </a:extLst>
+          </a:blip>
           <a:stretch>
             <a:fillRect/>
           </a:stretch>
         </p:blipFill>
         <p:spPr>
           <a:xfrm>
-            <a:off x="3863999" y="3524211"/>
-            <a:ext cx="4959666" cy="3037954"/>
+            <a:off x="4210050" y="3517900"/>
+            <a:ext cx="4267200" cy="3035300"/>
           </a:xfrm>
           <a:prstGeom prst="rect">
             <a:avLst/>
@@ -25635,7 +25646,7 @@
                 <a:cs typeface="Gill Sans"/>
                 <a:sym typeface="Gill Sans"/>
               </a:rPr>
-              <a:t>CREACIÓN DEL PROYECTO – CLIENTE MOVIL</a:t>
+              <a:t>CREACIÓN DEL PROYECTO – CLIENTE MÓVIL</a:t>
             </a:r>
             <a:endParaRPr sz="1400" b="0" i="0" u="none" strike="noStrike" cap="none">
               <a:solidFill>
@@ -25800,28 +25811,12 @@
               <a:buChar char="●"/>
             </a:pPr>
             <a:r>
-              <a:rPr lang="es-EC" sz="1800" dirty="0">
+              <a:rPr lang="es-ES" sz="1800">
                 <a:effectLst/>
                 <a:latin typeface="Calibri" panose="020F0502020204030204" pitchFamily="34" charset="0"/>
                 <a:ea typeface="Calibri" panose="020F0502020204030204" pitchFamily="34" charset="0"/>
               </a:rPr>
-              <a:t>Las interfaces de usuario se construyeron utilizando HTML y la tecnología JSP (</a:t>
-            </a:r>
-            <a:r>
-              <a:rPr lang="es-EC" sz="1800" dirty="0" err="1">
-                <a:effectLst/>
-                <a:latin typeface="Calibri" panose="020F0502020204030204" pitchFamily="34" charset="0"/>
-                <a:ea typeface="Calibri" panose="020F0502020204030204" pitchFamily="34" charset="0"/>
-              </a:rPr>
-              <a:t>JavaServer</a:t>
-            </a:r>
-            <a:r>
-              <a:rPr lang="es-EC" sz="1800" dirty="0">
-                <a:effectLst/>
-                <a:latin typeface="Calibri" panose="020F0502020204030204" pitchFamily="34" charset="0"/>
-                <a:ea typeface="Calibri" panose="020F0502020204030204" pitchFamily="34" charset="0"/>
-              </a:rPr>
-              <a:t> Pages) dentro del directorio Web Pages.</a:t>
+              <a:t>Las vistas conversor.html y conversor.jsp ofrecen el formulario de conversión. ConversionServlet comunica el cliente web con el servicio SOAP.</a:t>
             </a:r>
             <a:endParaRPr dirty="0">
               <a:latin typeface="Cambria"/>
@@ -25832,72 +25827,12 @@
           </a:p>
         </p:txBody>
       </p:sp>
-      <p:pic>
-        <p:nvPicPr>
-          <p:cNvPr id="3" name="Imagen 2">
-            <a:extLst>
-              <a:ext uri="{FF2B5EF4-FFF2-40B4-BE49-F238E27FC236}">
-                <a16:creationId xmlns:a16="http://schemas.microsoft.com/office/drawing/2014/main" id="{BB0929D5-896F-4CA6-830A-0274B730C1AB}"/>
-              </a:ext>
-            </a:extLst>
-          </p:cNvPr>
-          <p:cNvPicPr>
-            <a:picLocks noChangeAspect="1"/>
-          </p:cNvPicPr>
-          <p:nvPr/>
-        </p:nvPicPr>
-        <p:blipFill>
-          <a:blip r:embed="rId3"/>
-          <a:stretch>
-            <a:fillRect/>
-          </a:stretch>
-        </p:blipFill>
-        <p:spPr>
-          <a:xfrm>
-            <a:off x="841168" y="3132944"/>
-            <a:ext cx="1448002" cy="905001"/>
-          </a:xfrm>
-          <a:prstGeom prst="rect">
-            <a:avLst/>
-          </a:prstGeom>
-        </p:spPr>
-      </p:pic>
-      <p:pic>
-        <p:nvPicPr>
-          <p:cNvPr id="5" name="Imagen 4">
-            <a:extLst>
-              <a:ext uri="{FF2B5EF4-FFF2-40B4-BE49-F238E27FC236}">
-                <a16:creationId xmlns:a16="http://schemas.microsoft.com/office/drawing/2014/main" id="{387BBA9A-92D8-4E29-8BA7-B7722C5FFAFD}"/>
-              </a:ext>
-            </a:extLst>
-          </p:cNvPr>
-          <p:cNvPicPr>
-            <a:picLocks noChangeAspect="1"/>
-          </p:cNvPicPr>
-          <p:nvPr/>
-        </p:nvPicPr>
-        <p:blipFill>
-          <a:blip r:embed="rId4"/>
-          <a:stretch>
-            <a:fillRect/>
-          </a:stretch>
-        </p:blipFill>
-        <p:spPr>
-          <a:xfrm>
-            <a:off x="3679277" y="3132944"/>
-            <a:ext cx="3959600" cy="3545395"/>
-          </a:xfrm>
-          <a:prstGeom prst="rect">
-            <a:avLst/>
-          </a:prstGeom>
-        </p:spPr>
-      </p:pic>
       <p:sp>
         <p:nvSpPr>
           <p:cNvPr id="13" name="CuadroTexto 12">
             <a:extLst>
               <a:ext uri="{FF2B5EF4-FFF2-40B4-BE49-F238E27FC236}">
-                <a16:creationId xmlns:a16="http://schemas.microsoft.com/office/drawing/2014/main" id="{7EBFFD51-1503-4BCA-8CB9-C70596A06975}"/>
+                <ns2:creationId xmlns:ns3="http://schemas.openxmlformats.org/officeDocument/2006/relationships" xmlns:ns2="http://schemas.microsoft.com/office/drawing/2014/main" xmlns:ns1="http://schemas.openxmlformats.org/drawingml/2006/main" xmlns:ns0="http://schemas.openxmlformats.org/presentationml/2006/main" xmlns="" id="{7EBFFD51-1503-4BCA-8CB9-C70596A06975}"/>
               </a:ext>
             </a:extLst>
           </p:cNvPr>
@@ -25907,7 +25842,7 @@
         <p:spPr>
           <a:xfrm>
             <a:off x="719417" y="4185628"/>
-            <a:ext cx="2624418" cy="2308324"/>
+            <a:ext cx="2624418" cy="1200329"/>
           </a:xfrm>
           <a:prstGeom prst="rect">
             <a:avLst/>
@@ -25921,7 +25856,7 @@
           <a:lstStyle/>
           <a:p>
             <a:r>
-              <a:rPr kumimoji="0" lang="es-EC" sz="1800" b="0" i="0" u="none" strike="noStrike" kern="0" cap="none" spc="0" normalizeH="0" baseline="0" noProof="0" dirty="0">
+              <a:rPr kumimoji="0" lang="es-ES" sz="1800" b="0" i="0" u="none" strike="noStrike" kern="0" cap="none" spc="0" normalizeH="0" baseline="0" noProof="0">
                 <a:ln>
                   <a:noFill/>
                 </a:ln>
@@ -25935,63 +25870,40 @@
                 <a:ea typeface="Calibri" panose="020F0502020204030204" pitchFamily="34" charset="0"/>
                 <a:sym typeface="Gill Sans"/>
               </a:rPr>
-              <a:t>El conversor </a:t>
-            </a:r>
-            <a:r>
-              <a:rPr kumimoji="0" lang="es-MX" sz="1800" b="0" i="0" u="none" strike="noStrike" kern="0" cap="none" spc="0" normalizeH="0" baseline="0" noProof="0" dirty="0">
-                <a:ln>
-                  <a:noFill/>
-                </a:ln>
-                <a:solidFill>
-                  <a:srgbClr val="3D3D3D"/>
-                </a:solidFill>
-                <a:effectLst/>
-                <a:uLnTx/>
-                <a:uFillTx/>
-                <a:latin typeface="Calibri" panose="020F0502020204030204" pitchFamily="34" charset="0"/>
-                <a:ea typeface="Calibri" panose="020F0502020204030204" pitchFamily="34" charset="0"/>
-                <a:sym typeface="Gill Sans"/>
-              </a:rPr>
-              <a:t>contiene los formularios dinámicos para seleccionar las unidades de medida, capturar los valores y mostrar los resultados procesados por el </a:t>
-            </a:r>
-            <a:r>
-              <a:rPr kumimoji="0" lang="es-MX" sz="1800" b="0" i="0" u="none" strike="noStrike" kern="0" cap="none" spc="0" normalizeH="0" baseline="0" noProof="0" dirty="0" err="1">
-                <a:ln>
-                  <a:noFill/>
-                </a:ln>
-                <a:solidFill>
-                  <a:srgbClr val="3D3D3D"/>
-                </a:solidFill>
-                <a:effectLst/>
-                <a:uLnTx/>
-                <a:uFillTx/>
-                <a:latin typeface="Calibri" panose="020F0502020204030204" pitchFamily="34" charset="0"/>
-                <a:ea typeface="Calibri" panose="020F0502020204030204" pitchFamily="34" charset="0"/>
-                <a:sym typeface="Gill Sans"/>
-              </a:rPr>
-              <a:t>ConversorServlet</a:t>
-            </a:r>
-            <a:r>
-              <a:rPr kumimoji="0" lang="es-MX" sz="1800" b="0" i="0" u="none" strike="noStrike" kern="0" cap="none" spc="0" normalizeH="0" baseline="0" noProof="0" dirty="0">
-                <a:ln>
-                  <a:noFill/>
-                </a:ln>
-                <a:solidFill>
-                  <a:srgbClr val="3D3D3D"/>
-                </a:solidFill>
-                <a:effectLst/>
-                <a:uLnTx/>
-                <a:uFillTx/>
-                <a:latin typeface="Calibri" panose="020F0502020204030204" pitchFamily="34" charset="0"/>
-                <a:ea typeface="Calibri" panose="020F0502020204030204" pitchFamily="34" charset="0"/>
-                <a:sym typeface="Gill Sans"/>
-              </a:rPr>
-              <a:t>.</a:t>
+              <a:t>El formulario envía los datos al Servlet y presenta el resultado de la conversión.</a:t>
             </a:r>
             <a:endParaRPr lang="es-EC" dirty="0"/>
           </a:p>
         </p:txBody>
       </p:sp>
+      <p:pic>
+        <p:nvPicPr>
+          <p:cNvPr id="401" name="soap_cliweb_conversion.png"/>
+          <p:cNvPicPr/>
+          <p:nvPr/>
+        </p:nvPicPr>
+        <p:blipFill>
+          <a:blip r:embed="rId3"/>
+          <a:srcRect/>
+          <a:stretch>
+            <a:fillRect/>
+          </a:stretch>
+        </p:blipFill>
+        <p:spPr>
+          <a:xfrm>
+            <a:off x="3500000" y="2900000"/>
+            <a:ext cx="5500000" cy="3416000"/>
+          </a:xfrm>
+          <a:prstGeom prst="rect">
+            <a:avLst/>
+          </a:prstGeom>
+          <a:ln w="12700">
+            <a:solidFill>
+              <a:srgbClr val="CCCCCC"/>
+            </a:solidFill>
+          </a:ln>
+        </p:spPr>
+      </p:pic>
     </p:spTree>
   </p:cSld>
   <p:clrMapOvr>
@@ -26187,20 +26099,19 @@
               </a:rPr>
               <a:t>DESARROLLO</a:t>
             </a:r>
-            <a:endParaRPr/>
-          </a:p>
-          <a:p>
-            <a:pPr marL="630000" lvl="1" indent="-320020" algn="l" rtl="0">
-              <a:lnSpc>
-                <a:spcPct val="100000"/>
-              </a:lnSpc>
-              <a:spcBef>
-                <a:spcPts val="872"/>
-              </a:spcBef>
-              <a:spcAft>
-                <a:spcPts val="0"/>
-              </a:spcAft>
-              <a:buSzPts val="1472"/>
+          </a:p>
+          <a:p>
+            <a:pPr marL="306000" lvl="0" indent="-306000" algn="l" rtl="0">
+              <a:lnSpc>
+                <a:spcPct val="100000"/>
+              </a:lnSpc>
+              <a:spcBef>
+                <a:spcPts val="0"/>
+              </a:spcBef>
+              <a:spcAft>
+                <a:spcPts val="0"/>
+              </a:spcAft>
+              <a:buSzPts val="1656"/>
               <a:buChar char="◼"/>
             </a:pPr>
             <a:r>
@@ -26211,20 +26122,19 @@
               </a:rPr>
               <a:t>OBJETIVO</a:t>
             </a:r>
-            <a:endParaRPr/>
-          </a:p>
-          <a:p>
-            <a:pPr marL="630000" lvl="1" indent="-320020" algn="l" rtl="0">
-              <a:lnSpc>
-                <a:spcPct val="100000"/>
-              </a:lnSpc>
-              <a:spcBef>
-                <a:spcPts val="872"/>
-              </a:spcBef>
-              <a:spcAft>
-                <a:spcPts val="0"/>
-              </a:spcAft>
-              <a:buSzPts val="1472"/>
+          </a:p>
+          <a:p>
+            <a:pPr marL="306000" lvl="0" indent="-306000" algn="l" rtl="0">
+              <a:lnSpc>
+                <a:spcPct val="100000"/>
+              </a:lnSpc>
+              <a:spcBef>
+                <a:spcPts val="0"/>
+              </a:spcBef>
+              <a:spcAft>
+                <a:spcPts val="0"/>
+              </a:spcAft>
+              <a:buSzPts val="1656"/>
               <a:buChar char="◼"/>
             </a:pPr>
             <a:r>
@@ -26233,113 +26143,108 @@
                   <a:schemeClr val="lt1"/>
                 </a:solidFill>
               </a:rPr>
-              <a:t>CREACIÓN DEL SERVIDOR SOAP EN DOTNET</a:t>
-            </a:r>
-            <a:endParaRPr/>
-          </a:p>
-          <a:p>
-            <a:pPr marL="630000" lvl="1" indent="-320020" algn="l" rtl="0">
-              <a:lnSpc>
-                <a:spcPct val="100000"/>
-              </a:lnSpc>
-              <a:spcBef>
-                <a:spcPts val="872"/>
-              </a:spcBef>
-              <a:spcAft>
-                <a:spcPts val="0"/>
-              </a:spcAft>
-              <a:buSzPts val="1472"/>
+              <a:t>CREACIÓN DEL SERVIDOR SOAP EN JAVA</a:t>
+            </a:r>
+          </a:p>
+          <a:p>
+            <a:pPr marL="306000" lvl="0" indent="-306000" algn="l" rtl="0">
+              <a:lnSpc>
+                <a:spcPct val="100000"/>
+              </a:lnSpc>
+              <a:spcBef>
+                <a:spcPts val="0"/>
+              </a:spcBef>
+              <a:spcAft>
+                <a:spcPts val="0"/>
+              </a:spcAft>
+              <a:buSzPts val="1656"/>
               <a:buChar char="◼"/>
             </a:pPr>
             <a:r>
-              <a:rPr lang="es-ES" sz="1800">
+              <a:rPr lang="es-ES">
                 <a:solidFill>
                   <a:schemeClr val="lt1"/>
                 </a:solidFill>
               </a:rPr>
               <a:t>CREACIÓN DEL PROYECTO – CLIENTE CONSOLA</a:t>
             </a:r>
-            <a:endParaRPr/>
-          </a:p>
-          <a:p>
-            <a:pPr marL="630000" lvl="1" indent="-320020" algn="l" rtl="0">
-              <a:lnSpc>
-                <a:spcPct val="100000"/>
-              </a:lnSpc>
-              <a:spcBef>
-                <a:spcPts val="872"/>
-              </a:spcBef>
-              <a:spcAft>
-                <a:spcPts val="0"/>
-              </a:spcAft>
-              <a:buSzPts val="1472"/>
+          </a:p>
+          <a:p>
+            <a:pPr marL="306000" lvl="0" indent="-306000" algn="l" rtl="0">
+              <a:lnSpc>
+                <a:spcPct val="100000"/>
+              </a:lnSpc>
+              <a:spcBef>
+                <a:spcPts val="0"/>
+              </a:spcBef>
+              <a:spcAft>
+                <a:spcPts val="0"/>
+              </a:spcAft>
+              <a:buSzPts val="1656"/>
               <a:buChar char="◼"/>
             </a:pPr>
             <a:r>
-              <a:rPr lang="es-ES" sz="1800">
+              <a:rPr lang="es-ES">
                 <a:solidFill>
                   <a:schemeClr val="lt1"/>
                 </a:solidFill>
               </a:rPr>
               <a:t>CREACIÓN DEL PROYECTO – CLIENTE ESCRITORIO</a:t>
             </a:r>
-            <a:endParaRPr/>
-          </a:p>
-          <a:p>
-            <a:pPr marL="630000" lvl="1" indent="-320020" algn="l" rtl="0">
-              <a:lnSpc>
-                <a:spcPct val="100000"/>
-              </a:lnSpc>
-              <a:spcBef>
-                <a:spcPts val="872"/>
-              </a:spcBef>
-              <a:spcAft>
-                <a:spcPts val="0"/>
-              </a:spcAft>
-              <a:buSzPts val="1472"/>
+          </a:p>
+          <a:p>
+            <a:pPr marL="306000" lvl="0" indent="-306000" algn="l" rtl="0">
+              <a:lnSpc>
+                <a:spcPct val="100000"/>
+              </a:lnSpc>
+              <a:spcBef>
+                <a:spcPts val="0"/>
+              </a:spcBef>
+              <a:spcAft>
+                <a:spcPts val="0"/>
+              </a:spcAft>
+              <a:buSzPts val="1656"/>
               <a:buChar char="◼"/>
             </a:pPr>
             <a:r>
-              <a:rPr lang="es-ES" sz="1800">
+              <a:rPr lang="es-ES">
                 <a:solidFill>
                   <a:schemeClr val="lt1"/>
                 </a:solidFill>
               </a:rPr>
               <a:t>CREACIÓN DEL PROYECTO – CLIENTE WEB</a:t>
             </a:r>
-            <a:endParaRPr/>
-          </a:p>
-          <a:p>
-            <a:pPr marL="630000" lvl="1" indent="-320020" algn="l" rtl="0">
-              <a:lnSpc>
-                <a:spcPct val="100000"/>
-              </a:lnSpc>
-              <a:spcBef>
-                <a:spcPts val="872"/>
-              </a:spcBef>
-              <a:spcAft>
-                <a:spcPts val="0"/>
-              </a:spcAft>
-              <a:buSzPts val="1472"/>
+          </a:p>
+          <a:p>
+            <a:pPr marL="306000" lvl="0" indent="-306000" algn="l" rtl="0">
+              <a:lnSpc>
+                <a:spcPct val="100000"/>
+              </a:lnSpc>
+              <a:spcBef>
+                <a:spcPts val="0"/>
+              </a:spcBef>
+              <a:spcAft>
+                <a:spcPts val="0"/>
+              </a:spcAft>
+              <a:buSzPts val="1656"/>
               <a:buChar char="◼"/>
             </a:pPr>
             <a:r>
-              <a:rPr lang="es-ES" sz="1800">
+              <a:rPr lang="es-ES">
                 <a:solidFill>
                   <a:schemeClr val="lt1"/>
                 </a:solidFill>
               </a:rPr>
               <a:t>CREACIÓN DEL PROYECTO – CLIENTE MÓVIL</a:t>
             </a:r>
-            <a:endParaRPr/>
-          </a:p>
-          <a:p>
-            <a:pPr marL="306000" marR="0" lvl="0" indent="-306000" algn="l" rtl="0">
-              <a:lnSpc>
-                <a:spcPct val="100000"/>
-              </a:lnSpc>
-              <a:spcBef>
-                <a:spcPts val="906"/>
+          </a:p>
+          <a:p>
+            <a:pPr marL="306000" lvl="0" indent="-306000" algn="l" rtl="0">
+              <a:lnSpc>
+                <a:spcPct val="100000"/>
+              </a:lnSpc>
+              <a:spcBef>
+                <a:spcPts val="0"/>
               </a:spcBef>
               <a:spcAft>
                 <a:spcPts val="0"/>
@@ -26355,15 +26260,14 @@
               </a:rPr>
               <a:t>CONCLUSIONES</a:t>
             </a:r>
-            <a:endParaRPr/>
-          </a:p>
-          <a:p>
-            <a:pPr marL="306000" marR="0" lvl="0" indent="-306000" algn="l" rtl="0">
-              <a:lnSpc>
-                <a:spcPct val="100000"/>
-              </a:lnSpc>
-              <a:spcBef>
-                <a:spcPts val="906"/>
+          </a:p>
+          <a:p>
+            <a:pPr marL="306000" lvl="0" indent="-306000" algn="l" rtl="0">
+              <a:lnSpc>
+                <a:spcPct val="100000"/>
+              </a:lnSpc>
+              <a:spcBef>
+                <a:spcPts val="0"/>
               </a:spcBef>
               <a:spcAft>
                 <a:spcPts val="0"/>
@@ -26895,7 +26799,7 @@
                 <a:cs typeface="Gill Sans"/>
                 <a:sym typeface="Gill Sans"/>
               </a:rPr>
-              <a:t>CREACIÓN DEL PROYECTO – CLIENTE MOVIL</a:t>
+              <a:t>CREACIÓN DEL PROYECTO – CLIENTE MÓVIL</a:t>
             </a:r>
             <a:endParaRPr sz="1400" b="0" i="0" u="none" strike="noStrike" cap="none">
               <a:solidFill>
@@ -27061,58 +26965,13 @@
               <a:buChar char="●"/>
             </a:pPr>
             <a:r>
-              <a:rPr lang="es-ES" dirty="0">
+              <a:rPr lang="es-ES">
                 <a:latin typeface="Cambria"/>
                 <a:ea typeface="Cambria"/>
                 <a:cs typeface="Cambria"/>
                 <a:sym typeface="Cambria"/>
               </a:rPr>
-              <a:t>El </a:t>
-            </a:r>
-            <a:r>
-              <a:rPr lang="es-MX" dirty="0" err="1">
-                <a:latin typeface="Cambria"/>
-                <a:ea typeface="Cambria"/>
-                <a:cs typeface="Cambria"/>
-                <a:sym typeface="Cambria"/>
-              </a:rPr>
-              <a:t>index.jsp</a:t>
-            </a:r>
-            <a:r>
-              <a:rPr lang="es-MX" dirty="0">
-                <a:latin typeface="Cambria"/>
-                <a:ea typeface="Cambria"/>
-                <a:cs typeface="Cambria"/>
-                <a:sym typeface="Cambria"/>
-              </a:rPr>
-              <a:t> actúa como la pantalla de inicio de sesión interactuando con el </a:t>
-            </a:r>
-            <a:r>
-              <a:rPr lang="es-MX" dirty="0" err="1">
-                <a:latin typeface="Cambria"/>
-                <a:ea typeface="Cambria"/>
-                <a:cs typeface="Cambria"/>
-                <a:sym typeface="Cambria"/>
-              </a:rPr>
-              <a:t>LoginServlet</a:t>
-            </a:r>
-            <a:r>
-              <a:rPr lang="es-MX" dirty="0">
-                <a:latin typeface="Cambria"/>
-                <a:ea typeface="Cambria"/>
-                <a:cs typeface="Cambria"/>
-                <a:sym typeface="Cambria"/>
-              </a:rPr>
-              <a:t>, y </a:t>
-            </a:r>
-            <a:r>
-              <a:rPr lang="es-MX" dirty="0" err="1">
-                <a:latin typeface="Cambria"/>
-                <a:ea typeface="Cambria"/>
-                <a:cs typeface="Cambria"/>
-                <a:sym typeface="Cambria"/>
-              </a:rPr>
-              <a:t>conversor.jsp</a:t>
+              <a:t>index.html y index.jsp ofrecen el inicio de sesión. LoginServlet valida las credenciales y habilita el acceso al conversor cuando son correctas.</a:t>
             </a:r>
             <a:endParaRPr sz="1800" dirty="0">
               <a:latin typeface="Cambria"/>
@@ -27125,32 +26984,30 @@
       </p:sp>
       <p:pic>
         <p:nvPicPr>
-          <p:cNvPr id="4" name="Imagen 3">
-            <a:extLst>
-              <a:ext uri="{FF2B5EF4-FFF2-40B4-BE49-F238E27FC236}">
-                <a16:creationId xmlns:a16="http://schemas.microsoft.com/office/drawing/2014/main" id="{52AB2C40-BE92-4997-8D54-902AE1FE5CBD}"/>
-              </a:ext>
-            </a:extLst>
-          </p:cNvPr>
-          <p:cNvPicPr>
-            <a:picLocks noChangeAspect="1"/>
-          </p:cNvPicPr>
+          <p:cNvPr id="402" name="soap_cliweb_login.png"/>
+          <p:cNvPicPr/>
           <p:nvPr/>
         </p:nvPicPr>
         <p:blipFill>
           <a:blip r:embed="rId3"/>
+          <a:srcRect/>
           <a:stretch>
             <a:fillRect/>
           </a:stretch>
         </p:blipFill>
         <p:spPr>
           <a:xfrm>
-            <a:off x="2804070" y="2850777"/>
-            <a:ext cx="4143559" cy="3708703"/>
+            <a:off x="1713000" y="2800000"/>
+            <a:ext cx="5957000" cy="3700000"/>
           </a:xfrm>
           <a:prstGeom prst="rect">
             <a:avLst/>
           </a:prstGeom>
+          <a:ln w="12700">
+            <a:solidFill>
+              <a:srgbClr val="CCCCCC"/>
+            </a:solidFill>
+          </a:ln>
         </p:spPr>
       </p:pic>
     </p:spTree>
@@ -27572,7 +27429,7 @@
                 <a:cs typeface="Gill Sans"/>
                 <a:sym typeface="Gill Sans"/>
               </a:rPr>
-              <a:t>CREACIÓN DEL PROYECTO – CLIENTE MOVIL</a:t>
+              <a:t>CREACIÓN DEL PROYECTO – CLIENTE MÓVIL</a:t>
             </a:r>
             <a:endParaRPr sz="1400" b="0" i="0" u="none" strike="noStrike" cap="none">
               <a:solidFill>
@@ -27738,31 +27595,13 @@
               <a:buChar char="●"/>
             </a:pPr>
             <a:r>
-              <a:rPr lang="es-ES" dirty="0">
+              <a:rPr lang="es-ES">
                 <a:latin typeface="Cambria"/>
                 <a:ea typeface="Cambria"/>
                 <a:cs typeface="Cambria"/>
                 <a:sym typeface="Cambria"/>
               </a:rPr>
-              <a:t>Para ejecutar el proyecto, se debe ejecutar el servidor y el cliente se ejecuta mediante la opción Run de </a:t>
-            </a:r>
-            <a:r>
-              <a:rPr lang="es-ES" dirty="0" err="1">
-                <a:latin typeface="Cambria"/>
-                <a:ea typeface="Cambria"/>
-                <a:cs typeface="Cambria"/>
-                <a:sym typeface="Cambria"/>
-              </a:rPr>
-              <a:t>netbeans</a:t>
-            </a:r>
-            <a:r>
-              <a:rPr lang="es-ES" dirty="0">
-                <a:latin typeface="Cambria"/>
-                <a:ea typeface="Cambria"/>
-                <a:cs typeface="Cambria"/>
-                <a:sym typeface="Cambria"/>
-              </a:rPr>
-              <a:t>.</a:t>
+              <a:t>Inicia el servidor SOAP y después el cliente web. Abre http://localhost:8081/ClienteWeb/ en el navegador para acceder al formulario de autenticación y las funciones de conversión.</a:t>
             </a:r>
             <a:endParaRPr dirty="0">
               <a:latin typeface="Cambria"/>
@@ -27775,32 +27614,30 @@
       </p:sp>
       <p:pic>
         <p:nvPicPr>
-          <p:cNvPr id="3" name="Imagen 2">
-            <a:extLst>
-              <a:ext uri="{FF2B5EF4-FFF2-40B4-BE49-F238E27FC236}">
-                <a16:creationId xmlns:a16="http://schemas.microsoft.com/office/drawing/2014/main" id="{2697E69C-8413-4674-83CC-3905BFA0D3A3}"/>
-              </a:ext>
-            </a:extLst>
-          </p:cNvPr>
-          <p:cNvPicPr>
-            <a:picLocks noChangeAspect="1"/>
-          </p:cNvPicPr>
+          <p:cNvPr id="403" name="soap_cliweb_conversion.png"/>
+          <p:cNvPicPr/>
           <p:nvPr/>
         </p:nvPicPr>
         <p:blipFill>
           <a:blip r:embed="rId3"/>
+          <a:srcRect/>
           <a:stretch>
             <a:fillRect/>
           </a:stretch>
         </p:blipFill>
         <p:spPr>
           <a:xfrm>
-            <a:off x="3135268" y="3257334"/>
-            <a:ext cx="3200847" cy="3086531"/>
+            <a:off x="1715000" y="2800000"/>
+            <a:ext cx="5950000" cy="3700000"/>
           </a:xfrm>
           <a:prstGeom prst="rect">
             <a:avLst/>
           </a:prstGeom>
+          <a:ln w="12700">
+            <a:solidFill>
+              <a:srgbClr val="CCCCCC"/>
+            </a:solidFill>
+          </a:ln>
         </p:spPr>
       </p:pic>
     </p:spTree>
@@ -28222,7 +28059,7 @@
                 <a:cs typeface="Gill Sans"/>
                 <a:sym typeface="Gill Sans"/>
               </a:rPr>
-              <a:t>CREACIÓN DEL PROYECTO – CLIENTE MOVIL</a:t>
+              <a:t>CREACIÓN DEL PROYECTO – CLIENTE MÓVIL</a:t>
             </a:r>
             <a:endParaRPr sz="1400" b="0" i="0" u="none" strike="noStrike" cap="none">
               <a:solidFill>
@@ -28388,13 +28225,13 @@
               <a:buChar char="●"/>
             </a:pPr>
             <a:r>
-              <a:rPr lang="es-ES" dirty="0">
+              <a:rPr lang="es-ES">
                 <a:latin typeface="Cambria"/>
                 <a:ea typeface="Cambria"/>
                 <a:cs typeface="Cambria"/>
                 <a:sym typeface="Cambria"/>
               </a:rPr>
-              <a:t>Se ingresan las credenciales válidas y al dar clic en Ingresar se presenta la segunda pantalla de conversión de unidades</a:t>
+              <a:t>Acceso al cliente web. Ingresa MONSTER / MONSTER9; una sesión válida permite continuar a la pantalla de conversión.</a:t>
             </a:r>
             <a:endParaRPr dirty="0">
               <a:latin typeface="Cambria"/>
@@ -28403,38 +28240,11 @@
               <a:sym typeface="Cambria"/>
             </a:endParaRPr>
           </a:p>
-          <a:p>
-            <a:pPr marL="457200" lvl="0" indent="0" algn="just" rtl="0">
-              <a:lnSpc>
-                <a:spcPct val="107000"/>
-              </a:lnSpc>
-              <a:spcBef>
-                <a:spcPts val="0"/>
-              </a:spcBef>
-              <a:spcAft>
-                <a:spcPts val="0"/>
-              </a:spcAft>
-              <a:buSzPts val="1656"/>
-              <a:buNone/>
-            </a:pPr>
-            <a:endParaRPr dirty="0">
-              <a:latin typeface="Cambria"/>
-              <a:ea typeface="Cambria"/>
-              <a:cs typeface="Cambria"/>
-              <a:sym typeface="Cambria"/>
-            </a:endParaRPr>
-          </a:p>
         </p:txBody>
       </p:sp>
       <p:pic>
         <p:nvPicPr>
-          <p:cNvPr id="6" name="image30.png">
-            <a:extLst>
-              <a:ext uri="{FF2B5EF4-FFF2-40B4-BE49-F238E27FC236}">
-                <a16:creationId xmlns:a16="http://schemas.microsoft.com/office/drawing/2014/main" id="{B8522D55-BF99-41EF-AE29-5C343DCA54F6}"/>
-              </a:ext>
-            </a:extLst>
-          </p:cNvPr>
+          <p:cNvPr id="404" name="soap_cliweb_login.png"/>
           <p:cNvPicPr/>
           <p:nvPr/>
         </p:nvPicPr>
@@ -28447,13 +28257,17 @@
         </p:blipFill>
         <p:spPr>
           <a:xfrm>
-            <a:off x="803359" y="2804085"/>
-            <a:ext cx="5399405" cy="2755900"/>
+            <a:off x="600000" y="2700000"/>
+            <a:ext cx="5500000" cy="3416000"/>
           </a:xfrm>
           <a:prstGeom prst="rect">
             <a:avLst/>
           </a:prstGeom>
-          <a:ln/>
+          <a:ln w="12700">
+            <a:solidFill>
+              <a:srgbClr val="CCCCCC"/>
+            </a:solidFill>
+          </a:ln>
         </p:spPr>
       </p:pic>
     </p:spTree>
@@ -28875,7 +28689,7 @@
                 <a:cs typeface="Gill Sans"/>
                 <a:sym typeface="Gill Sans"/>
               </a:rPr>
-              <a:t>CREACIÓN DEL PROYECTO – CLIENTE MOVIL</a:t>
+              <a:t>CREACIÓN DEL PROYECTO – CLIENTE MÓVIL</a:t>
             </a:r>
             <a:endParaRPr sz="1400" b="0" i="0" u="none" strike="noStrike" cap="none">
               <a:solidFill>
@@ -29040,13 +28854,13 @@
               <a:buChar char="●"/>
             </a:pPr>
             <a:r>
-              <a:rPr lang="es-ES" dirty="0">
+              <a:rPr lang="es-ES">
                 <a:latin typeface="Cambria"/>
                 <a:ea typeface="Cambria"/>
                 <a:cs typeface="Cambria"/>
                 <a:sym typeface="Cambria"/>
               </a:rPr>
-              <a:t>Se debe ingresar el valor a convertir, el tipo de conversión y las unidades de origen y destino.</a:t>
+              <a:t>Selecciona longitud, masa o temperatura. Ingresa un valor y las unidades de origen y destino; el cliente solicita la operación al servicio y muestra el resultado con dos decimales.</a:t>
             </a:r>
             <a:endParaRPr dirty="0">
               <a:latin typeface="Cambria"/>
@@ -29059,13 +28873,7 @@
       </p:sp>
       <p:pic>
         <p:nvPicPr>
-          <p:cNvPr id="6" name="image50.png">
-            <a:extLst>
-              <a:ext uri="{FF2B5EF4-FFF2-40B4-BE49-F238E27FC236}">
-                <a16:creationId xmlns:a16="http://schemas.microsoft.com/office/drawing/2014/main" id="{AE0CAEED-5DCD-42C2-8B00-C683C2C4B6B6}"/>
-              </a:ext>
-            </a:extLst>
-          </p:cNvPr>
+          <p:cNvPr id="405" name="soap_cliweb_conversion.png"/>
           <p:cNvPicPr/>
           <p:nvPr/>
         </p:nvPicPr>
@@ -29078,13 +28886,17 @@
         </p:blipFill>
         <p:spPr>
           <a:xfrm>
-            <a:off x="3686896" y="2718547"/>
-            <a:ext cx="5399405" cy="2819400"/>
+            <a:off x="3686896" y="2600000"/>
+            <a:ext cx="5400000" cy="3350000"/>
           </a:xfrm>
           <a:prstGeom prst="rect">
             <a:avLst/>
           </a:prstGeom>
-          <a:ln/>
+          <a:ln w="12700">
+            <a:solidFill>
+              <a:srgbClr val="CCCCCC"/>
+            </a:solidFill>
+          </a:ln>
         </p:spPr>
       </p:pic>
     </p:spTree>
@@ -29506,7 +29318,7 @@
                 <a:cs typeface="Gill Sans"/>
                 <a:sym typeface="Gill Sans"/>
               </a:rPr>
-              <a:t>CREACIÓN DEL PROYECTO – CLIENTE MOVIL</a:t>
+              <a:t>CREACIÓN DEL PROYECTO – CLIENTE MÓVIL</a:t>
             </a:r>
             <a:endParaRPr sz="1400" b="0" i="0" u="none" strike="noStrike" cap="none">
               <a:solidFill>
@@ -29680,19 +29492,8 @@
                 <a:cs typeface="Cambria"/>
                 <a:sym typeface="Cambria"/>
               </a:rPr>
-              <a:t>1.6 	CREACIÓN DEL PROYECTO – CLIENTE MÓVIL</a:t>
-            </a:r>
-            <a:br>
-              <a:rPr lang="es-ES" sz="1800" b="1" i="0" u="none" strike="noStrike" cap="none">
-                <a:solidFill>
-                  <a:srgbClr val="3D3D3D"/>
-                </a:solidFill>
-                <a:latin typeface="Cambria"/>
-                <a:ea typeface="Cambria"/>
-                <a:cs typeface="Cambria"/>
-                <a:sym typeface="Cambria"/>
-              </a:rPr>
-            </a:br>
+              <a:t>1.6 CLIENTE MÓVIL</a:t>
+            </a:r>
             <a:endParaRPr sz="1800" b="0" i="0" u="none" strike="noStrike" cap="none">
               <a:solidFill>
                 <a:srgbClr val="3D3D3D"/>
@@ -29747,6 +29548,39 @@
               <a:buSzPts val="1656"/>
               <a:buNone/>
             </a:pPr>
+            <a:r>
+              <a:rPr lang="es-ES" sz="1564" b="1">
+                <a:latin typeface="Cambria"/>
+                <a:ea typeface="Cambria"/>
+                <a:cs typeface="Cambria"/>
+                <a:sym typeface="Cambria"/>
+              </a:rPr>
+              <a:t>Crea una aplicación Android con Java y una actividad vacía. Agrega ksoap2-android y configura el acceso al servicio SOAP en localhost:8080.</a:t>
+            </a:r>
+          </a:p>
+          <a:p>
+            <a:pPr marL="0" lvl="0" indent="0" algn="l" rtl="0">
+              <a:lnSpc>
+                <a:spcPct val="115000"/>
+              </a:lnSpc>
+              <a:spcBef>
+                <a:spcPts val="1200"/>
+              </a:spcBef>
+              <a:spcAft>
+                <a:spcPts val="0"/>
+              </a:spcAft>
+              <a:buSzPts val="1656"/>
+              <a:buNone/>
+            </a:pPr>
+            <a:r>
+              <a:rPr lang="es-ES" sz="1564" b="1">
+                <a:latin typeface="Cambria"/>
+                <a:ea typeface="Cambria"/>
+                <a:cs typeface="Cambria"/>
+                <a:sym typeface="Cambria"/>
+              </a:rPr>
+              <a:t>En emulador o dispositivo físico, usa una dirección de host accesible desde Android.</a:t>
+            </a:r>
             <a:endParaRPr sz="1564" b="1">
               <a:latin typeface="Cambria"/>
               <a:ea typeface="Cambria"/>
@@ -29754,266 +29588,20 @@
               <a:sym typeface="Cambria"/>
             </a:endParaRPr>
           </a:p>
-          <a:p>
-            <a:pPr marL="0" lvl="0" indent="0" algn="l" rtl="0">
-              <a:lnSpc>
-                <a:spcPct val="115000"/>
-              </a:lnSpc>
-              <a:spcBef>
-                <a:spcPts val="1200"/>
-              </a:spcBef>
-              <a:spcAft>
-                <a:spcPts val="0"/>
-              </a:spcAft>
-              <a:buClr>
-                <a:schemeClr val="dk1"/>
-              </a:buClr>
-              <a:buSzPts val="1100"/>
-              <a:buFont typeface="Arial"/>
-              <a:buNone/>
-            </a:pPr>
-            <a:r>
-              <a:rPr lang="es-ES" sz="1564" b="1">
-                <a:latin typeface="Cambria"/>
-                <a:ea typeface="Cambria"/>
-                <a:cs typeface="Cambria"/>
-                <a:sym typeface="Cambria"/>
-              </a:rPr>
-              <a:t>Creación del Proyecto</a:t>
-            </a:r>
-            <a:endParaRPr sz="1564" b="1">
-              <a:latin typeface="Cambria"/>
-              <a:ea typeface="Cambria"/>
-              <a:cs typeface="Cambria"/>
-              <a:sym typeface="Cambria"/>
-            </a:endParaRPr>
-          </a:p>
-          <a:p>
-            <a:pPr marL="0" lvl="0" indent="0" algn="l" rtl="0">
-              <a:lnSpc>
-                <a:spcPct val="115000"/>
-              </a:lnSpc>
-              <a:spcBef>
-                <a:spcPts val="1200"/>
-              </a:spcBef>
-              <a:spcAft>
-                <a:spcPts val="0"/>
-              </a:spcAft>
-              <a:buClr>
-                <a:schemeClr val="dk1"/>
-              </a:buClr>
-              <a:buSzPts val="1100"/>
-              <a:buFont typeface="Arial"/>
-              <a:buNone/>
-            </a:pPr>
-            <a:r>
-              <a:rPr lang="es-ES" sz="1564">
-                <a:latin typeface="Cambria"/>
-                <a:ea typeface="Cambria"/>
-                <a:cs typeface="Cambria"/>
-                <a:sym typeface="Cambria"/>
-              </a:rPr>
-              <a:t>Inicia Android Studio → Nuevo Proyecto.</a:t>
-            </a:r>
-            <a:endParaRPr sz="1564">
-              <a:latin typeface="Cambria"/>
-              <a:ea typeface="Cambria"/>
-              <a:cs typeface="Cambria"/>
-              <a:sym typeface="Cambria"/>
-            </a:endParaRPr>
-          </a:p>
-          <a:p>
-            <a:pPr marL="0" lvl="0" indent="0" algn="l" rtl="0">
-              <a:lnSpc>
-                <a:spcPct val="115000"/>
-              </a:lnSpc>
-              <a:spcBef>
-                <a:spcPts val="1200"/>
-              </a:spcBef>
-              <a:spcAft>
-                <a:spcPts val="0"/>
-              </a:spcAft>
-              <a:buClr>
-                <a:schemeClr val="dk1"/>
-              </a:buClr>
-              <a:buSzPts val="1100"/>
-              <a:buFont typeface="Arial"/>
-              <a:buNone/>
-            </a:pPr>
-            <a:r>
-              <a:rPr lang="es-ES" sz="1564">
-                <a:latin typeface="Cambria"/>
-                <a:ea typeface="Cambria"/>
-                <a:cs typeface="Cambria"/>
-                <a:sym typeface="Cambria"/>
-              </a:rPr>
-              <a:t>Selecciona "Empty Activity".</a:t>
-            </a:r>
-            <a:endParaRPr sz="1564">
-              <a:latin typeface="Cambria"/>
-              <a:ea typeface="Cambria"/>
-              <a:cs typeface="Cambria"/>
-              <a:sym typeface="Cambria"/>
-            </a:endParaRPr>
-          </a:p>
-          <a:p>
-            <a:pPr marL="0" lvl="0" indent="0" algn="l" rtl="0">
-              <a:lnSpc>
-                <a:spcPct val="115000"/>
-              </a:lnSpc>
-              <a:spcBef>
-                <a:spcPts val="1200"/>
-              </a:spcBef>
-              <a:spcAft>
-                <a:spcPts val="0"/>
-              </a:spcAft>
-              <a:buClr>
-                <a:schemeClr val="dk1"/>
-              </a:buClr>
-              <a:buSzPts val="1100"/>
-              <a:buFont typeface="Arial"/>
-              <a:buNone/>
-            </a:pPr>
-            <a:r>
-              <a:rPr lang="es-ES" sz="1564">
-                <a:latin typeface="Cambria"/>
-                <a:ea typeface="Cambria"/>
-                <a:cs typeface="Cambria"/>
-                <a:sym typeface="Cambria"/>
-              </a:rPr>
-              <a:t>Lenguaje: Kotlin, API más reciente.</a:t>
-            </a:r>
-            <a:endParaRPr sz="1564">
-              <a:latin typeface="Cambria"/>
-              <a:ea typeface="Cambria"/>
-              <a:cs typeface="Cambria"/>
-              <a:sym typeface="Cambria"/>
-            </a:endParaRPr>
-          </a:p>
-          <a:p>
-            <a:pPr marL="0" lvl="0" indent="0" algn="l" rtl="0">
-              <a:lnSpc>
-                <a:spcPct val="115000"/>
-              </a:lnSpc>
-              <a:spcBef>
-                <a:spcPts val="1200"/>
-              </a:spcBef>
-              <a:spcAft>
-                <a:spcPts val="0"/>
-              </a:spcAft>
-              <a:buClr>
-                <a:schemeClr val="dk1"/>
-              </a:buClr>
-              <a:buSzPts val="1100"/>
-              <a:buFont typeface="Arial"/>
-              <a:buNone/>
-            </a:pPr>
-            <a:r>
-              <a:rPr lang="es-ES" sz="1564">
-                <a:latin typeface="Cambria"/>
-                <a:ea typeface="Cambria"/>
-                <a:cs typeface="Cambria"/>
-                <a:sym typeface="Cambria"/>
-              </a:rPr>
-              <a:t>Agrega la dependencia OkHttp en build.gradle</a:t>
-            </a:r>
-            <a:endParaRPr sz="1564">
-              <a:latin typeface="Cambria"/>
-              <a:ea typeface="Cambria"/>
-              <a:cs typeface="Cambria"/>
-              <a:sym typeface="Cambria"/>
-            </a:endParaRPr>
-          </a:p>
-          <a:p>
-            <a:pPr marL="0" lvl="0" indent="0" algn="l" rtl="0">
-              <a:lnSpc>
-                <a:spcPct val="115000"/>
-              </a:lnSpc>
-              <a:spcBef>
-                <a:spcPts val="1200"/>
-              </a:spcBef>
-              <a:spcAft>
-                <a:spcPts val="1200"/>
-              </a:spcAft>
-              <a:buSzPts val="1656"/>
-              <a:buNone/>
-            </a:pPr>
-            <a:endParaRPr sz="1564" b="1">
-              <a:latin typeface="Cambria"/>
-              <a:ea typeface="Cambria"/>
-              <a:cs typeface="Cambria"/>
-              <a:sym typeface="Cambria"/>
-            </a:endParaRPr>
-          </a:p>
         </p:txBody>
       </p:sp>
-      <p:pic>
-        <p:nvPicPr>
-          <p:cNvPr id="430" name="Google Shape;430;p37"/>
-          <p:cNvPicPr preferRelativeResize="0"/>
+      <p:sp>
+        <p:nvSpPr>
+          <p:cNvPr id="2" name="Gradle - dependencia SOAP">
+            <a:extLst>
+              <a:ext uri="{FF2B5EF4-FFF2-40B4-BE49-F238E27FC236}">
+                <a16:creationId xmlns:a16="http://schemas.microsoft.com/office/drawing/2014/main" xmlns="" id="{7FA02659-968B-436E-8575-1E22FA0ED2B1}"/>
+              </a:ext>
+            </a:extLst>
+          </p:cNvPr>
+          <p:cNvSpPr/>
           <p:nvPr/>
-        </p:nvPicPr>
-        <p:blipFill rotWithShape="1">
-          <a:blip r:embed="rId3">
-            <a:alphaModFix/>
-          </a:blip>
-          <a:srcRect/>
-          <a:stretch/>
-        </p:blipFill>
-        <p:spPr>
-          <a:xfrm>
-            <a:off x="6418749" y="2402189"/>
-            <a:ext cx="1606875" cy="1691850"/>
-          </a:xfrm>
-          <a:prstGeom prst="rect">
-            <a:avLst/>
-          </a:prstGeom>
-          <a:noFill/>
-          <a:ln>
-            <a:noFill/>
-          </a:ln>
-        </p:spPr>
-      </p:pic>
-      <p:pic>
-        <p:nvPicPr>
-          <p:cNvPr id="431" name="Google Shape;431;p37"/>
-          <p:cNvPicPr preferRelativeResize="0"/>
-          <p:nvPr/>
-        </p:nvPicPr>
-        <p:blipFill rotWithShape="1">
-          <a:blip r:embed="rId4">
-            <a:alphaModFix/>
-          </a:blip>
-          <a:srcRect/>
-          <a:stretch/>
-        </p:blipFill>
-        <p:spPr>
-          <a:xfrm>
-            <a:off x="5410937" y="4209124"/>
-            <a:ext cx="3622500" cy="1917800"/>
-          </a:xfrm>
-          <a:prstGeom prst="rect">
-            <a:avLst/>
-          </a:prstGeom>
-          <a:noFill/>
-          <a:ln>
-            <a:noFill/>
-          </a:ln>
-        </p:spPr>
-      </p:pic>
-      <p:pic>
-        <p:nvPicPr>
-          <p:cNvPr id="432" name="Google Shape;432;p37"/>
-          <p:cNvPicPr preferRelativeResize="0"/>
-          <p:nvPr/>
-        </p:nvPicPr>
-        <p:blipFill rotWithShape="1">
-          <a:blip r:embed="rId5">
-            <a:alphaModFix/>
-          </a:blip>
-          <a:srcRect/>
-          <a:stretch/>
-        </p:blipFill>
+        </p:nvSpPr>
         <p:spPr>
           <a:xfrm>
             <a:off x="904275" y="5528800"/>
@@ -30022,10 +29610,115 @@
           <a:prstGeom prst="rect">
             <a:avLst/>
           </a:prstGeom>
-          <a:noFill/>
-          <a:ln>
-            <a:noFill/>
+          <a:solidFill>
+            <a:srgbClr val="FFFFFF"/>
+          </a:solidFill>
+          <a:ln w="15875">
+            <a:solidFill>
+              <a:srgbClr val="D9D9D9"/>
+            </a:solidFill>
           </a:ln>
+        </p:spPr>
+        <p:style>
+          <a:lnRef idx="2">
+            <a:schemeClr val="accent1">
+              <a:shade val="50000"/>
+            </a:schemeClr>
+          </a:lnRef>
+          <a:fillRef idx="1">
+            <a:schemeClr val="accent1"/>
+          </a:fillRef>
+          <a:effectRef idx="0">
+            <a:schemeClr val="accent1"/>
+          </a:effectRef>
+          <a:fontRef idx="minor">
+            <a:schemeClr val="lt1"/>
+          </a:fontRef>
+        </p:style>
+        <p:txBody>
+          <a:bodyPr wrap="square" lIns="101600" tIns="63500" rIns="101600" bIns="63500" rtlCol="0" anchor="t">
+            <a:noAutofit/>
+          </a:bodyPr>
+          <a:lstStyle/>
+          <a:p>
+            <a:r>
+              <a:rPr lang="es-ES" sz="850" smtClean="0">
+                <a:solidFill>
+                  <a:srgbClr val="000000"/>
+                </a:solidFill>
+                <a:latin typeface="Consolas" panose="020B0609020204030204" pitchFamily="49" charset="0"/>
+              </a:rPr>
+              <a:t>dependencies {
+    implementation("com.google.code.ksoap2-android:ksoap2-android:3.6.4")
+}</a:t>
+            </a:r>
+            <a:endParaRPr lang="en-US" sz="850">
+              <a:solidFill>
+                <a:srgbClr val="000000"/>
+              </a:solidFill>
+              <a:latin typeface="Consolas" panose="020B0609020204030204" pitchFamily="49" charset="0"/>
+            </a:endParaRPr>
+          </a:p>
+        </p:txBody>
+      </p:sp>
+      <p:pic>
+        <p:nvPicPr>
+          <p:cNvPr id="6" name="Captura propia - evidencia_cliente_movil_soap_java_masa"/>
+          <p:cNvPicPr>
+            <a:picLocks/>
+          </p:cNvPicPr>
+          <p:nvPr/>
+        </p:nvPicPr>
+        <p:blipFill>
+          <a:blip r:embed="rId3">
+            <a:extLst>
+              <a:ext uri="{28A0092B-C50C-407E-A947-70E740481C1C}">
+                <a14:useLocalDpi xmlns:a14="http://schemas.microsoft.com/office/drawing/2010/main" val="0"/>
+              </a:ext>
+            </a:extLst>
+          </a:blip>
+          <a:stretch>
+            <a:fillRect/>
+          </a:stretch>
+        </p:blipFill>
+        <p:spPr>
+          <a:xfrm>
+            <a:off x="6840220" y="2400300"/>
+            <a:ext cx="759460" cy="1689100"/>
+          </a:xfrm>
+          <a:prstGeom prst="rect">
+            <a:avLst/>
+          </a:prstGeom>
+        </p:spPr>
+      </p:pic>
+      <p:pic>
+        <p:nvPicPr>
+          <p:cNvPr id="3" name="Captura propia - estructura actividad Android"/>
+          <p:cNvPicPr>
+            <a:picLocks/>
+          </p:cNvPicPr>
+          <p:nvPr/>
+        </p:nvPicPr>
+        <p:blipFill>
+          <a:blip r:embed="rId4">
+            <a:extLst>
+              <a:ext uri="{28A0092B-C50C-407E-A947-70E740481C1C}">
+                <a14:useLocalDpi xmlns:a14="http://schemas.microsoft.com/office/drawing/2010/main" val="0"/>
+              </a:ext>
+            </a:extLst>
+          </a:blip>
+          <a:stretch>
+            <a:fillRect/>
+          </a:stretch>
+        </p:blipFill>
+        <p:spPr>
+          <a:xfrm>
+            <a:off x="5575300" y="4203700"/>
+            <a:ext cx="3289300" cy="1917700"/>
+          </a:xfrm>
+          <a:prstGeom prst="rect">
+            <a:avLst/>
+          </a:prstGeom>
         </p:spPr>
       </p:pic>
     </p:spTree>
@@ -30447,7 +30140,7 @@
                 <a:cs typeface="Gill Sans"/>
                 <a:sym typeface="Gill Sans"/>
               </a:rPr>
-              <a:t>CREACIÓN DEL PROYECTO – CLIENTE MOVIL</a:t>
+              <a:t>CREACIÓN DEL PROYECTO – CLIENTE MÓVIL</a:t>
             </a:r>
             <a:endParaRPr sz="1400" b="0" i="0" u="none" strike="noStrike" cap="none">
               <a:solidFill>
@@ -30612,7 +30305,7 @@
               <a:buNone/>
             </a:pPr>
             <a:r>
-              <a:rPr lang="es-ES" sz="1564" b="1" dirty="0">
+              <a:rPr lang="es-ES" sz="1564" b="1">
                 <a:latin typeface="Cambria"/>
                 <a:ea typeface="Cambria"/>
                 <a:cs typeface="Cambria"/>
@@ -30636,67 +30329,13 @@
               <a:buNone/>
             </a:pPr>
             <a:r>
-              <a:rPr lang="es-MX" sz="1564" dirty="0">
+              <a:rPr lang="es-ES" sz="1564" b="1">
                 <a:latin typeface="Cambria"/>
                 <a:ea typeface="Cambria"/>
                 <a:cs typeface="Cambria"/>
                 <a:sym typeface="Cambria"/>
               </a:rPr>
-              <a:t>Para asegurar el desacoplamiento de la lógica, la vista y el consumo de red, se estructuró el proyecto en los paquetes </a:t>
-            </a:r>
-            <a:r>
-              <a:rPr lang="es-MX" sz="1564" dirty="0" err="1">
-                <a:latin typeface="Cambria"/>
-                <a:ea typeface="Cambria"/>
-                <a:cs typeface="Cambria"/>
-                <a:sym typeface="Cambria"/>
-              </a:rPr>
-              <a:t>model</a:t>
-            </a:r>
-            <a:r>
-              <a:rPr lang="es-MX" sz="1564" dirty="0">
-                <a:latin typeface="Cambria"/>
-                <a:ea typeface="Cambria"/>
-                <a:cs typeface="Cambria"/>
-                <a:sym typeface="Cambria"/>
-              </a:rPr>
-              <a:t>, </a:t>
-            </a:r>
-            <a:r>
-              <a:rPr lang="es-MX" sz="1564" dirty="0" err="1">
-                <a:latin typeface="Cambria"/>
-                <a:ea typeface="Cambria"/>
-                <a:cs typeface="Cambria"/>
-                <a:sym typeface="Cambria"/>
-              </a:rPr>
-              <a:t>view</a:t>
-            </a:r>
-            <a:r>
-              <a:rPr lang="es-MX" sz="1564" dirty="0">
-                <a:latin typeface="Cambria"/>
-                <a:ea typeface="Cambria"/>
-                <a:cs typeface="Cambria"/>
-                <a:sym typeface="Cambria"/>
-              </a:rPr>
-              <a:t> y </a:t>
-            </a:r>
-            <a:r>
-              <a:rPr lang="es-MX" sz="1564" dirty="0" err="1">
-                <a:latin typeface="Cambria"/>
-                <a:ea typeface="Cambria"/>
-                <a:cs typeface="Cambria"/>
-                <a:sym typeface="Cambria"/>
-              </a:rPr>
-              <a:t>controller</a:t>
-            </a:r>
-            <a:r>
-              <a:rPr lang="es-MX" sz="1564" dirty="0">
-                <a:latin typeface="Cambria"/>
-                <a:ea typeface="Cambria"/>
-                <a:cs typeface="Cambria"/>
-                <a:sym typeface="Cambria"/>
-              </a:rPr>
-              <a:t>.</a:t>
+              <a:t>La aplicación separa actividades de interfaz, controladores, modelos y cliente SOAP. El patrón MVC organiza el inicio de sesión y el flujo de conversión.</a:t>
             </a:r>
             <a:endParaRPr lang="es-EC" sz="1564" dirty="0">
               <a:latin typeface="Cambria"/>
@@ -30709,19 +30348,20 @@
       </p:sp>
       <p:pic>
         <p:nvPicPr>
-          <p:cNvPr id="6" name="image39.png">
-            <a:extLst>
-              <a:ext uri="{FF2B5EF4-FFF2-40B4-BE49-F238E27FC236}">
-                <a16:creationId xmlns:a16="http://schemas.microsoft.com/office/drawing/2014/main" id="{189BDC2A-4F34-4A33-915E-38B94879E2F8}"/>
-              </a:ext>
-            </a:extLst>
-          </p:cNvPr>
-          <p:cNvPicPr/>
+          <p:cNvPr id="3" name="Captura propia - mobile-mvc-tree"/>
+          <p:cNvPicPr>
+            <a:picLocks/>
+          </p:cNvPicPr>
           <p:nvPr/>
         </p:nvPicPr>
         <p:blipFill>
-          <a:blip r:embed="rId3"/>
-          <a:srcRect/>
+          <a:blip r:embed="rId3">
+            <a:extLst>
+              <a:ext uri="{28A0092B-C50C-407E-A947-70E740481C1C}">
+                <a14:useLocalDpi xmlns:a14="http://schemas.microsoft.com/office/drawing/2010/main" val="0"/>
+              </a:ext>
+            </a:extLst>
+          </a:blip>
           <a:stretch>
             <a:fillRect/>
           </a:stretch>
@@ -30729,12 +30369,11 @@
         <p:spPr>
           <a:xfrm>
             <a:off x="4741537" y="2559253"/>
-            <a:ext cx="3225165" cy="3159760"/>
+            <a:ext cx="3225800" cy="3162300"/>
           </a:xfrm>
           <a:prstGeom prst="rect">
             <a:avLst/>
           </a:prstGeom>
-          <a:ln/>
         </p:spPr>
       </p:pic>
     </p:spTree>
@@ -31156,7 +30795,7 @@
                 <a:cs typeface="Gill Sans"/>
                 <a:sym typeface="Gill Sans"/>
               </a:rPr>
-              <a:t>CREACIÓN DEL PROYECTO – CLIENTE MOVIL</a:t>
+              <a:t>CREACIÓN DEL PROYECTO – CLIENTE MÓVIL</a:t>
             </a:r>
             <a:endParaRPr sz="1400" b="0" i="0" u="none" strike="noStrike" cap="none">
               <a:solidFill>
@@ -31320,117 +30959,39 @@
               <a:buSzPts val="1656"/>
               <a:buNone/>
             </a:pPr>
-            <a:endParaRPr sz="1564" b="1" dirty="0">
-              <a:latin typeface="Cambria"/>
-              <a:ea typeface="Cambria"/>
-              <a:cs typeface="Cambria"/>
-              <a:sym typeface="Cambria"/>
-            </a:endParaRPr>
-          </a:p>
-          <a:p>
-            <a:pPr marL="0" lvl="0" indent="0" algn="l" rtl="0">
-              <a:lnSpc>
-                <a:spcPct val="115000"/>
-              </a:lnSpc>
-              <a:spcBef>
-                <a:spcPts val="1200"/>
-              </a:spcBef>
-              <a:spcAft>
-                <a:spcPts val="0"/>
-              </a:spcAft>
-              <a:buSzPts val="1656"/>
-              <a:buNone/>
-            </a:pPr>
-            <a:r>
-              <a:rPr lang="es-ES" sz="1564" b="1" dirty="0">
+            <a:r>
+              <a:rPr lang="es-ES" sz="1564" b="1">
                 <a:latin typeface="Cambria"/>
                 <a:ea typeface="Cambria"/>
                 <a:cs typeface="Cambria"/>
                 <a:sym typeface="Cambria"/>
               </a:rPr>
-              <a:t>Modelo: </a:t>
-            </a:r>
-            <a:r>
-              <a:rPr lang="es-ES" sz="1564" b="1" dirty="0" err="1">
+              <a:t>Modelo: SoapClient.java</a:t>
+            </a:r>
+          </a:p>
+          <a:p>
+            <a:pPr marL="0" lvl="0" indent="0" algn="l" rtl="0">
+              <a:lnSpc>
+                <a:spcPct val="115000"/>
+              </a:lnSpc>
+              <a:spcBef>
+                <a:spcPts val="1200"/>
+              </a:spcBef>
+              <a:spcAft>
+                <a:spcPts val="0"/>
+              </a:spcAft>
+              <a:buSzPts val="1656"/>
+              <a:buNone/>
+            </a:pPr>
+            <a:r>
+              <a:rPr lang="es-ES" sz="1564" b="1">
                 <a:latin typeface="Cambria"/>
                 <a:ea typeface="Cambria"/>
                 <a:cs typeface="Cambria"/>
                 <a:sym typeface="Cambria"/>
               </a:rPr>
-              <a:t>soapClient.kt</a:t>
-            </a:r>
-            <a:endParaRPr sz="1564" b="1" dirty="0">
-              <a:latin typeface="Cambria"/>
-              <a:ea typeface="Cambria"/>
-              <a:cs typeface="Cambria"/>
-              <a:sym typeface="Cambria"/>
-            </a:endParaRPr>
-          </a:p>
-          <a:p>
-            <a:pPr marL="0" lvl="0" indent="0" algn="l" rtl="0">
-              <a:lnSpc>
-                <a:spcPct val="115000"/>
-              </a:lnSpc>
-              <a:spcBef>
-                <a:spcPts val="1200"/>
-              </a:spcBef>
-              <a:spcAft>
-                <a:spcPts val="0"/>
-              </a:spcAft>
-              <a:buSzPts val="1656"/>
-              <a:buNone/>
-            </a:pPr>
-            <a:r>
-              <a:rPr lang="es-MX" sz="1564" dirty="0">
-                <a:latin typeface="Cambria"/>
-                <a:ea typeface="Cambria"/>
-                <a:cs typeface="Cambria"/>
-                <a:sym typeface="Cambria"/>
-              </a:rPr>
-              <a:t>Cliente SOAP que ejecuta las llamadas a los servicios web. </a:t>
-            </a:r>
-            <a:endParaRPr sz="1564" dirty="0">
-              <a:latin typeface="Cambria"/>
-              <a:ea typeface="Cambria"/>
-              <a:cs typeface="Cambria"/>
-              <a:sym typeface="Cambria"/>
-            </a:endParaRPr>
-          </a:p>
-          <a:p>
-            <a:pPr marL="0" lvl="0" indent="0" algn="l" rtl="0">
-              <a:lnSpc>
-                <a:spcPct val="115000"/>
-              </a:lnSpc>
-              <a:spcBef>
-                <a:spcPts val="1200"/>
-              </a:spcBef>
-              <a:spcAft>
-                <a:spcPts val="0"/>
-              </a:spcAft>
-              <a:buSzPts val="1656"/>
-              <a:buNone/>
-            </a:pPr>
-            <a:endParaRPr sz="1564" b="1" dirty="0">
-              <a:latin typeface="Cambria"/>
-              <a:ea typeface="Cambria"/>
-              <a:cs typeface="Cambria"/>
-              <a:sym typeface="Cambria"/>
-            </a:endParaRPr>
-          </a:p>
-          <a:p>
-            <a:pPr marL="0" lvl="0" indent="0" algn="l" rtl="0">
-              <a:lnSpc>
-                <a:spcPct val="115000"/>
-              </a:lnSpc>
-              <a:spcBef>
-                <a:spcPts val="1200"/>
-              </a:spcBef>
-              <a:spcAft>
-                <a:spcPts val="1200"/>
-              </a:spcAft>
-              <a:buSzPts val="1656"/>
-              <a:buNone/>
-            </a:pPr>
+              <a:t>Usa ksoap2-android para construir solicitudes SOAP y procesar respuestas del servicio.</a:t>
+            </a:r>
             <a:endParaRPr sz="1564" b="1" dirty="0">
               <a:latin typeface="Cambria"/>
               <a:ea typeface="Cambria"/>
@@ -31482,6 +31043,39 @@
               <a:buSzPts val="1656"/>
               <a:buNone/>
             </a:pPr>
+            <a:r>
+              <a:rPr lang="es-ES" sz="1564" b="1">
+                <a:latin typeface="Cambria"/>
+                <a:ea typeface="Cambria"/>
+                <a:cs typeface="Cambria"/>
+                <a:sym typeface="Cambria"/>
+              </a:rPr>
+              <a:t>Controlador: ConversionController.java</a:t>
+            </a:r>
+          </a:p>
+          <a:p>
+            <a:pPr marL="0" lvl="0" indent="0" algn="l" rtl="0">
+              <a:lnSpc>
+                <a:spcPct val="115000"/>
+              </a:lnSpc>
+              <a:spcBef>
+                <a:spcPts val="1200"/>
+              </a:spcBef>
+              <a:spcAft>
+                <a:spcPts val="0"/>
+              </a:spcAft>
+              <a:buSzPts val="1656"/>
+              <a:buNone/>
+            </a:pPr>
+            <a:r>
+              <a:rPr lang="es-ES" sz="1564" b="1">
+                <a:latin typeface="Cambria"/>
+                <a:ea typeface="Cambria"/>
+                <a:cs typeface="Cambria"/>
+                <a:sym typeface="Cambria"/>
+              </a:rPr>
+              <a:t>Coordina la selección de unidades, valida los datos y solicita la conversión al endpoint SOAP.</a:t>
+            </a:r>
             <a:endParaRPr sz="1564" b="1" dirty="0">
               <a:latin typeface="Cambria"/>
               <a:ea typeface="Cambria"/>
@@ -31489,156 +31083,97 @@
               <a:sym typeface="Cambria"/>
             </a:endParaRPr>
           </a:p>
-          <a:p>
-            <a:pPr marL="0" lvl="0" indent="0" algn="l" rtl="0">
-              <a:lnSpc>
-                <a:spcPct val="115000"/>
-              </a:lnSpc>
-              <a:spcBef>
-                <a:spcPts val="1200"/>
-              </a:spcBef>
-              <a:spcAft>
-                <a:spcPts val="0"/>
-              </a:spcAft>
-              <a:buClr>
-                <a:schemeClr val="dk1"/>
-              </a:buClr>
-              <a:buSzPts val="1100"/>
-              <a:buFont typeface="Arial"/>
-              <a:buNone/>
-            </a:pPr>
-            <a:r>
-              <a:rPr lang="es-ES" sz="1564" b="1" dirty="0">
-                <a:latin typeface="Cambria"/>
-                <a:ea typeface="Cambria"/>
-                <a:cs typeface="Cambria"/>
-                <a:sym typeface="Cambria"/>
-              </a:rPr>
-              <a:t>Controlador: </a:t>
-            </a:r>
-            <a:r>
-              <a:rPr lang="es-ES" sz="1564" b="1" dirty="0" err="1">
-                <a:latin typeface="Cambria"/>
-                <a:ea typeface="Cambria"/>
-                <a:cs typeface="Cambria"/>
-                <a:sym typeface="Cambria"/>
-              </a:rPr>
-              <a:t>ConversionController.kt</a:t>
-            </a:r>
-            <a:endParaRPr sz="1564" b="1" dirty="0">
-              <a:latin typeface="Cambria"/>
-              <a:ea typeface="Cambria"/>
-              <a:cs typeface="Cambria"/>
-              <a:sym typeface="Cambria"/>
-            </a:endParaRPr>
-          </a:p>
-          <a:p>
-            <a:pPr marL="0" lvl="0" indent="0" algn="l" rtl="0">
-              <a:lnSpc>
-                <a:spcPct val="115000"/>
-              </a:lnSpc>
-              <a:spcBef>
-                <a:spcPts val="1200"/>
-              </a:spcBef>
-              <a:spcAft>
-                <a:spcPts val="0"/>
-              </a:spcAft>
-              <a:buClr>
-                <a:schemeClr val="dk1"/>
-              </a:buClr>
-              <a:buSzPts val="1100"/>
-              <a:buFont typeface="Arial"/>
-              <a:buNone/>
-            </a:pPr>
-            <a:r>
-              <a:rPr lang="es-MX" sz="1564" dirty="0" err="1">
-                <a:latin typeface="Cambria"/>
-                <a:ea typeface="Cambria"/>
-                <a:cs typeface="Cambria"/>
-                <a:sym typeface="Cambria"/>
-              </a:rPr>
-              <a:t>Callback</a:t>
-            </a:r>
-            <a:r>
-              <a:rPr lang="es-MX" sz="1564" dirty="0">
-                <a:latin typeface="Cambria"/>
-                <a:ea typeface="Cambria"/>
-                <a:cs typeface="Cambria"/>
-                <a:sym typeface="Cambria"/>
-              </a:rPr>
-              <a:t> para operaciones de conversión.</a:t>
-            </a:r>
-            <a:endParaRPr sz="1564" dirty="0">
-              <a:latin typeface="Cambria"/>
-              <a:ea typeface="Cambria"/>
-              <a:cs typeface="Cambria"/>
-              <a:sym typeface="Cambria"/>
-            </a:endParaRPr>
-          </a:p>
-          <a:p>
-            <a:pPr marL="0" lvl="0" indent="0" algn="l" rtl="0">
-              <a:lnSpc>
-                <a:spcPct val="115000"/>
-              </a:lnSpc>
-              <a:spcBef>
-                <a:spcPts val="1200"/>
-              </a:spcBef>
-              <a:spcAft>
-                <a:spcPts val="0"/>
-              </a:spcAft>
-              <a:buSzPts val="1656"/>
-              <a:buNone/>
-            </a:pPr>
-            <a:endParaRPr sz="1564" b="1" dirty="0">
-              <a:latin typeface="Cambria"/>
-              <a:ea typeface="Cambria"/>
-              <a:cs typeface="Cambria"/>
-              <a:sym typeface="Cambria"/>
-            </a:endParaRPr>
-          </a:p>
-          <a:p>
-            <a:pPr marL="0" lvl="0" indent="0" algn="l" rtl="0">
-              <a:lnSpc>
-                <a:spcPct val="115000"/>
-              </a:lnSpc>
-              <a:spcBef>
-                <a:spcPts val="1200"/>
-              </a:spcBef>
-              <a:spcAft>
-                <a:spcPts val="1200"/>
-              </a:spcAft>
-              <a:buSzPts val="1656"/>
-              <a:buNone/>
-            </a:pPr>
-            <a:endParaRPr sz="1564" b="1" dirty="0">
-              <a:latin typeface="Cambria"/>
-              <a:ea typeface="Cambria"/>
-              <a:cs typeface="Cambria"/>
-              <a:sym typeface="Cambria"/>
-            </a:endParaRPr>
-          </a:p>
         </p:txBody>
       </p:sp>
-      <p:pic>
-        <p:nvPicPr>
-          <p:cNvPr id="3" name="Imagen 2">
+      <p:sp>
+        <p:nvSpPr>
+          <p:cNvPr id="2" name="Código editable - ConversionController Android">
             <a:extLst>
               <a:ext uri="{FF2B5EF4-FFF2-40B4-BE49-F238E27FC236}">
-                <a16:creationId xmlns:a16="http://schemas.microsoft.com/office/drawing/2014/main" id="{C62E849E-9737-41C1-A08E-7408D407ECE4}"/>
+                <a16:creationId xmlns:a16="http://schemas.microsoft.com/office/drawing/2014/main" xmlns="" id="{760DE4C0-82E6-4314-AB2E-742463D86AE8}"/>
               </a:ext>
             </a:extLst>
           </p:cNvPr>
-          <p:cNvPicPr>
-            <a:picLocks noChangeAspect="1"/>
-          </p:cNvPicPr>
+          <p:cNvSpPr/>
           <p:nvPr/>
-        </p:nvPicPr>
-        <p:blipFill>
-          <a:blip r:embed="rId3"/>
-          <a:stretch>
-            <a:fillRect/>
-          </a:stretch>
-        </p:blipFill>
+        </p:nvSpPr>
+        <p:spPr>
+          <a:xfrm>
+            <a:off x="4980331" y="3429000"/>
+            <a:ext cx="3802710" cy="2848362"/>
+          </a:xfrm>
+          <a:prstGeom prst="rect">
+            <a:avLst/>
+          </a:prstGeom>
+          <a:solidFill>
+            <a:srgbClr val="FFFFFF"/>
+          </a:solidFill>
+          <a:ln w="15875">
+            <a:solidFill>
+              <a:srgbClr val="D9D9D9"/>
+            </a:solidFill>
+          </a:ln>
+        </p:spPr>
+        <p:style>
+          <a:lnRef idx="2">
+            <a:schemeClr val="accent1">
+              <a:shade val="50000"/>
+            </a:schemeClr>
+          </a:lnRef>
+          <a:fillRef idx="1">
+            <a:schemeClr val="accent1"/>
+          </a:fillRef>
+          <a:effectRef idx="0">
+            <a:schemeClr val="accent1"/>
+          </a:effectRef>
+          <a:fontRef idx="minor">
+            <a:schemeClr val="lt1"/>
+          </a:fontRef>
+        </p:style>
+        <p:txBody>
+          <a:bodyPr wrap="square" lIns="101600" tIns="63500" rIns="101600" bIns="63500" rtlCol="0" anchor="t">
+            <a:noAutofit/>
+          </a:bodyPr>
+          <a:lstStyle/>
+          <a:p>
+            <a:r>
+              <a:rPr lang="es-ES" sz="900" smtClean="0">
+                <a:solidFill>
+                  <a:srgbClr val="000000"/>
+                </a:solidFill>
+                <a:latin typeface="Consolas" panose="020B0609020204030204" pitchFamily="49" charset="0"/>
+              </a:rPr>
+              <a:t>Future&lt;ConversionResponse&gt; future;
+String magnitud = req.getMagnitud().toLowerCase();
+switch (magnitud) {
+    case "longitud":
+        future = soapClient.convertirLongitud(
+            baseUrl, token, req.getValor(),
+            req.getUnidadOrigen(), req.getUnidadDestino());
+        break;
+}</a:t>
+            </a:r>
+            <a:endParaRPr lang="en-US" sz="900">
+              <a:solidFill>
+                <a:srgbClr val="000000"/>
+              </a:solidFill>
+              <a:latin typeface="Consolas" panose="020B0609020204030204" pitchFamily="49" charset="0"/>
+            </a:endParaRPr>
+          </a:p>
+        </p:txBody>
+      </p:sp>
+      <p:sp>
+        <p:nvSpPr>
+          <p:cNvPr id="4" name="Código editable - SoapClient Android">
+            <a:extLst>
+              <a:ext uri="{FF2B5EF4-FFF2-40B4-BE49-F238E27FC236}">
+                <a16:creationId xmlns:a16="http://schemas.microsoft.com/office/drawing/2014/main" xmlns="" id="{BD4B1769-EB83-4114-B094-A3F8F5C58221}"/>
+              </a:ext>
+            </a:extLst>
+          </p:cNvPr>
+          <p:cNvSpPr/>
+          <p:nvPr/>
+        </p:nvSpPr>
         <p:spPr>
           <a:xfrm>
             <a:off x="491075" y="3711388"/>
@@ -31647,38 +31182,59 @@
           <a:prstGeom prst="rect">
             <a:avLst/>
           </a:prstGeom>
+          <a:solidFill>
+            <a:srgbClr val="FFFFFF"/>
+          </a:solidFill>
+          <a:ln w="15875">
+            <a:solidFill>
+              <a:srgbClr val="D9D9D9"/>
+            </a:solidFill>
+          </a:ln>
         </p:spPr>
-      </p:pic>
-      <p:pic>
-        <p:nvPicPr>
-          <p:cNvPr id="7" name="Imagen 6">
-            <a:extLst>
-              <a:ext uri="{FF2B5EF4-FFF2-40B4-BE49-F238E27FC236}">
-                <a16:creationId xmlns:a16="http://schemas.microsoft.com/office/drawing/2014/main" id="{B6DC1D8E-6ACB-4C97-8953-86D061C48B90}"/>
-              </a:ext>
-            </a:extLst>
-          </p:cNvPr>
-          <p:cNvPicPr>
-            <a:picLocks noChangeAspect="1"/>
-          </p:cNvPicPr>
-          <p:nvPr/>
-        </p:nvPicPr>
-        <p:blipFill>
-          <a:blip r:embed="rId4"/>
-          <a:stretch>
-            <a:fillRect/>
-          </a:stretch>
-        </p:blipFill>
-        <p:spPr>
-          <a:xfrm>
-            <a:off x="4980331" y="3429000"/>
-            <a:ext cx="3802710" cy="2848362"/>
-          </a:xfrm>
-          <a:prstGeom prst="rect">
-            <a:avLst/>
-          </a:prstGeom>
-        </p:spPr>
-      </p:pic>
+        <p:style>
+          <a:lnRef idx="2">
+            <a:schemeClr val="accent1">
+              <a:shade val="50000"/>
+            </a:schemeClr>
+          </a:lnRef>
+          <a:fillRef idx="1">
+            <a:schemeClr val="accent1"/>
+          </a:fillRef>
+          <a:effectRef idx="0">
+            <a:schemeClr val="accent1"/>
+          </a:effectRef>
+          <a:fontRef idx="minor">
+            <a:schemeClr val="lt1"/>
+          </a:fontRef>
+        </p:style>
+        <p:txBody>
+          <a:bodyPr wrap="square" lIns="101600" tIns="63500" rIns="101600" bIns="63500" rtlCol="0" anchor="t">
+            <a:noAutofit/>
+          </a:bodyPr>
+          <a:lstStyle/>
+          <a:p>
+            <a:r>
+              <a:rPr lang="en-US" sz="900" smtClean="0">
+                <a:solidFill>
+                  <a:srgbClr val="000000"/>
+                </a:solidFill>
+                <a:latin typeface="Consolas" panose="020B0609020204030204" pitchFamily="49" charset="0"/>
+              </a:rPr>
+              <a:t>String endpoint = normalizarUrl(baseUrl) + "/ServicioAutenticacion";
+String soapAction = NAMESPACE + "iniciarSesion";
+SoapObject request = new SoapObject(NAMESPACE, "iniciarSesion");
+request.addProperty("usuario", usuario);
+request.addProperty("clave", clave);</a:t>
+            </a:r>
+            <a:endParaRPr lang="en-US" sz="900">
+              <a:solidFill>
+                <a:srgbClr val="000000"/>
+              </a:solidFill>
+              <a:latin typeface="Consolas" panose="020B0609020204030204" pitchFamily="49" charset="0"/>
+            </a:endParaRPr>
+          </a:p>
+        </p:txBody>
+      </p:sp>
     </p:spTree>
   </p:cSld>
   <p:clrMapOvr>
@@ -32098,7 +31654,7 @@
                 <a:cs typeface="Gill Sans"/>
                 <a:sym typeface="Gill Sans"/>
               </a:rPr>
-              <a:t>CREACIÓN DEL PROYECTO – CLIENTE MOVIL</a:t>
+              <a:t>CREACIÓN DEL PROYECTO – CLIENTE MÓVIL</a:t>
             </a:r>
             <a:endParaRPr sz="1400" b="0" i="0" u="none" strike="noStrike" cap="none">
               <a:solidFill>
@@ -32262,27 +31818,6 @@
               <a:buSzPts val="1656"/>
               <a:buNone/>
             </a:pPr>
-            <a:endParaRPr sz="1564" b="1">
-              <a:latin typeface="Cambria"/>
-              <a:ea typeface="Cambria"/>
-              <a:cs typeface="Cambria"/>
-              <a:sym typeface="Cambria"/>
-            </a:endParaRPr>
-          </a:p>
-          <a:p>
-            <a:pPr marL="0" lvl="0" indent="0" algn="l" rtl="0">
-              <a:lnSpc>
-                <a:spcPct val="115000"/>
-              </a:lnSpc>
-              <a:spcBef>
-                <a:spcPts val="1200"/>
-              </a:spcBef>
-              <a:spcAft>
-                <a:spcPts val="0"/>
-              </a:spcAft>
-              <a:buSzPts val="1656"/>
-              <a:buNone/>
-            </a:pPr>
             <a:r>
               <a:rPr lang="es-ES" sz="1564" b="1">
                 <a:latin typeface="Cambria"/>
@@ -32290,14 +31825,8 @@
                 <a:cs typeface="Cambria"/>
                 <a:sym typeface="Cambria"/>
               </a:rPr>
-              <a:t>Vista: LoginActivity.kt</a:t>
-            </a:r>
-            <a:endParaRPr sz="1564" b="1">
-              <a:latin typeface="Cambria"/>
-              <a:ea typeface="Cambria"/>
-              <a:cs typeface="Cambria"/>
-              <a:sym typeface="Cambria"/>
-            </a:endParaRPr>
+              <a:t>Vista: LoginActivity.java</a:t>
+            </a:r>
           </a:p>
           <a:p>
             <a:pPr marL="0" lvl="0" indent="0" algn="l" rtl="0">
@@ -32314,107 +31843,14 @@
               <a:buNone/>
             </a:pPr>
             <a:r>
-              <a:rPr lang="es-ES" sz="1564">
+              <a:rPr lang="es-ES" sz="1564" b="1">
                 <a:latin typeface="Cambria"/>
                 <a:ea typeface="Cambria"/>
                 <a:cs typeface="Cambria"/>
                 <a:sym typeface="Cambria"/>
               </a:rPr>
-              <a:t>Solicita credenciales al usuario.</a:t>
-            </a:r>
-            <a:endParaRPr sz="1564">
-              <a:latin typeface="Cambria"/>
-              <a:ea typeface="Cambria"/>
-              <a:cs typeface="Cambria"/>
-              <a:sym typeface="Cambria"/>
-            </a:endParaRPr>
-          </a:p>
-          <a:p>
-            <a:pPr marL="0" lvl="0" indent="0" algn="l" rtl="0">
-              <a:lnSpc>
-                <a:spcPct val="115000"/>
-              </a:lnSpc>
-              <a:spcBef>
-                <a:spcPts val="1200"/>
-              </a:spcBef>
-              <a:spcAft>
-                <a:spcPts val="0"/>
-              </a:spcAft>
-              <a:buSzPts val="1656"/>
-              <a:buNone/>
-            </a:pPr>
-            <a:r>
-              <a:rPr lang="es-ES" sz="1564">
-                <a:latin typeface="Cambria"/>
-                <a:ea typeface="Cambria"/>
-                <a:cs typeface="Cambria"/>
-                <a:sym typeface="Cambria"/>
-              </a:rPr>
-              <a:t>Valida y dirige a ConversionActivity.</a:t>
-            </a:r>
-            <a:endParaRPr sz="1564">
-              <a:latin typeface="Cambria"/>
-              <a:ea typeface="Cambria"/>
-              <a:cs typeface="Cambria"/>
-              <a:sym typeface="Cambria"/>
-            </a:endParaRPr>
-          </a:p>
-          <a:p>
-            <a:pPr marL="0" lvl="0" indent="0" algn="l" rtl="0">
-              <a:lnSpc>
-                <a:spcPct val="115000"/>
-              </a:lnSpc>
-              <a:spcBef>
-                <a:spcPts val="1200"/>
-              </a:spcBef>
-              <a:spcAft>
-                <a:spcPts val="0"/>
-              </a:spcAft>
-              <a:buSzPts val="1656"/>
-              <a:buNone/>
-            </a:pPr>
-            <a:endParaRPr sz="1564" b="1">
-              <a:latin typeface="Cambria"/>
-              <a:ea typeface="Cambria"/>
-              <a:cs typeface="Cambria"/>
-              <a:sym typeface="Cambria"/>
-            </a:endParaRPr>
-          </a:p>
-          <a:p>
-            <a:pPr marL="0" lvl="0" indent="0" algn="l" rtl="0">
-              <a:lnSpc>
-                <a:spcPct val="115000"/>
-              </a:lnSpc>
-              <a:spcBef>
-                <a:spcPts val="1200"/>
-              </a:spcBef>
-              <a:spcAft>
-                <a:spcPts val="0"/>
-              </a:spcAft>
-              <a:buSzPts val="1656"/>
-              <a:buNone/>
-            </a:pPr>
-            <a:endParaRPr sz="1564" b="1">
-              <a:latin typeface="Cambria"/>
-              <a:ea typeface="Cambria"/>
-              <a:cs typeface="Cambria"/>
-              <a:sym typeface="Cambria"/>
-            </a:endParaRPr>
-          </a:p>
-          <a:p>
-            <a:pPr marL="0" lvl="0" indent="0" algn="l" rtl="0">
-              <a:lnSpc>
-                <a:spcPct val="115000"/>
-              </a:lnSpc>
-              <a:spcBef>
-                <a:spcPts val="1200"/>
-              </a:spcBef>
-              <a:spcAft>
-                <a:spcPts val="1200"/>
-              </a:spcAft>
-              <a:buSzPts val="1656"/>
-              <a:buNone/>
-            </a:pPr>
+              <a:t>Solicita las credenciales MONSTER / MONSTER9 y dirige a la conversión tras una respuesta válida.</a:t>
+            </a:r>
             <a:endParaRPr sz="1564" b="1">
               <a:latin typeface="Cambria"/>
               <a:ea typeface="Cambria"/>
@@ -32466,6 +31902,39 @@
               <a:buSzPts val="1656"/>
               <a:buNone/>
             </a:pPr>
+            <a:r>
+              <a:rPr lang="es-ES" sz="1564" b="1">
+                <a:latin typeface="Cambria"/>
+                <a:ea typeface="Cambria"/>
+                <a:cs typeface="Cambria"/>
+                <a:sym typeface="Cambria"/>
+              </a:rPr>
+              <a:t>Vista: ConversionActivity.java</a:t>
+            </a:r>
+          </a:p>
+          <a:p>
+            <a:pPr marL="0" lvl="0" indent="0" algn="l" rtl="0">
+              <a:lnSpc>
+                <a:spcPct val="115000"/>
+              </a:lnSpc>
+              <a:spcBef>
+                <a:spcPts val="1200"/>
+              </a:spcBef>
+              <a:spcAft>
+                <a:spcPts val="0"/>
+              </a:spcAft>
+              <a:buSzPts val="1656"/>
+              <a:buNone/>
+            </a:pPr>
+            <a:r>
+              <a:rPr lang="es-ES" sz="1564" b="1">
+                <a:latin typeface="Cambria"/>
+                <a:ea typeface="Cambria"/>
+                <a:cs typeface="Cambria"/>
+                <a:sym typeface="Cambria"/>
+              </a:rPr>
+              <a:t>Permite elegir magnitud y unidades, ingresar el valor y consultar el resultado del servicio.</a:t>
+            </a:r>
             <a:endParaRPr sz="1564" b="1">
               <a:latin typeface="Cambria"/>
               <a:ea typeface="Cambria"/>
@@ -32473,200 +31942,11 @@
               <a:sym typeface="Cambria"/>
             </a:endParaRPr>
           </a:p>
-          <a:p>
-            <a:pPr marL="0" lvl="0" indent="0" algn="l" rtl="0">
-              <a:lnSpc>
-                <a:spcPct val="115000"/>
-              </a:lnSpc>
-              <a:spcBef>
-                <a:spcPts val="1200"/>
-              </a:spcBef>
-              <a:spcAft>
-                <a:spcPts val="0"/>
-              </a:spcAft>
-              <a:buSzPts val="1656"/>
-              <a:buNone/>
-            </a:pPr>
-            <a:r>
-              <a:rPr lang="es-ES" sz="1564" b="1">
-                <a:latin typeface="Cambria"/>
-                <a:ea typeface="Cambria"/>
-                <a:cs typeface="Cambria"/>
-                <a:sym typeface="Cambria"/>
-              </a:rPr>
-              <a:t>Vista: ConversionActivity.kt</a:t>
-            </a:r>
-            <a:endParaRPr sz="1564" b="1">
-              <a:latin typeface="Cambria"/>
-              <a:ea typeface="Cambria"/>
-              <a:cs typeface="Cambria"/>
-              <a:sym typeface="Cambria"/>
-            </a:endParaRPr>
-          </a:p>
-          <a:p>
-            <a:pPr marL="0" lvl="0" indent="0" algn="l" rtl="0">
-              <a:lnSpc>
-                <a:spcPct val="115000"/>
-              </a:lnSpc>
-              <a:spcBef>
-                <a:spcPts val="1200"/>
-              </a:spcBef>
-              <a:spcAft>
-                <a:spcPts val="0"/>
-              </a:spcAft>
-              <a:buSzPts val="1656"/>
-              <a:buNone/>
-            </a:pPr>
-            <a:r>
-              <a:rPr lang="es-ES" sz="1564">
-                <a:latin typeface="Cambria"/>
-                <a:ea typeface="Cambria"/>
-                <a:cs typeface="Cambria"/>
-                <a:sym typeface="Cambria"/>
-              </a:rPr>
-              <a:t>Recibe valores para la conversión.</a:t>
-            </a:r>
-            <a:endParaRPr sz="1564">
-              <a:latin typeface="Cambria"/>
-              <a:ea typeface="Cambria"/>
-              <a:cs typeface="Cambria"/>
-              <a:sym typeface="Cambria"/>
-            </a:endParaRPr>
-          </a:p>
-          <a:p>
-            <a:pPr marL="0" lvl="0" indent="0" algn="l" rtl="0">
-              <a:lnSpc>
-                <a:spcPct val="115000"/>
-              </a:lnSpc>
-              <a:spcBef>
-                <a:spcPts val="1200"/>
-              </a:spcBef>
-              <a:spcAft>
-                <a:spcPts val="0"/>
-              </a:spcAft>
-              <a:buSzPts val="1656"/>
-              <a:buNone/>
-            </a:pPr>
-            <a:r>
-              <a:rPr lang="es-ES" sz="1564">
-                <a:latin typeface="Cambria"/>
-                <a:ea typeface="Cambria"/>
-                <a:cs typeface="Cambria"/>
-                <a:sym typeface="Cambria"/>
-              </a:rPr>
-              <a:t>Llama a ConversionController para la API.</a:t>
-            </a:r>
-            <a:endParaRPr sz="1564">
-              <a:latin typeface="Cambria"/>
-              <a:ea typeface="Cambria"/>
-              <a:cs typeface="Cambria"/>
-              <a:sym typeface="Cambria"/>
-            </a:endParaRPr>
-          </a:p>
-          <a:p>
-            <a:pPr marL="0" lvl="0" indent="0" algn="l" rtl="0">
-              <a:lnSpc>
-                <a:spcPct val="115000"/>
-              </a:lnSpc>
-              <a:spcBef>
-                <a:spcPts val="1200"/>
-              </a:spcBef>
-              <a:spcAft>
-                <a:spcPts val="0"/>
-              </a:spcAft>
-              <a:buSzPts val="1656"/>
-              <a:buNone/>
-            </a:pPr>
-            <a:r>
-              <a:rPr lang="es-ES" sz="1564">
-                <a:latin typeface="Cambria"/>
-                <a:ea typeface="Cambria"/>
-                <a:cs typeface="Cambria"/>
-                <a:sym typeface="Cambria"/>
-              </a:rPr>
-              <a:t>Muestra el resultado en pantalla.</a:t>
-            </a:r>
-            <a:endParaRPr sz="1564">
-              <a:latin typeface="Cambria"/>
-              <a:ea typeface="Cambria"/>
-              <a:cs typeface="Cambria"/>
-              <a:sym typeface="Cambria"/>
-            </a:endParaRPr>
-          </a:p>
-          <a:p>
-            <a:pPr marL="0" lvl="0" indent="0" algn="l" rtl="0">
-              <a:lnSpc>
-                <a:spcPct val="115000"/>
-              </a:lnSpc>
-              <a:spcBef>
-                <a:spcPts val="1200"/>
-              </a:spcBef>
-              <a:spcAft>
-                <a:spcPts val="0"/>
-              </a:spcAft>
-              <a:buSzPts val="1656"/>
-              <a:buNone/>
-            </a:pPr>
-            <a:endParaRPr sz="1564" b="1">
-              <a:latin typeface="Cambria"/>
-              <a:ea typeface="Cambria"/>
-              <a:cs typeface="Cambria"/>
-              <a:sym typeface="Cambria"/>
-            </a:endParaRPr>
-          </a:p>
-          <a:p>
-            <a:pPr marL="0" lvl="0" indent="0" algn="l" rtl="0">
-              <a:lnSpc>
-                <a:spcPct val="115000"/>
-              </a:lnSpc>
-              <a:spcBef>
-                <a:spcPts val="1200"/>
-              </a:spcBef>
-              <a:spcAft>
-                <a:spcPts val="0"/>
-              </a:spcAft>
-              <a:buSzPts val="1656"/>
-              <a:buNone/>
-            </a:pPr>
-            <a:endParaRPr sz="1564" b="1">
-              <a:latin typeface="Cambria"/>
-              <a:ea typeface="Cambria"/>
-              <a:cs typeface="Cambria"/>
-              <a:sym typeface="Cambria"/>
-            </a:endParaRPr>
-          </a:p>
-          <a:p>
-            <a:pPr marL="0" lvl="0" indent="0" algn="l" rtl="0">
-              <a:lnSpc>
-                <a:spcPct val="115000"/>
-              </a:lnSpc>
-              <a:spcBef>
-                <a:spcPts val="1200"/>
-              </a:spcBef>
-              <a:spcAft>
-                <a:spcPts val="1200"/>
-              </a:spcAft>
-              <a:buSzPts val="1656"/>
-              <a:buNone/>
-            </a:pPr>
-            <a:endParaRPr sz="1564" b="1">
-              <a:latin typeface="Cambria"/>
-              <a:ea typeface="Cambria"/>
-              <a:cs typeface="Cambria"/>
-              <a:sym typeface="Cambria"/>
-            </a:endParaRPr>
-          </a:p>
         </p:txBody>
       </p:sp>
       <p:pic>
         <p:nvPicPr>
-          <p:cNvPr id="3" name="Imagen 2">
-            <a:extLst>
-              <a:ext uri="{FF2B5EF4-FFF2-40B4-BE49-F238E27FC236}">
-                <a16:creationId xmlns:a16="http://schemas.microsoft.com/office/drawing/2014/main" id="{3ACEC0DE-2BEA-40A8-801D-5178C6146140}"/>
-              </a:ext>
-            </a:extLst>
-          </p:cNvPr>
+          <p:cNvPr id="459" name="Captura conversión móvil SOAP Java" descr="Conversión Android SOAP Java: 100.00 Metro a 10000.00 Centimetro"/>
           <p:cNvPicPr>
             <a:picLocks noChangeAspect="1"/>
           </p:cNvPicPr>
@@ -32680,8 +31960,8 @@
         </p:blipFill>
         <p:spPr>
           <a:xfrm>
-            <a:off x="595071" y="3523400"/>
-            <a:ext cx="3704493" cy="2290259"/>
+            <a:off x="6067748" y="3395466"/>
+            <a:ext cx="1404564" cy="3121254"/>
           </a:xfrm>
           <a:prstGeom prst="rect">
             <a:avLst/>
@@ -32690,13 +31970,7 @@
       </p:pic>
       <p:pic>
         <p:nvPicPr>
-          <p:cNvPr id="5" name="Imagen 4">
-            <a:extLst>
-              <a:ext uri="{FF2B5EF4-FFF2-40B4-BE49-F238E27FC236}">
-                <a16:creationId xmlns:a16="http://schemas.microsoft.com/office/drawing/2014/main" id="{8ABC178B-C3A3-4016-BC6C-F3909BE4E7AB}"/>
-              </a:ext>
-            </a:extLst>
-          </p:cNvPr>
+          <p:cNvPr id="2" name="Captura login móvil SOAP Java" descr="Cliente móvil SOAP Java: inicio de sesión capturado en Android"/>
           <p:cNvPicPr>
             <a:picLocks noChangeAspect="1"/>
           </p:cNvPicPr>
@@ -32710,8 +31984,8 @@
         </p:blipFill>
         <p:spPr>
           <a:xfrm>
-            <a:off x="5096586" y="3395466"/>
-            <a:ext cx="3346888" cy="3121255"/>
+            <a:off x="1932009" y="3523400"/>
+            <a:ext cx="1030616" cy="2290259"/>
           </a:xfrm>
           <a:prstGeom prst="rect">
             <a:avLst/>
@@ -33137,7 +32411,7 @@
                 <a:cs typeface="Gill Sans"/>
                 <a:sym typeface="Gill Sans"/>
               </a:rPr>
-              <a:t>CREACIÓN DEL PROYECTO – CLIENTE MOVIL</a:t>
+              <a:t>CREACIÓN DEL PROYECTO – CLIENTE MÓVIL</a:t>
             </a:r>
             <a:endParaRPr sz="1400" b="0" i="0" u="none" strike="noStrike" cap="none">
               <a:solidFill>
@@ -33303,40 +32577,13 @@
               <a:buChar char="●"/>
             </a:pPr>
             <a:r>
-              <a:rPr lang="es-ES" dirty="0">
+              <a:rPr lang="es-ES">
                 <a:latin typeface="Cambria"/>
                 <a:ea typeface="Cambria"/>
                 <a:cs typeface="Cambria"/>
                 <a:sym typeface="Cambria"/>
               </a:rPr>
-              <a:t>Para ejecutar el cliente móvil, se puede hacer desde un dispositivo físico o el mismo emulador de </a:t>
-            </a:r>
-            <a:r>
-              <a:rPr lang="es-ES" dirty="0" err="1">
-                <a:latin typeface="Cambria"/>
-                <a:ea typeface="Cambria"/>
-                <a:cs typeface="Cambria"/>
-                <a:sym typeface="Cambria"/>
-              </a:rPr>
-              <a:t>android</a:t>
-            </a:r>
-            <a:r>
-              <a:rPr lang="es-ES" dirty="0">
-                <a:latin typeface="Cambria"/>
-                <a:ea typeface="Cambria"/>
-                <a:cs typeface="Cambria"/>
-                <a:sym typeface="Cambria"/>
-              </a:rPr>
-              <a:t> </a:t>
-            </a:r>
-            <a:r>
-              <a:rPr lang="es-ES" dirty="0" err="1">
-                <a:latin typeface="Cambria"/>
-                <a:ea typeface="Cambria"/>
-                <a:cs typeface="Cambria"/>
-                <a:sym typeface="Cambria"/>
-              </a:rPr>
-              <a:t>studio</a:t>
+              <a:t>Ejecuta primero el servidor SOAP. Luego inicia la aplicación en un emulador o dispositivo Android y verifica el acceso a la dirección del host y al puerto 8080.</a:t>
             </a:r>
             <a:endParaRPr dirty="0">
               <a:latin typeface="Cambria"/>
@@ -33345,115 +32592,48 @@
               <a:sym typeface="Cambria"/>
             </a:endParaRPr>
           </a:p>
-          <a:p>
-            <a:pPr marL="914400" lvl="1" indent="-317982" algn="just" rtl="0">
-              <a:lnSpc>
-                <a:spcPct val="107000"/>
-              </a:lnSpc>
-              <a:spcBef>
-                <a:spcPts val="0"/>
-              </a:spcBef>
-              <a:spcAft>
-                <a:spcPts val="0"/>
-              </a:spcAft>
-              <a:buSzPct val="103500"/>
-              <a:buFont typeface="Cambria"/>
-              <a:buChar char="○"/>
-            </a:pPr>
-            <a:r>
-              <a:rPr lang="es-ES" dirty="0">
-                <a:latin typeface="Cambria"/>
-                <a:ea typeface="Cambria"/>
-                <a:cs typeface="Cambria"/>
-                <a:sym typeface="Cambria"/>
-              </a:rPr>
-              <a:t>Configura un dispositivo físico</a:t>
-            </a:r>
-            <a:endParaRPr dirty="0">
-              <a:latin typeface="Cambria"/>
-              <a:ea typeface="Cambria"/>
-              <a:cs typeface="Cambria"/>
-              <a:sym typeface="Cambria"/>
-            </a:endParaRPr>
-          </a:p>
-          <a:p>
-            <a:pPr marL="914400" lvl="1" indent="-317982" algn="just" rtl="0">
-              <a:lnSpc>
-                <a:spcPct val="107000"/>
-              </a:lnSpc>
-              <a:spcBef>
-                <a:spcPts val="0"/>
-              </a:spcBef>
-              <a:spcAft>
-                <a:spcPts val="0"/>
-              </a:spcAft>
-              <a:buSzPct val="103500"/>
-              <a:buFont typeface="Cambria"/>
-              <a:buChar char="○"/>
-            </a:pPr>
-            <a:r>
-              <a:rPr lang="es-ES" dirty="0">
-                <a:latin typeface="Cambria"/>
-                <a:ea typeface="Cambria"/>
-                <a:cs typeface="Cambria"/>
-                <a:sym typeface="Cambria"/>
-              </a:rPr>
-              <a:t>Configura un emulador</a:t>
-            </a:r>
-            <a:endParaRPr dirty="0">
-              <a:latin typeface="Cambria"/>
-              <a:ea typeface="Cambria"/>
-              <a:cs typeface="Cambria"/>
-              <a:sym typeface="Cambria"/>
-            </a:endParaRPr>
-          </a:p>
         </p:txBody>
       </p:sp>
       <p:pic>
         <p:nvPicPr>
-          <p:cNvPr id="7" name="image51.png">
-            <a:extLst>
-              <a:ext uri="{FF2B5EF4-FFF2-40B4-BE49-F238E27FC236}">
-                <a16:creationId xmlns:a16="http://schemas.microsoft.com/office/drawing/2014/main" id="{47E336AD-7C62-44ED-B746-514B0A1352F5}"/>
-              </a:ext>
-            </a:extLst>
-          </p:cNvPr>
-          <p:cNvPicPr/>
+          <p:cNvPr id="496" name="Captura móvil SOAP Java emulador" descr="Ejecución móvil SOAP Java en emulador: 100.00 Celsius a 212.00 Fahrenheit"/>
+          <p:cNvPicPr>
+            <a:picLocks noChangeAspect="1"/>
+          </p:cNvPicPr>
           <p:nvPr/>
         </p:nvPicPr>
         <p:blipFill>
           <a:blip r:embed="rId3"/>
-          <a:srcRect/>
           <a:stretch>
             <a:fillRect/>
           </a:stretch>
         </p:blipFill>
         <p:spPr>
           <a:xfrm>
-            <a:off x="2107289" y="3132225"/>
-            <a:ext cx="1720640" cy="3469750"/>
+            <a:off x="2186915" y="3132225"/>
+            <a:ext cx="1561387" cy="3469750"/>
           </a:xfrm>
           <a:prstGeom prst="rect">
             <a:avLst/>
           </a:prstGeom>
-          <a:ln/>
         </p:spPr>
       </p:pic>
       <p:pic>
         <p:nvPicPr>
-          <p:cNvPr id="8" name="image32.png">
-            <a:extLst>
-              <a:ext uri="{FF2B5EF4-FFF2-40B4-BE49-F238E27FC236}">
-                <a16:creationId xmlns:a16="http://schemas.microsoft.com/office/drawing/2014/main" id="{E9C825FF-D8CA-4B60-BE6C-63B801686828}"/>
-              </a:ext>
-            </a:extLst>
-          </p:cNvPr>
-          <p:cNvPicPr/>
+          <p:cNvPr id="3" name="Captura cliente móvil - Inicio de sesión" descr="Captura del cliente móvil Android: pantalla de inicio de sesión"/>
+          <p:cNvPicPr>
+            <a:picLocks/>
+          </p:cNvPicPr>
           <p:nvPr/>
         </p:nvPicPr>
         <p:blipFill>
-          <a:blip r:embed="rId4"/>
-          <a:srcRect/>
+          <a:blip r:embed="rId4">
+            <a:extLst>
+              <a:ext uri="{28A0092B-C50C-407E-A947-70E740481C1C}">
+                <a14:useLocalDpi xmlns:a14="http://schemas.microsoft.com/office/drawing/2010/main" val="0"/>
+              </a:ext>
+            </a:extLst>
+          </a:blip>
           <a:stretch>
             <a:fillRect/>
           </a:stretch>
@@ -33466,7 +32646,6 @@
           <a:prstGeom prst="rect">
             <a:avLst/>
           </a:prstGeom>
-          <a:ln/>
         </p:spPr>
       </p:pic>
     </p:spTree>
@@ -33591,31 +32770,37 @@
               <a:buNone/>
             </a:pPr>
             <a:r>
-              <a:rPr lang="es-MX" sz="1900" dirty="0">
+              <a:rPr lang="es-ES" sz="1900">
                 <a:latin typeface="Cambria"/>
                 <a:ea typeface="Cambria"/>
                 <a:cs typeface="Cambria"/>
                 <a:sym typeface="Cambria"/>
               </a:rPr>
-              <a:t>Se recomienda mantener la estructura modular y el patrón MVC para facilitar la escalabilidad del sistema , además de implementar un manejo de excepciones detallado con </a:t>
-            </a:r>
-            <a:r>
-              <a:rPr lang="es-MX" sz="1900" dirty="0" err="1">
+              <a:t>El sistema mantiene una lógica de conversión común para las aplicaciones de consola, escritorio, web y móvil. SOAP publica operaciones interoperables que los clientes Java consumen mediante sus herramientas correspondientes.</a:t>
+            </a:r>
+          </a:p>
+          <a:p>
+            <a:pPr marL="0" marR="0" lvl="0" indent="0" algn="just" rtl="0">
+              <a:lnSpc>
+                <a:spcPct val="107000"/>
+              </a:lnSpc>
+              <a:spcBef>
+                <a:spcPts val="0"/>
+              </a:spcBef>
+              <a:spcAft>
+                <a:spcPts val="0"/>
+              </a:spcAft>
+              <a:buSzPts val="1656"/>
+              <a:buNone/>
+            </a:pPr>
+            <a:r>
+              <a:rPr lang="es-ES" sz="1900">
                 <a:latin typeface="Cambria"/>
                 <a:ea typeface="Cambria"/>
                 <a:cs typeface="Cambria"/>
                 <a:sym typeface="Cambria"/>
               </a:rPr>
-              <a:t>SOAPFaults</a:t>
-            </a:r>
-            <a:r>
-              <a:rPr lang="es-MX" sz="1900" dirty="0">
-                <a:latin typeface="Cambria"/>
-                <a:ea typeface="Cambria"/>
-                <a:cs typeface="Cambria"/>
-                <a:sym typeface="Cambria"/>
-              </a:rPr>
-              <a:t> y validaciones más estrictas en el tiempo de vida de las sesiones. Es fundamental integrar un sistema de logs en Payara, optimizar los catálogos en memoria y desarrollar pruebas unitarias para garantizar la exactitud de los cálculos matemáticos. Por último, se debe documentar a fondo el contrato WSDL y mejorar la experiencia de usuario estandarizando la interfaz visual y los controles de validación en todos los clientes, asegurando que el diseño sea consistente y el manejo asíncrono evite bloqueos en las pantallas. </a:t>
+              <a:t>La autenticación se realiza antes de convertir y las unidades se organizan en tres magnitudes. La solución es SINBDD: utiliza datos en memoria y no requiere persistencia en una base de datos.</a:t>
             </a:r>
             <a:endParaRPr sz="1900" dirty="0"/>
           </a:p>
@@ -33961,7 +33146,7 @@
                 <a:cs typeface="Gill Sans"/>
                 <a:sym typeface="Gill Sans"/>
               </a:rPr>
-              <a:t>CREACIÓN DEL PROYECTO – CLIENTE MOVIL</a:t>
+              <a:t>CREACIÓN DEL PROYECTO – CLIENTE MÓVIL</a:t>
             </a:r>
             <a:endParaRPr sz="1400" b="0" i="0" u="none" strike="noStrike" cap="none">
               <a:solidFill>
@@ -34206,27 +33391,64 @@
               <a:buChar char="∙"/>
             </a:pPr>
             <a:r>
-              <a:rPr lang="es-ES" dirty="0">
+              <a:rPr lang="es-ES">
                 <a:latin typeface="Cambria"/>
                 <a:ea typeface="Cambria"/>
                 <a:cs typeface="Cambria"/>
                 <a:sym typeface="Cambria"/>
               </a:rPr>
-              <a:t>1</a:t>
-            </a:r>
-            <a:r>
-              <a:rPr lang="es-ES" sz="1800" dirty="0">
+              <a:t>1.1 OBJETIVO</a:t>
+            </a:r>
+          </a:p>
+          <a:p>
+            <a:pPr marL="342900" marR="0" lvl="0" indent="-342900" algn="just" rtl="0">
+              <a:lnSpc>
+                <a:spcPct val="107000"/>
+              </a:lnSpc>
+              <a:spcBef>
+                <a:spcPts val="0"/>
+              </a:spcBef>
+              <a:spcAft>
+                <a:spcPts val="0"/>
+              </a:spcAft>
+              <a:buSzPts val="1656"/>
+              <a:buFont typeface="Noto Sans Symbols"/>
+              <a:buChar char="∙"/>
+            </a:pPr>
+            <a:endParaRPr lang="es-ES">
+              <a:latin typeface="Cambria"/>
+              <a:ea typeface="Cambria"/>
+              <a:cs typeface="Cambria"/>
+              <a:sym typeface="Cambria"/>
+            </a:endParaRPr>
+          </a:p>
+          <a:p>
+            <a:pPr marL="342900" marR="0" lvl="0" indent="-342900" algn="just" rtl="0">
+              <a:lnSpc>
+                <a:spcPct val="107000"/>
+              </a:lnSpc>
+              <a:spcBef>
+                <a:spcPts val="0"/>
+              </a:spcBef>
+              <a:spcAft>
+                <a:spcPts val="0"/>
+              </a:spcAft>
+              <a:buSzPts val="1656"/>
+              <a:buFont typeface="Noto Sans Symbols"/>
+              <a:buChar char="∙"/>
+            </a:pPr>
+            <a:r>
+              <a:rPr lang="es-ES">
                 <a:latin typeface="Cambria"/>
                 <a:ea typeface="Cambria"/>
                 <a:cs typeface="Cambria"/>
                 <a:sym typeface="Cambria"/>
               </a:rPr>
-              <a:t>.1	OBJETIVO</a:t>
-            </a:r>
-            <a:endParaRPr dirty="0"/>
-          </a:p>
-          <a:p>
-            <a:pPr marL="342900" marR="0" lvl="0" indent="-237744" algn="just" rtl="0">
+              <a:t>Documentar la configuración, arquitectura, ejecución y validación del conversor de unidades. El sistema ofrece clientes de consola, escritorio, web y móvil conectados a un servicio Java de tipo </a:t>
+            </a:r>
+          </a:p>
+          <a:p>
+            <a:pPr marL="342900" marR="0" lvl="0" indent="-342900" algn="just" rtl="0">
               <a:lnSpc>
                 <a:spcPct val="107000"/>
               </a:lnSpc>
@@ -34238,74 +33460,48 @@
               </a:spcAft>
               <a:buSzPts val="1656"/>
               <a:buFont typeface="Noto Sans Symbols"/>
-              <a:buNone/>
-            </a:pPr>
-            <a:endParaRPr sz="1800" dirty="0">
+              <a:buChar char="∙"/>
+            </a:pPr>
+            <a:r>
+              <a:rPr lang="es-ES">
+                <a:latin typeface="Cambria"/>
+                <a:ea typeface="Cambria"/>
+                <a:cs typeface="Cambria"/>
+                <a:sym typeface="Cambria"/>
+              </a:rPr>
+              <a:t>SOAP.</a:t>
+            </a:r>
+          </a:p>
+          <a:p>
+            <a:pPr marL="342900" marR="0" lvl="0" indent="-342900" algn="just" rtl="0">
+              <a:lnSpc>
+                <a:spcPct val="107000"/>
+              </a:lnSpc>
+              <a:spcBef>
+                <a:spcPts val="0"/>
+              </a:spcBef>
+              <a:spcAft>
+                <a:spcPts val="0"/>
+              </a:spcAft>
+              <a:buSzPts val="1656"/>
+              <a:buFont typeface="Noto Sans Symbols"/>
+              <a:buChar char="∙"/>
+            </a:pPr>
+            <a:r>
+              <a:rPr lang="es-ES">
+                <a:latin typeface="Cambria"/>
+                <a:ea typeface="Cambria"/>
+                <a:cs typeface="Cambria"/>
+                <a:sym typeface="Cambria"/>
+              </a:rPr>
+              <a:t>Las conversiones se organizan en longitud, masa y temperatura. Cada cliente inicia con autenticación usando MONSTER / MONSTER9. Los datos se mantienen en memoria; no se utiliza base de datos.</a:t>
+            </a:r>
+            <a:endParaRPr lang="es-MX" dirty="0">
               <a:latin typeface="Cambria"/>
               <a:ea typeface="Cambria"/>
               <a:cs typeface="Cambria"/>
               <a:sym typeface="Cambria"/>
             </a:endParaRPr>
-          </a:p>
-          <a:p>
-            <a:pPr marL="457200" lvl="0" indent="-333756" algn="just" rtl="0">
-              <a:lnSpc>
-                <a:spcPct val="107000"/>
-              </a:lnSpc>
-              <a:spcBef>
-                <a:spcPts val="0"/>
-              </a:spcBef>
-              <a:spcAft>
-                <a:spcPts val="0"/>
-              </a:spcAft>
-              <a:buSzPts val="1656"/>
-              <a:buChar char="∙"/>
-            </a:pPr>
-            <a:r>
-              <a:rPr lang="es-MX" dirty="0">
-                <a:latin typeface="Cambria"/>
-                <a:ea typeface="Cambria"/>
-                <a:cs typeface="Cambria"/>
-                <a:sym typeface="Cambria"/>
-              </a:rPr>
-              <a:t>Desarrollar e implementar un Web </a:t>
-            </a:r>
-            <a:r>
-              <a:rPr lang="es-MX" dirty="0" err="1">
-                <a:latin typeface="Cambria"/>
-                <a:ea typeface="Cambria"/>
-                <a:cs typeface="Cambria"/>
-                <a:sym typeface="Cambria"/>
-              </a:rPr>
-              <a:t>Service</a:t>
-            </a:r>
-            <a:r>
-              <a:rPr lang="es-MX" dirty="0">
-                <a:latin typeface="Cambria"/>
-                <a:ea typeface="Cambria"/>
-                <a:cs typeface="Cambria"/>
-                <a:sym typeface="Cambria"/>
-              </a:rPr>
-              <a:t> SOAP mediante </a:t>
-            </a:r>
-            <a:r>
-              <a:rPr lang="es-MX" dirty="0" err="1">
-                <a:latin typeface="Cambria"/>
-                <a:ea typeface="Cambria"/>
-                <a:cs typeface="Cambria"/>
-                <a:sym typeface="Cambria"/>
-              </a:rPr>
-              <a:t>Jakarta</a:t>
-            </a:r>
-            <a:r>
-              <a:rPr lang="es-MX" dirty="0">
-                <a:latin typeface="Cambria"/>
-                <a:ea typeface="Cambria"/>
-                <a:cs typeface="Cambria"/>
-                <a:sym typeface="Cambria"/>
-              </a:rPr>
-              <a:t> EE para el sistema de conversión de unidades, permitiendo el consumo seguro de servicios de longitud, masa y temperatura desde múltiples plataformas clientes.</a:t>
-            </a:r>
           </a:p>
         </p:txBody>
       </p:sp>
@@ -34893,8 +34089,8 @@
               <a:buChar char="◼"/>
             </a:pPr>
             <a:r>
-              <a:rPr lang="es-MX" sz="1900" dirty="0"/>
-              <a:t>Mantener el patrón MVC y la estructura modular para escalar nuevas categorías de conversión sin comprometer la arquitectura del servidor.  </a:t>
+              <a:rPr lang="es-ES" sz="1900"/>
+              <a:t>Mantén el servidor activo antes de iniciar los clientes y prueba cada operación con valores conocidos.</a:t>
             </a:r>
           </a:p>
           <a:p>
@@ -34912,16 +34108,8 @@
               <a:buChar char="◼"/>
             </a:pPr>
             <a:r>
-              <a:rPr lang="es-MX" sz="1900" dirty="0"/>
-              <a:t>Implementar </a:t>
-            </a:r>
-            <a:r>
-              <a:rPr lang="es-MX" sz="1900" dirty="0" err="1"/>
-              <a:t>SOAPFaults</a:t>
-            </a:r>
-            <a:r>
-              <a:rPr lang="es-MX" sz="1900" dirty="0"/>
-              <a:t> y un sistema de logs en Payara para estandarizar errores y rastrear el comportamiento en los clientes.  </a:t>
+              <a:rPr lang="es-ES" sz="1900"/>
+              <a:t>Conserva sincronizados los endpoints SOAP, los modelos de solicitud y las respuestas de los cuatro clientes.</a:t>
             </a:r>
           </a:p>
           <a:p>
@@ -34939,78 +34127,10 @@
               <a:buChar char="◼"/>
             </a:pPr>
             <a:r>
-              <a:rPr lang="es-MX" sz="1900" dirty="0"/>
-              <a:t>Aplicar validaciones estrictas en el tiempo de vida de las sesiones y bloquear valores de entrada inválidos, como medidas de masa negativas.  </a:t>
-            </a:r>
-          </a:p>
-          <a:p>
-            <a:pPr marL="457200" lvl="0" indent="-340106" algn="just" rtl="0">
-              <a:lnSpc>
-                <a:spcPct val="107000"/>
-              </a:lnSpc>
-              <a:spcBef>
-                <a:spcPts val="0"/>
-              </a:spcBef>
-              <a:spcAft>
-                <a:spcPts val="0"/>
-              </a:spcAft>
-              <a:buSzPts val="1756"/>
-              <a:buChar char="◼"/>
-            </a:pPr>
-            <a:r>
-              <a:rPr lang="es-MX" sz="1900" dirty="0"/>
-              <a:t>Optimizar los catálogos en memoria mediante mecanismos de caché y realizar pruebas unitarias para asegurar la exactitud de las fórmulas matemáticas.  </a:t>
-            </a:r>
-          </a:p>
-          <a:p>
-            <a:pPr marL="457200" lvl="0" indent="-340106" algn="just" rtl="0">
-              <a:lnSpc>
-                <a:spcPct val="107000"/>
-              </a:lnSpc>
-              <a:spcBef>
-                <a:spcPts val="0"/>
-              </a:spcBef>
-              <a:spcAft>
-                <a:spcPts val="0"/>
-              </a:spcAft>
-              <a:buSzPts val="1756"/>
-              <a:buChar char="◼"/>
-            </a:pPr>
-            <a:r>
-              <a:rPr lang="es-MX" sz="1900"/>
-              <a:t>Estandarizar </a:t>
-            </a:r>
-            <a:r>
-              <a:rPr lang="es-MX" sz="1900" dirty="0"/>
-              <a:t>la interfaz visual y los controles de validación en todos los clientes para ofrecer una experiencia de usuario consistente y sin bloqueos de pantalla</a:t>
-            </a:r>
-            <a:r>
-              <a:rPr lang="es-MX" sz="1900"/>
-              <a:t>.  </a:t>
-            </a:r>
-          </a:p>
-          <a:p>
-            <a:pPr marL="457200" lvl="0" indent="-340106" algn="just" rtl="0">
-              <a:lnSpc>
-                <a:spcPct val="107000"/>
-              </a:lnSpc>
-              <a:spcBef>
-                <a:spcPts val="0"/>
-              </a:spcBef>
-              <a:spcAft>
-                <a:spcPts val="0"/>
-              </a:spcAft>
-              <a:buSzPts val="1756"/>
-              <a:buChar char="◼"/>
-            </a:pPr>
-            <a:r>
-              <a:rPr lang="es-MX" sz="1900"/>
-              <a:t>Documentar </a:t>
-            </a:r>
-            <a:r>
-              <a:rPr lang="es-MX" sz="1900" dirty="0"/>
-              <a:t>detalladamente el contrato WSDL para facilitar la integración con otros lenguajes de programación en el futuro. </a:t>
-            </a:r>
+              <a:rPr lang="es-ES" sz="1900"/>
+              <a:t>Al tomar capturas para el manual, incluye el inicio de sesión, una conversión por magnitud y la ejecución del servidor. Registra el valor enviado, las unidades y el resultado visible.</a:t>
+            </a:r>
+            <a:endParaRPr lang="es-MX" sz="1900" dirty="0"/>
           </a:p>
         </p:txBody>
       </p:sp>
@@ -35354,7 +34474,7 @@
                 <a:cs typeface="Gill Sans"/>
                 <a:sym typeface="Gill Sans"/>
               </a:rPr>
-              <a:t>CREACIÓN DEL PROYECTO – CLIENTE MOVIL</a:t>
+              <a:t>CREACIÓN DEL PROYECTO – CLIENTE MÓVIL</a:t>
             </a:r>
             <a:endParaRPr sz="1400" b="0" i="0" u="none" strike="noStrike" cap="none">
               <a:solidFill>
@@ -35598,15 +34718,30 @@
               <a:buChar char="∙"/>
             </a:pPr>
             <a:r>
-              <a:rPr lang="es-ES" sz="1929" b="1" dirty="0">
+              <a:rPr lang="es-ES" sz="1929" b="1">
                 <a:latin typeface="Cambria"/>
                 <a:ea typeface="Cambria"/>
                 <a:cs typeface="Cambria"/>
                 <a:sym typeface="Cambria"/>
               </a:rPr>
-              <a:t>1.2 	Creación del servicio</a:t>
-            </a:r>
-            <a:endParaRPr sz="1929" b="1" dirty="0">
+              <a:t>1.2 CREACIÓN DEL SERVIDOR SOAP</a:t>
+            </a:r>
+          </a:p>
+          <a:p>
+            <a:pPr marL="342900" marR="0" lvl="0" indent="-359017" algn="just" rtl="0">
+              <a:lnSpc>
+                <a:spcPct val="107000"/>
+              </a:lnSpc>
+              <a:spcBef>
+                <a:spcPts val="0"/>
+              </a:spcBef>
+              <a:spcAft>
+                <a:spcPts val="0"/>
+              </a:spcAft>
+              <a:buSzPts val="1785"/>
+              <a:buChar char="∙"/>
+            </a:pPr>
+            <a:endParaRPr lang="es-ES" sz="1929" b="1">
               <a:latin typeface="Cambria"/>
               <a:ea typeface="Cambria"/>
               <a:cs typeface="Cambria"/>
@@ -35614,7 +34749,7 @@
             </a:endParaRPr>
           </a:p>
           <a:p>
-            <a:pPr marL="0" marR="0" lvl="0" indent="0" algn="just" rtl="0">
+            <a:pPr marL="342900" marR="0" lvl="0" indent="-359017" algn="just" rtl="0">
               <a:lnSpc>
                 <a:spcPct val="107000"/>
               </a:lnSpc>
@@ -35624,111 +34759,41 @@
               <a:spcAft>
                 <a:spcPts val="0"/>
               </a:spcAft>
-              <a:buSzPts val="1948"/>
-              <a:buNone/>
-            </a:pPr>
-            <a:endParaRPr dirty="0">
-              <a:latin typeface="Cambria"/>
-              <a:ea typeface="Cambria"/>
-              <a:cs typeface="Cambria"/>
-              <a:sym typeface="Cambria"/>
-            </a:endParaRPr>
-          </a:p>
-          <a:p>
-            <a:pPr marL="342900" marR="0" lvl="0" indent="-350786" algn="just" rtl="0">
-              <a:lnSpc>
-                <a:spcPct val="107000"/>
-              </a:lnSpc>
-              <a:spcBef>
-                <a:spcPts val="0"/>
-              </a:spcBef>
-              <a:spcAft>
-                <a:spcPts val="0"/>
-              </a:spcAft>
-              <a:buSzPts val="1656"/>
-              <a:buFont typeface="Noto Sans Symbols"/>
+              <a:buSzPts val="1785"/>
               <a:buChar char="∙"/>
             </a:pPr>
             <a:r>
-              <a:rPr lang="es-MX" dirty="0">
+              <a:rPr lang="es-ES" sz="1929" b="1">
                 <a:latin typeface="Cambria"/>
                 <a:ea typeface="Cambria"/>
                 <a:cs typeface="Cambria"/>
                 <a:sym typeface="Cambria"/>
               </a:rPr>
-              <a:t>Se crea el proyecto en NetBeans seleccionando ‘New Project’, ‘Java </a:t>
-            </a:r>
-            <a:r>
-              <a:rPr lang="es-MX" dirty="0" err="1">
+              <a:t>Java 11, Jakarta XML Web Services y Metro. Publisher.java publica ambos endpoints en localhost:8080.</a:t>
+            </a:r>
+          </a:p>
+          <a:p>
+            <a:pPr marL="342900" marR="0" lvl="0" indent="-359017" algn="just" rtl="0">
+              <a:lnSpc>
+                <a:spcPct val="107000"/>
+              </a:lnSpc>
+              <a:spcBef>
+                <a:spcPts val="0"/>
+              </a:spcBef>
+              <a:spcAft>
+                <a:spcPts val="0"/>
+              </a:spcAft>
+              <a:buSzPts val="1785"/>
+              <a:buChar char="∙"/>
+            </a:pPr>
+            <a:r>
+              <a:rPr lang="es-ES" sz="1929" b="1">
                 <a:latin typeface="Cambria"/>
                 <a:ea typeface="Cambria"/>
                 <a:cs typeface="Cambria"/>
                 <a:sym typeface="Cambria"/>
               </a:rPr>
-              <a:t>with</a:t>
-            </a:r>
-            <a:r>
-              <a:rPr lang="es-MX" dirty="0">
-                <a:latin typeface="Cambria"/>
-                <a:ea typeface="Cambria"/>
-                <a:cs typeface="Cambria"/>
-                <a:sym typeface="Cambria"/>
-              </a:rPr>
-              <a:t> Maven’ y ‘Web </a:t>
-            </a:r>
-            <a:r>
-              <a:rPr lang="es-MX" dirty="0" err="1">
-                <a:latin typeface="Cambria"/>
-                <a:ea typeface="Cambria"/>
-                <a:cs typeface="Cambria"/>
-                <a:sym typeface="Cambria"/>
-              </a:rPr>
-              <a:t>Application</a:t>
-            </a:r>
-            <a:r>
-              <a:rPr lang="es-MX" dirty="0">
-                <a:latin typeface="Cambria"/>
-                <a:ea typeface="Cambria"/>
-                <a:cs typeface="Cambria"/>
-                <a:sym typeface="Cambria"/>
-              </a:rPr>
-              <a:t>’. Se coloca el nombre del proyecto, ubicación y grupo. Se selecciona el servidor Payara y la versión de </a:t>
-            </a:r>
-            <a:r>
-              <a:rPr lang="es-MX" dirty="0" err="1">
-                <a:latin typeface="Cambria"/>
-                <a:ea typeface="Cambria"/>
-                <a:cs typeface="Cambria"/>
-                <a:sym typeface="Cambria"/>
-              </a:rPr>
-              <a:t>Jakarta</a:t>
-            </a:r>
-            <a:r>
-              <a:rPr lang="es-MX" dirty="0">
-                <a:latin typeface="Cambria"/>
-                <a:ea typeface="Cambria"/>
-                <a:cs typeface="Cambria"/>
-                <a:sym typeface="Cambria"/>
-              </a:rPr>
-              <a:t>. Finalmente se hace clic en ‘</a:t>
-            </a:r>
-            <a:r>
-              <a:rPr lang="es-MX" dirty="0" err="1">
-                <a:latin typeface="Cambria"/>
-                <a:ea typeface="Cambria"/>
-                <a:cs typeface="Cambria"/>
-                <a:sym typeface="Cambria"/>
-              </a:rPr>
-              <a:t>Finish</a:t>
-            </a:r>
-            <a:r>
-              <a:rPr lang="es-MX" dirty="0">
-                <a:latin typeface="Cambria"/>
-                <a:ea typeface="Cambria"/>
-                <a:cs typeface="Cambria"/>
-                <a:sym typeface="Cambria"/>
-              </a:rPr>
-              <a:t>’.</a:t>
+              <a:t>Compila desde 04. SERVIDOR con mvn clean package.</a:t>
             </a:r>
             <a:endParaRPr sz="1800" dirty="0">
               <a:latin typeface="Cambria"/>
@@ -36079,7 +35144,7 @@
                 <a:cs typeface="Gill Sans"/>
                 <a:sym typeface="Gill Sans"/>
               </a:rPr>
-              <a:t>CREACIÓN DEL PROYECTO – CLIENTE MOVIL</a:t>
+              <a:t>CREACIÓN DEL PROYECTO – CLIENTE MÓVIL</a:t>
             </a:r>
             <a:endParaRPr sz="1400" b="0" i="0" u="none" strike="noStrike" cap="none">
               <a:solidFill>
@@ -36203,13 +35268,7 @@
       </p:sp>
       <p:pic>
         <p:nvPicPr>
-          <p:cNvPr id="7" name="image36.png">
-            <a:extLst>
-              <a:ext uri="{FF2B5EF4-FFF2-40B4-BE49-F238E27FC236}">
-                <a16:creationId xmlns:a16="http://schemas.microsoft.com/office/drawing/2014/main" id="{9DD3AA3B-71CD-41A0-94E9-1AA996A870B9}"/>
-              </a:ext>
-            </a:extLst>
-          </p:cNvPr>
+          <p:cNvPr id="101" name="soap_server_pom.png"/>
           <p:cNvPicPr/>
           <p:nvPr/>
         </p:nvPicPr>
@@ -36228,18 +35287,16 @@
           <a:prstGeom prst="rect">
             <a:avLst/>
           </a:prstGeom>
-          <a:ln/>
+          <a:ln w="12700">
+            <a:solidFill>
+              <a:srgbClr val="CCCCCC"/>
+            </a:solidFill>
+          </a:ln>
         </p:spPr>
       </p:pic>
       <p:pic>
         <p:nvPicPr>
-          <p:cNvPr id="8" name="image49.png">
-            <a:extLst>
-              <a:ext uri="{FF2B5EF4-FFF2-40B4-BE49-F238E27FC236}">
-                <a16:creationId xmlns:a16="http://schemas.microsoft.com/office/drawing/2014/main" id="{8ABA2AAA-2665-42FC-A20C-12B2C599D344}"/>
-              </a:ext>
-            </a:extLst>
-          </p:cNvPr>
+          <p:cNvPr id="102" name="soap_server_endpoint.png"/>
           <p:cNvPicPr/>
           <p:nvPr/>
         </p:nvPicPr>
@@ -36258,18 +35315,16 @@
           <a:prstGeom prst="rect">
             <a:avLst/>
           </a:prstGeom>
-          <a:ln/>
+          <a:ln w="12700">
+            <a:solidFill>
+              <a:srgbClr val="CCCCCC"/>
+            </a:solidFill>
+          </a:ln>
         </p:spPr>
       </p:pic>
       <p:pic>
         <p:nvPicPr>
-          <p:cNvPr id="9" name="image13.png">
-            <a:extLst>
-              <a:ext uri="{FF2B5EF4-FFF2-40B4-BE49-F238E27FC236}">
-                <a16:creationId xmlns:a16="http://schemas.microsoft.com/office/drawing/2014/main" id="{5675B0B0-69AE-4350-A7C6-4D9153096144}"/>
-              </a:ext>
-            </a:extLst>
-          </p:cNvPr>
+          <p:cNvPr id="103" name="soap_server_paquetes.png"/>
           <p:cNvPicPr/>
           <p:nvPr/>
         </p:nvPicPr>
@@ -36288,7 +35343,11 @@
           <a:prstGeom prst="rect">
             <a:avLst/>
           </a:prstGeom>
-          <a:ln/>
+          <a:ln w="12700">
+            <a:solidFill>
+              <a:srgbClr val="CCCCCC"/>
+            </a:solidFill>
+          </a:ln>
         </p:spPr>
       </p:pic>
     </p:spTree>
@@ -36413,18 +35472,17 @@
               <a:buChar char="∙"/>
             </a:pPr>
             <a:r>
-              <a:rPr lang="es-ES" sz="1350" b="1" dirty="0">
+              <a:rPr lang="es-ES" sz="1350" b="1">
                 <a:latin typeface="Cambria"/>
                 <a:ea typeface="Cambria"/>
                 <a:cs typeface="Cambria"/>
                 <a:sym typeface="Cambria"/>
               </a:rPr>
-              <a:t>1.2 	CREACIÓN DEL SERVICIO WEB</a:t>
-            </a:r>
-            <a:endParaRPr sz="1350" b="1" dirty="0"/>
-          </a:p>
-          <a:p>
-            <a:pPr marL="457200" lvl="0" indent="-333756" algn="just" rtl="0">
+              <a:t>1.2 CONTRATO DEL SERVICIO SOAP</a:t>
+            </a:r>
+          </a:p>
+          <a:p>
+            <a:pPr marL="342900" marR="0" lvl="0" indent="-331355" algn="just" rtl="0">
               <a:lnSpc>
                 <a:spcPct val="107000"/>
               </a:lnSpc>
@@ -36434,71 +35492,62 @@
               <a:spcAft>
                 <a:spcPts val="0"/>
               </a:spcAft>
-              <a:buSzPts val="1656"/>
+              <a:buSzPts val="1350"/>
               <a:buChar char="∙"/>
             </a:pPr>
-            <a:r>
-              <a:rPr lang="es-MX" sz="1300" dirty="0">
+            <a:endParaRPr lang="es-ES" sz="1350" b="1">
+              <a:latin typeface="Cambria"/>
+              <a:ea typeface="Cambria"/>
+              <a:cs typeface="Cambria"/>
+              <a:sym typeface="Cambria"/>
+            </a:endParaRPr>
+          </a:p>
+          <a:p>
+            <a:pPr marL="342900" marR="0" lvl="0" indent="-331355" algn="just" rtl="0">
+              <a:lnSpc>
+                <a:spcPct val="107000"/>
+              </a:lnSpc>
+              <a:spcBef>
+                <a:spcPts val="0"/>
+              </a:spcBef>
+              <a:spcAft>
+                <a:spcPts val="0"/>
+              </a:spcAft>
+              <a:buSzPts val="1350"/>
+              <a:buChar char="∙"/>
+            </a:pPr>
+            <a:r>
+              <a:rPr lang="es-ES" sz="1350" b="1">
                 <a:latin typeface="Cambria"/>
                 <a:ea typeface="Cambria"/>
                 <a:cs typeface="Cambria"/>
                 <a:sym typeface="Cambria"/>
               </a:rPr>
-              <a:t>Para la exposición de las funcionalidades hacia los clientes (Android y Java), se utiliza la especificación </a:t>
-            </a:r>
-            <a:r>
-              <a:rPr lang="es-MX" sz="1300" dirty="0" err="1">
+              <a:t>WSDL describe las operaciones SOAP/XML de autenticación y conversión para longitud, masa y temperatura.</a:t>
+            </a:r>
+          </a:p>
+          <a:p>
+            <a:pPr marL="342900" marR="0" lvl="0" indent="-331355" algn="just" rtl="0">
+              <a:lnSpc>
+                <a:spcPct val="107000"/>
+              </a:lnSpc>
+              <a:spcBef>
+                <a:spcPts val="0"/>
+              </a:spcBef>
+              <a:spcAft>
+                <a:spcPts val="0"/>
+              </a:spcAft>
+              <a:buSzPts val="1350"/>
+              <a:buChar char="∙"/>
+            </a:pPr>
+            <a:r>
+              <a:rPr lang="es-ES" sz="1350" b="1">
                 <a:latin typeface="Cambria"/>
                 <a:ea typeface="Cambria"/>
                 <a:cs typeface="Cambria"/>
                 <a:sym typeface="Cambria"/>
               </a:rPr>
-              <a:t>Jakarta</a:t>
-            </a:r>
-            <a:r>
-              <a:rPr lang="es-MX" sz="1300" dirty="0">
-                <a:latin typeface="Cambria"/>
-                <a:ea typeface="Cambria"/>
-                <a:cs typeface="Cambria"/>
-                <a:sym typeface="Cambria"/>
-              </a:rPr>
-              <a:t> XML Web </a:t>
-            </a:r>
-            <a:r>
-              <a:rPr lang="es-MX" sz="1300" dirty="0" err="1">
-                <a:latin typeface="Cambria"/>
-                <a:ea typeface="Cambria"/>
-                <a:cs typeface="Cambria"/>
-                <a:sym typeface="Cambria"/>
-              </a:rPr>
-              <a:t>Services</a:t>
-            </a:r>
-            <a:r>
-              <a:rPr lang="es-MX" sz="1300" dirty="0">
-                <a:latin typeface="Cambria"/>
-                <a:ea typeface="Cambria"/>
-                <a:cs typeface="Cambria"/>
-                <a:sym typeface="Cambria"/>
-              </a:rPr>
-              <a:t> (JAX-WS). En esta capa se definen los </a:t>
-            </a:r>
-            <a:r>
-              <a:rPr lang="es-MX" sz="1300" dirty="0" err="1">
-                <a:latin typeface="Cambria"/>
-                <a:ea typeface="Cambria"/>
-                <a:cs typeface="Cambria"/>
-                <a:sym typeface="Cambria"/>
-              </a:rPr>
-              <a:t>Endpoints</a:t>
-            </a:r>
-            <a:r>
-              <a:rPr lang="es-MX" sz="1300" dirty="0">
-                <a:latin typeface="Cambria"/>
-                <a:ea typeface="Cambria"/>
-                <a:cs typeface="Cambria"/>
-                <a:sym typeface="Cambria"/>
-              </a:rPr>
-              <a:t> que transforman las peticiones XML en llamadas a los servicios de lógica de negocio anteriormente creados.</a:t>
+              <a:t>Autentica al usuario antes de invocar una conversión.</a:t>
             </a:r>
             <a:endParaRPr lang="es-MX" sz="1800" dirty="0">
               <a:latin typeface="Cambria"/>
@@ -36849,7 +35898,7 @@
                 <a:cs typeface="Gill Sans"/>
                 <a:sym typeface="Gill Sans"/>
               </a:rPr>
-              <a:t>CREACIÓN DEL PROYECTO – CLIENTE MOVIL</a:t>
+              <a:t>CREACIÓN DEL PROYECTO – CLIENTE MÓVIL</a:t>
             </a:r>
             <a:endParaRPr sz="1400" b="0" i="0" u="none" strike="noStrike" cap="none">
               <a:solidFill>
@@ -36973,58 +36022,22 @@
       </p:sp>
       <p:pic>
         <p:nvPicPr>
-          <p:cNvPr id="7" name="image6.png">
-            <a:extLst>
-              <a:ext uri="{FF2B5EF4-FFF2-40B4-BE49-F238E27FC236}">
-                <a16:creationId xmlns:a16="http://schemas.microsoft.com/office/drawing/2014/main" id="{428558EB-DC7D-4244-A038-CB350AEFB948}"/>
-              </a:ext>
-            </a:extLst>
-          </p:cNvPr>
-          <p:cNvPicPr/>
+          <p:cNvPr id="2" name="Captura 5 evidencia_ti-1-1-soap-java_s5-2.png" descr="WSDL del servicio SOAP ejecutado"/>
+          <p:cNvPicPr>
+            <a:picLocks noChangeAspect="1"/>
+          </p:cNvPicPr>
           <p:nvPr/>
         </p:nvPicPr>
         <p:blipFill>
           <a:blip r:embed="rId3"/>
-          <a:srcRect/>
           <a:stretch>
             <a:fillRect/>
           </a:stretch>
         </p:blipFill>
         <p:spPr>
           <a:xfrm>
-            <a:off x="916342" y="3401152"/>
-            <a:ext cx="2105025" cy="885825"/>
-          </a:xfrm>
-          <a:prstGeom prst="rect">
-            <a:avLst/>
-          </a:prstGeom>
-          <a:ln/>
-        </p:spPr>
-      </p:pic>
-      <p:pic>
-        <p:nvPicPr>
-          <p:cNvPr id="3" name="Imagen 2">
-            <a:extLst>
-              <a:ext uri="{FF2B5EF4-FFF2-40B4-BE49-F238E27FC236}">
-                <a16:creationId xmlns:a16="http://schemas.microsoft.com/office/drawing/2014/main" id="{527E0651-8148-472C-8A1D-1424C0320C67}"/>
-              </a:ext>
-            </a:extLst>
-          </p:cNvPr>
-          <p:cNvPicPr>
-            <a:picLocks noChangeAspect="1"/>
-          </p:cNvPicPr>
-          <p:nvPr/>
-        </p:nvPicPr>
-        <p:blipFill>
-          <a:blip r:embed="rId4"/>
-          <a:stretch>
-            <a:fillRect/>
-          </a:stretch>
-        </p:blipFill>
-        <p:spPr>
-          <a:xfrm>
-            <a:off x="3174120" y="3429000"/>
-            <a:ext cx="5843760" cy="2964849"/>
+            <a:off x="4011478" y="3429000"/>
+            <a:ext cx="4169043" cy="2964849"/>
           </a:xfrm>
           <a:prstGeom prst="rect">
             <a:avLst/>
@@ -37159,9 +36172,24 @@
                 <a:cs typeface="Cambria"/>
                 <a:sym typeface="Cambria"/>
               </a:rPr>
-              <a:t>ESTRUCTURA MVC</a:t>
-            </a:r>
-            <a:endParaRPr sz="1677" b="1">
+              <a:t>ARQUITECTURA DEL SERVIDOR</a:t>
+            </a:r>
+          </a:p>
+          <a:p>
+            <a:pPr marL="342900" marR="0" lvl="0" indent="-350901" algn="just" rtl="0">
+              <a:lnSpc>
+                <a:spcPct val="107000"/>
+              </a:lnSpc>
+              <a:spcBef>
+                <a:spcPts val="0"/>
+              </a:spcBef>
+              <a:spcAft>
+                <a:spcPts val="0"/>
+              </a:spcAft>
+              <a:buSzPts val="1677"/>
+              <a:buChar char="∙"/>
+            </a:pPr>
+            <a:endParaRPr lang="es-ES" sz="1677" b="1">
               <a:latin typeface="Cambria"/>
               <a:ea typeface="Cambria"/>
               <a:cs typeface="Cambria"/>
@@ -37169,7 +36197,7 @@
             </a:endParaRPr>
           </a:p>
           <a:p>
-            <a:pPr marL="457200" marR="0" lvl="0" indent="0" algn="just" rtl="0">
+            <a:pPr marL="342900" marR="0" lvl="0" indent="-350901" algn="just" rtl="0">
               <a:lnSpc>
                 <a:spcPct val="107000"/>
               </a:lnSpc>
@@ -37179,81 +36207,7 @@
               <a:spcAft>
                 <a:spcPts val="0"/>
               </a:spcAft>
-              <a:buSzPts val="1790"/>
-              <a:buNone/>
-            </a:pPr>
-            <a:endParaRPr sz="1677" b="1">
-              <a:latin typeface="Cambria"/>
-              <a:ea typeface="Cambria"/>
-              <a:cs typeface="Cambria"/>
-              <a:sym typeface="Cambria"/>
-            </a:endParaRPr>
-          </a:p>
-          <a:p>
-            <a:pPr marL="342900" marR="0" lvl="0" indent="-350901" algn="just" rtl="0">
-              <a:lnSpc>
-                <a:spcPct val="107000"/>
-              </a:lnSpc>
-              <a:spcBef>
-                <a:spcPts val="0"/>
-              </a:spcBef>
-              <a:spcAft>
-                <a:spcPts val="0"/>
-              </a:spcAft>
               <a:buSzPts val="1677"/>
-              <a:buFont typeface="Noto Sans Symbols"/>
-              <a:buChar char="∙"/>
-            </a:pPr>
-            <a:r>
-              <a:rPr lang="es-ES" sz="1677">
-                <a:latin typeface="Cambria"/>
-                <a:ea typeface="Cambria"/>
-                <a:cs typeface="Cambria"/>
-                <a:sym typeface="Cambria"/>
-              </a:rPr>
-              <a:t>El proyecto sigue el patrón Modelo-Vista-Controlador (MVC):</a:t>
-            </a:r>
-            <a:endParaRPr sz="1677">
-              <a:latin typeface="Cambria"/>
-              <a:ea typeface="Cambria"/>
-              <a:cs typeface="Cambria"/>
-              <a:sym typeface="Cambria"/>
-            </a:endParaRPr>
-          </a:p>
-          <a:p>
-            <a:pPr marL="0" lvl="0" indent="0" algn="just" rtl="0">
-              <a:lnSpc>
-                <a:spcPct val="107000"/>
-              </a:lnSpc>
-              <a:spcBef>
-                <a:spcPts val="0"/>
-              </a:spcBef>
-              <a:spcAft>
-                <a:spcPts val="0"/>
-              </a:spcAft>
-              <a:buSzPts val="1790"/>
-              <a:buNone/>
-            </a:pPr>
-            <a:endParaRPr sz="1677">
-              <a:latin typeface="Cambria"/>
-              <a:ea typeface="Cambria"/>
-              <a:cs typeface="Cambria"/>
-              <a:sym typeface="Cambria"/>
-            </a:endParaRPr>
-          </a:p>
-          <a:p>
-            <a:pPr marL="457200" lvl="0" indent="-335089" algn="just" rtl="0">
-              <a:lnSpc>
-                <a:spcPct val="107000"/>
-              </a:lnSpc>
-              <a:spcBef>
-                <a:spcPts val="0"/>
-              </a:spcBef>
-              <a:spcAft>
-                <a:spcPts val="0"/>
-              </a:spcAft>
-              <a:buSzPts val="1677"/>
-              <a:buFont typeface="Cambria"/>
               <a:buChar char="∙"/>
             </a:pPr>
             <a:r>
@@ -37263,17 +36217,11 @@
                 <a:cs typeface="Cambria"/>
                 <a:sym typeface="Cambria"/>
               </a:rPr>
-              <a:t>Se define el nombre de los diferentes paquetes para la integración correcta del servicio, como modelo, servicio, ws</a:t>
-            </a:r>
-            <a:endParaRPr sz="1677" b="1">
-              <a:latin typeface="Cambria"/>
-              <a:ea typeface="Cambria"/>
-              <a:cs typeface="Cambria"/>
-              <a:sym typeface="Cambria"/>
-            </a:endParaRPr>
-          </a:p>
-          <a:p>
-            <a:pPr marL="0" lvl="0" indent="0" algn="just" rtl="0">
+              <a:t>La solución separa la publicación del servicio de la lógica de conversión. Publisher inicializa Metro; los endpoints SOAP delegan autenticación y conversiones en las clases de servicio.</a:t>
+            </a:r>
+          </a:p>
+          <a:p>
+            <a:pPr marL="342900" marR="0" lvl="0" indent="-350901" algn="just" rtl="0">
               <a:lnSpc>
                 <a:spcPct val="107000"/>
               </a:lnSpc>
@@ -37283,51 +36231,18 @@
               <a:spcAft>
                 <a:spcPts val="0"/>
               </a:spcAft>
-              <a:buNone/>
-            </a:pPr>
-            <a:endParaRPr sz="1677" b="1">
-              <a:latin typeface="Cambria"/>
-              <a:ea typeface="Cambria"/>
-              <a:cs typeface="Cambria"/>
-              <a:sym typeface="Cambria"/>
-            </a:endParaRPr>
-          </a:p>
-          <a:p>
-            <a:pPr marL="457200" marR="0" lvl="0" indent="0" algn="just" rtl="0">
-              <a:lnSpc>
-                <a:spcPct val="107000"/>
-              </a:lnSpc>
-              <a:spcBef>
-                <a:spcPts val="0"/>
-              </a:spcBef>
-              <a:spcAft>
-                <a:spcPts val="0"/>
-              </a:spcAft>
-              <a:buSzPts val="1790"/>
-              <a:buNone/>
-            </a:pPr>
-            <a:endParaRPr sz="1591">
-              <a:latin typeface="Cambria"/>
-              <a:ea typeface="Cambria"/>
-              <a:cs typeface="Cambria"/>
-              <a:sym typeface="Cambria"/>
-            </a:endParaRPr>
-          </a:p>
-          <a:p>
-            <a:pPr marL="342900" marR="0" lvl="0" indent="-245629" algn="just" rtl="0">
-              <a:lnSpc>
-                <a:spcPct val="107000"/>
-              </a:lnSpc>
-              <a:spcBef>
-                <a:spcPts val="0"/>
-              </a:spcBef>
-              <a:spcAft>
-                <a:spcPts val="0"/>
-              </a:spcAft>
-              <a:buSzPts val="1656"/>
-              <a:buFont typeface="Noto Sans Symbols"/>
-              <a:buNone/>
-            </a:pPr>
+              <a:buSzPts val="1677"/>
+              <a:buChar char="∙"/>
+            </a:pPr>
+            <a:r>
+              <a:rPr lang="es-ES" sz="1677" b="1">
+                <a:latin typeface="Cambria"/>
+                <a:ea typeface="Cambria"/>
+                <a:cs typeface="Cambria"/>
+                <a:sym typeface="Cambria"/>
+              </a:rPr>
+              <a:t>Los catálogos de unidades y las fórmulas permanecen en memoria.</a:t>
+            </a:r>
             <a:endParaRPr sz="1800">
               <a:latin typeface="Cambria"/>
               <a:ea typeface="Cambria"/>
@@ -37677,7 +36592,7 @@
                 <a:cs typeface="Gill Sans"/>
                 <a:sym typeface="Gill Sans"/>
               </a:rPr>
-              <a:t>CREACIÓN DEL PROYECTO – CLIENTE MOVIL</a:t>
+              <a:t>CREACIÓN DEL PROYECTO – CLIENTE MÓVIL</a:t>
             </a:r>
             <a:endParaRPr sz="1400" b="0" i="0" u="none" strike="noStrike" cap="none">
               <a:solidFill>
@@ -37801,32 +36716,26 @@
       </p:sp>
       <p:pic>
         <p:nvPicPr>
-          <p:cNvPr id="6" name="image5.png">
-            <a:extLst>
-              <a:ext uri="{FF2B5EF4-FFF2-40B4-BE49-F238E27FC236}">
-                <a16:creationId xmlns:a16="http://schemas.microsoft.com/office/drawing/2014/main" id="{E15EFA1F-4F46-4525-AB19-6551C268E565}"/>
-              </a:ext>
-            </a:extLst>
-          </p:cNvPr>
-          <p:cNvPicPr/>
+          <p:cNvPr id="2" name="Captura 6 evidencia_ti-1-1-soap-java_s6-2.png" descr="Paquetes y componentes del servidor SOAP Java"/>
+          <p:cNvPicPr>
+            <a:picLocks noChangeAspect="1"/>
+          </p:cNvPicPr>
           <p:nvPr/>
         </p:nvPicPr>
         <p:blipFill>
           <a:blip r:embed="rId3"/>
-          <a:srcRect/>
           <a:stretch>
             <a:fillRect/>
           </a:stretch>
         </p:blipFill>
         <p:spPr>
           <a:xfrm>
-            <a:off x="5749937" y="2870106"/>
-            <a:ext cx="3268557" cy="2033588"/>
+            <a:off x="5749937" y="2942128"/>
+            <a:ext cx="3268557" cy="1889543"/>
           </a:xfrm>
           <a:prstGeom prst="rect">
             <a:avLst/>
           </a:prstGeom>
-          <a:ln/>
         </p:spPr>
       </p:pic>
     </p:spTree>
@@ -37920,8 +36829,8 @@
         </p:nvSpPr>
         <p:spPr>
           <a:xfrm>
-            <a:off x="581192" y="827236"/>
-            <a:ext cx="3709200" cy="3980100"/>
+            <a:off x="581660" y="2108200"/>
+            <a:ext cx="3048000" cy="3810000"/>
           </a:xfrm>
           <a:prstGeom prst="rect">
             <a:avLst/>
@@ -37950,15 +36859,29 @@
               <a:buNone/>
             </a:pPr>
             <a:r>
-              <a:rPr lang="es-ES" b="1" dirty="0">
+              <a:rPr lang="es-ES" b="1">
                 <a:latin typeface="Cambria"/>
                 <a:ea typeface="Cambria"/>
                 <a:cs typeface="Cambria"/>
                 <a:sym typeface="Cambria"/>
               </a:rPr>
-              <a:t>SERVICIO</a:t>
-            </a:r>
-            <a:endParaRPr sz="1670" dirty="0">
+              <a:t>DESPLIEGUE EN PAYARA SERVER</a:t>
+            </a:r>
+          </a:p>
+          <a:p>
+            <a:pPr marL="0" lvl="0" indent="0" algn="l" rtl="0">
+              <a:lnSpc>
+                <a:spcPct val="115000"/>
+              </a:lnSpc>
+              <a:spcBef>
+                <a:spcPts val="0"/>
+              </a:spcBef>
+              <a:spcAft>
+                <a:spcPts val="0"/>
+              </a:spcAft>
+              <a:buNone/>
+            </a:pPr>
+            <a:endParaRPr lang="es-ES" b="1">
               <a:latin typeface="Cambria"/>
               <a:ea typeface="Cambria"/>
               <a:cs typeface="Cambria"/>
@@ -37971,27 +36894,51 @@
                 <a:spcPct val="115000"/>
               </a:lnSpc>
               <a:spcBef>
-                <a:spcPts val="1200"/>
-              </a:spcBef>
-              <a:spcAft>
-                <a:spcPts val="1200"/>
-              </a:spcAft>
-              <a:buClr>
-                <a:srgbClr val="000000"/>
-              </a:buClr>
-              <a:buSzPts val="1790"/>
-              <a:buFont typeface="Arial"/>
-              <a:buNone/>
-            </a:pPr>
-            <a:r>
-              <a:rPr lang="es-MX" sz="1670" dirty="0">
+                <a:spcPts val="0"/>
+              </a:spcBef>
+              <a:spcAft>
+                <a:spcPts val="0"/>
+              </a:spcAft>
+              <a:buNone/>
+            </a:pPr>
+            <a:r>
+              <a:rPr lang="es-ES" b="1">
                 <a:latin typeface="Cambria"/>
                 <a:ea typeface="Cambria"/>
                 <a:cs typeface="Cambria"/>
                 <a:sym typeface="Cambria"/>
               </a:rPr>
-              <a:t> Aquí se separa la lógica matemática y de seguridad del protocolo de comunicación. </a:t>
-            </a:r>
+              <a:t>Payara Server despliega ServidorSOAP.war en localhost:8080 y publica ServicioAutenticacion y ServicioConversion.</a:t>
+            </a:r>
+          </a:p>
+          <a:p>
+            <a:pPr marL="0" lvl="0" indent="0" algn="l" rtl="0">
+              <a:lnSpc>
+                <a:spcPct val="115000"/>
+              </a:lnSpc>
+              <a:spcBef>
+                <a:spcPts val="0"/>
+              </a:spcBef>
+              <a:spcAft>
+                <a:spcPts val="0"/>
+              </a:spcAft>
+              <a:buNone/>
+            </a:pPr>
+            <a:r>
+              <a:rPr lang="es-ES" b="1">
+                <a:latin typeface="Cambria"/>
+                <a:ea typeface="Cambria"/>
+                <a:cs typeface="Cambria"/>
+                <a:sym typeface="Cambria"/>
+              </a:rPr>
+              <a:t>Mantén activo Payara Server mientras se ejecutan los clientes Java.</a:t>
+            </a:r>
+            <a:endParaRPr lang="es-MX" sz="1670" dirty="0">
+              <a:latin typeface="Cambria"/>
+              <a:ea typeface="Cambria"/>
+              <a:cs typeface="Cambria"/>
+              <a:sym typeface="Cambria"/>
+            </a:endParaRPr>
           </a:p>
         </p:txBody>
       </p:sp>
@@ -38335,7 +37282,7 @@
                 <a:cs typeface="Gill Sans"/>
                 <a:sym typeface="Gill Sans"/>
               </a:rPr>
-              <a:t>CREACIÓN DEL PROYECTO – CLIENTE MOVIL</a:t>
+              <a:t>CREACIÓN DEL PROYECTO – CLIENTE MÓVIL</a:t>
             </a:r>
             <a:endParaRPr sz="1400" b="0" i="0" u="none" strike="noStrike" cap="none">
               <a:solidFill>
@@ -38459,20 +37406,13 @@
       </p:sp>
       <p:pic>
         <p:nvPicPr>
-          <p:cNvPr id="5" name="Imagen 4">
-            <a:extLst>
-              <a:ext uri="{FF2B5EF4-FFF2-40B4-BE49-F238E27FC236}">
-                <a16:creationId xmlns:a16="http://schemas.microsoft.com/office/drawing/2014/main" id="{21807D19-2FF4-4A91-B9E9-CD967057F7EB}"/>
-              </a:ext>
-            </a:extLst>
-          </p:cNvPr>
-          <p:cNvPicPr>
-            <a:picLocks noChangeAspect="1"/>
-          </p:cNvPicPr>
+          <p:cNvPr id="104" name="soap_server_publisher_exec.png"/>
+          <p:cNvPicPr/>
           <p:nvPr/>
         </p:nvPicPr>
         <p:blipFill>
           <a:blip r:embed="rId3"/>
+          <a:srcRect/>
           <a:stretch>
             <a:fillRect/>
           </a:stretch>
@@ -38480,11 +37420,16 @@
         <p:spPr>
           <a:xfrm>
             <a:off x="3875414" y="2817286"/>
-            <a:ext cx="4441055" cy="3615432"/>
+            <a:ext cx="5100000" cy="3615432"/>
           </a:xfrm>
           <a:prstGeom prst="rect">
             <a:avLst/>
           </a:prstGeom>
+          <a:ln w="12700">
+            <a:solidFill>
+              <a:srgbClr val="CCCCCC"/>
+            </a:solidFill>
+          </a:ln>
         </p:spPr>
       </p:pic>
     </p:spTree>
@@ -38578,8 +37523,8 @@
         </p:nvSpPr>
         <p:spPr>
           <a:xfrm>
-            <a:off x="684150" y="1921750"/>
-            <a:ext cx="6018600" cy="1013700"/>
+            <a:off x="684530" y="1921510"/>
+            <a:ext cx="6018600" cy="698500"/>
           </a:xfrm>
           <a:prstGeom prst="rect">
             <a:avLst/>
@@ -38966,7 +37911,7 @@
                 <a:cs typeface="Gill Sans"/>
                 <a:sym typeface="Gill Sans"/>
               </a:rPr>
-              <a:t>CREACIÓN DEL PROYECTO – CLIENTE MOVIL</a:t>
+              <a:t>CREACIÓN DEL PROYECTO – CLIENTE MÓVIL</a:t>
             </a:r>
             <a:endParaRPr sz="1400" b="0" i="0" u="none" strike="noStrike" cap="none">
               <a:solidFill>
@@ -39090,133 +38035,103 @@
       </p:sp>
       <p:pic>
         <p:nvPicPr>
-          <p:cNvPr id="9" name="image10.png">
-            <a:extLst>
-              <a:ext uri="{FF2B5EF4-FFF2-40B4-BE49-F238E27FC236}">
-                <a16:creationId xmlns:a16="http://schemas.microsoft.com/office/drawing/2014/main" id="{C00D0898-3B75-4E71-A3BC-ADE5BAF9C153}"/>
-              </a:ext>
-            </a:extLst>
-          </p:cNvPr>
-          <p:cNvPicPr/>
+          <p:cNvPr id="3" name="Captura 8 evidencia_ti-1-1-soap-java_s8-3.png" descr="Prueba de conversión de temperatura"/>
+          <p:cNvPicPr>
+            <a:picLocks noChangeAspect="1"/>
+          </p:cNvPicPr>
           <p:nvPr/>
         </p:nvPicPr>
         <p:blipFill>
           <a:blip r:embed="rId3"/>
-          <a:srcRect/>
           <a:stretch>
             <a:fillRect/>
           </a:stretch>
         </p:blipFill>
         <p:spPr>
           <a:xfrm>
-            <a:off x="679863" y="2724790"/>
-            <a:ext cx="3776665" cy="1345186"/>
+            <a:off x="2961150" y="4519592"/>
+            <a:ext cx="2761232" cy="1963673"/>
           </a:xfrm>
           <a:prstGeom prst="rect">
             <a:avLst/>
           </a:prstGeom>
-          <a:ln/>
         </p:spPr>
       </p:pic>
       <p:pic>
         <p:nvPicPr>
-          <p:cNvPr id="10" name="image19.png">
-            <a:extLst>
-              <a:ext uri="{FF2B5EF4-FFF2-40B4-BE49-F238E27FC236}">
-                <a16:creationId xmlns:a16="http://schemas.microsoft.com/office/drawing/2014/main" id="{D97C7847-BB11-464C-87D1-348F8D494995}"/>
-              </a:ext>
-            </a:extLst>
-          </p:cNvPr>
-          <p:cNvPicPr/>
+          <p:cNvPr id="4" name="Captura 8 evidencia_ti-1-1-soap-java_s8-4.png" descr="Prueba de conversión de masa"/>
+          <p:cNvPicPr>
+            <a:picLocks noChangeAspect="1"/>
+          </p:cNvPicPr>
           <p:nvPr/>
         </p:nvPicPr>
         <p:blipFill>
           <a:blip r:embed="rId4"/>
-          <a:srcRect/>
           <a:stretch>
             <a:fillRect/>
           </a:stretch>
         </p:blipFill>
         <p:spPr>
           <a:xfrm>
-            <a:off x="4671319" y="1994161"/>
-            <a:ext cx="2849245" cy="2075815"/>
+            <a:off x="330934" y="4484349"/>
+            <a:ext cx="2630216" cy="1870500"/>
           </a:xfrm>
           <a:prstGeom prst="rect">
             <a:avLst/>
           </a:prstGeom>
-          <a:ln/>
         </p:spPr>
       </p:pic>
       <p:pic>
         <p:nvPicPr>
-          <p:cNvPr id="11" name="image25.png">
-            <a:extLst>
-              <a:ext uri="{FF2B5EF4-FFF2-40B4-BE49-F238E27FC236}">
-                <a16:creationId xmlns:a16="http://schemas.microsoft.com/office/drawing/2014/main" id="{FB00FCA0-58FC-4B2C-83D1-5B2DD58DF7CE}"/>
-              </a:ext>
-            </a:extLst>
-          </p:cNvPr>
-          <p:cNvPicPr/>
+          <p:cNvPr id="5" name="Captura 8 evidencia_ti-1-1-soap-java_s8-5.png" descr="Prueba de conversión de longitud"/>
+          <p:cNvPicPr>
+            <a:picLocks noChangeAspect="1"/>
+          </p:cNvPicPr>
           <p:nvPr/>
         </p:nvPicPr>
         <p:blipFill>
           <a:blip r:embed="rId5"/>
-          <a:srcRect/>
           <a:stretch>
             <a:fillRect/>
           </a:stretch>
         </p:blipFill>
         <p:spPr>
           <a:xfrm>
-            <a:off x="330934" y="4415104"/>
-            <a:ext cx="2630216" cy="2008990"/>
+            <a:off x="4671319" y="2018936"/>
+            <a:ext cx="2849245" cy="2026264"/>
           </a:xfrm>
           <a:prstGeom prst="rect">
             <a:avLst/>
           </a:prstGeom>
-          <a:ln/>
         </p:spPr>
       </p:pic>
       <p:pic>
         <p:nvPicPr>
-          <p:cNvPr id="12" name="image46.png">
-            <a:extLst>
-              <a:ext uri="{FF2B5EF4-FFF2-40B4-BE49-F238E27FC236}">
-                <a16:creationId xmlns:a16="http://schemas.microsoft.com/office/drawing/2014/main" id="{2F3FB709-F833-481A-B894-7917ACFAFAE5}"/>
-              </a:ext>
-            </a:extLst>
-          </p:cNvPr>
-          <p:cNvPicPr/>
+          <p:cNvPr id="6" name="Captura 8 evidencia_ti-1-1-soap-java_s8-6.png" descr="Prueba de autenticación del cliente SOAP Java"/>
+          <p:cNvPicPr>
+            <a:picLocks noChangeAspect="1"/>
+          </p:cNvPicPr>
           <p:nvPr/>
         </p:nvPicPr>
         <p:blipFill>
           <a:blip r:embed="rId6"/>
-          <a:srcRect/>
           <a:stretch>
             <a:fillRect/>
           </a:stretch>
         </p:blipFill>
         <p:spPr>
           <a:xfrm>
-            <a:off x="2961150" y="4415104"/>
-            <a:ext cx="2761232" cy="2172650"/>
+            <a:off x="1622424" y="2724790"/>
+            <a:ext cx="1891543" cy="1345186"/>
           </a:xfrm>
           <a:prstGeom prst="rect">
             <a:avLst/>
           </a:prstGeom>
-          <a:ln/>
         </p:spPr>
       </p:pic>
       <p:pic>
         <p:nvPicPr>
-          <p:cNvPr id="13" name="image28.png">
-            <a:extLst>
-              <a:ext uri="{FF2B5EF4-FFF2-40B4-BE49-F238E27FC236}">
-                <a16:creationId xmlns:a16="http://schemas.microsoft.com/office/drawing/2014/main" id="{2428F155-45DA-4266-AD4D-C0EB983B6177}"/>
-              </a:ext>
-            </a:extLst>
-          </p:cNvPr>
+          <p:cNvPr id="105" name="soap_server_wsdl_browser.png"/>
           <p:cNvPicPr/>
           <p:nvPr/>
         </p:nvPicPr>
@@ -39229,13 +38144,17 @@
         </p:blipFill>
         <p:spPr>
           <a:xfrm>
-            <a:off x="5818100" y="4415104"/>
-            <a:ext cx="2808980" cy="2070698"/>
+            <a:off x="4800000" y="3900000"/>
+            <a:ext cx="4200000" cy="2600000"/>
           </a:xfrm>
           <a:prstGeom prst="rect">
             <a:avLst/>
           </a:prstGeom>
-          <a:ln/>
+          <a:ln w="12700">
+            <a:solidFill>
+              <a:srgbClr val="CCCCCC"/>
+            </a:solidFill>
+          </a:ln>
         </p:spPr>
       </p:pic>
     </p:spTree>
@@ -39364,15 +38283,34 @@
               <a:buNone/>
             </a:pPr>
             <a:r>
-              <a:rPr lang="es-ES" sz="1564" b="1" dirty="0">
+              <a:rPr lang="es-ES" sz="1564" b="1">
                 <a:latin typeface="Cambria"/>
                 <a:ea typeface="Cambria"/>
                 <a:cs typeface="Cambria"/>
                 <a:sym typeface="Cambria"/>
               </a:rPr>
-              <a:t>1.3 	CREACIÓN DEL PROYECTO CLIENTE CONSOLA</a:t>
-            </a:r>
-            <a:endParaRPr sz="1564" b="1" dirty="0">
+              <a:t>1.3 CREACIÓN DEL CLIENTE CONSOLA</a:t>
+            </a:r>
+          </a:p>
+          <a:p>
+            <a:pPr marL="0" lvl="0" indent="0" algn="l" rtl="0">
+              <a:lnSpc>
+                <a:spcPct val="115000"/>
+              </a:lnSpc>
+              <a:spcBef>
+                <a:spcPts val="1200"/>
+              </a:spcBef>
+              <a:spcAft>
+                <a:spcPts val="0"/>
+              </a:spcAft>
+              <a:buClr>
+                <a:schemeClr val="dk1"/>
+              </a:buClr>
+              <a:buSzPts val="1100"/>
+              <a:buFont typeface="Arial"/>
+              <a:buNone/>
+            </a:pPr>
+            <a:endParaRPr lang="es-ES" sz="1564" b="1">
               <a:latin typeface="Cambria"/>
               <a:ea typeface="Cambria"/>
               <a:cs typeface="Cambria"/>
@@ -39397,94 +38335,43 @@
               <a:buFont typeface="Arial"/>
               <a:buNone/>
             </a:pPr>
-            <a:endParaRPr sz="1564" b="1" dirty="0">
-              <a:latin typeface="Cambria"/>
-              <a:ea typeface="Cambria"/>
-              <a:cs typeface="Cambria"/>
-              <a:sym typeface="Cambria"/>
-            </a:endParaRPr>
-          </a:p>
-          <a:p>
-            <a:pPr marL="457200" lvl="0" indent="-327977" algn="l" rtl="0">
-              <a:lnSpc>
-                <a:spcPct val="115000"/>
-              </a:lnSpc>
-              <a:spcBef>
-                <a:spcPts val="0"/>
-              </a:spcBef>
-              <a:spcAft>
-                <a:spcPts val="0"/>
-              </a:spcAft>
-              <a:buSzPts val="1565"/>
-              <a:buFont typeface="Cambria"/>
-              <a:buChar char="◼"/>
-            </a:pPr>
-            <a:r>
-              <a:rPr lang="es-MX" sz="1564" dirty="0">
+            <a:r>
+              <a:rPr lang="es-ES" sz="1564" b="1">
                 <a:latin typeface="Cambria"/>
                 <a:ea typeface="Cambria"/>
                 <a:cs typeface="Cambria"/>
                 <a:sym typeface="Cambria"/>
               </a:rPr>
-              <a:t>El proyecto se crea usando NetBeans seleccionando ‘Nuevo Proyecto’, ‘Java </a:t>
-            </a:r>
-            <a:r>
-              <a:rPr lang="es-MX" sz="1564" dirty="0" err="1">
+              <a:t>Crea una aplicación Java con Maven en NetBeans. Configura el consumo de los endpoints SOAP y separa modelo, vista y controlador.</a:t>
+            </a:r>
+          </a:p>
+          <a:p>
+            <a:pPr marL="0" lvl="0" indent="0" algn="l" rtl="0">
+              <a:lnSpc>
+                <a:spcPct val="115000"/>
+              </a:lnSpc>
+              <a:spcBef>
+                <a:spcPts val="1200"/>
+              </a:spcBef>
+              <a:spcAft>
+                <a:spcPts val="0"/>
+              </a:spcAft>
+              <a:buClr>
+                <a:schemeClr val="dk1"/>
+              </a:buClr>
+              <a:buSzPts val="1100"/>
+              <a:buFont typeface="Arial"/>
+              <a:buNone/>
+            </a:pPr>
+            <a:r>
+              <a:rPr lang="es-ES" sz="1564" b="1">
                 <a:latin typeface="Cambria"/>
                 <a:ea typeface="Cambria"/>
                 <a:cs typeface="Cambria"/>
                 <a:sym typeface="Cambria"/>
               </a:rPr>
-              <a:t>with</a:t>
-            </a:r>
-            <a:r>
-              <a:rPr lang="es-MX" sz="1564" dirty="0">
-                <a:latin typeface="Cambria"/>
-                <a:ea typeface="Cambria"/>
-                <a:cs typeface="Cambria"/>
-                <a:sym typeface="Cambria"/>
-              </a:rPr>
-              <a:t> Maven’ y ‘Java </a:t>
-            </a:r>
-            <a:r>
-              <a:rPr lang="es-MX" sz="1564" dirty="0" err="1">
-                <a:latin typeface="Cambria"/>
-                <a:ea typeface="Cambria"/>
-                <a:cs typeface="Cambria"/>
-                <a:sym typeface="Cambria"/>
-              </a:rPr>
-              <a:t>Application</a:t>
-            </a:r>
-            <a:r>
-              <a:rPr lang="es-MX" sz="1564" dirty="0">
-                <a:latin typeface="Cambria"/>
-                <a:ea typeface="Cambria"/>
-                <a:cs typeface="Cambria"/>
-                <a:sym typeface="Cambria"/>
-              </a:rPr>
-              <a:t>’. </a:t>
-            </a:r>
-            <a:endParaRPr sz="1564" dirty="0">
-              <a:latin typeface="Cambria"/>
-              <a:ea typeface="Cambria"/>
-              <a:cs typeface="Cambria"/>
-              <a:sym typeface="Cambria"/>
-            </a:endParaRPr>
-          </a:p>
-          <a:p>
-            <a:pPr marL="0" lvl="0" indent="0" algn="l" rtl="0">
-              <a:lnSpc>
-                <a:spcPct val="115000"/>
-              </a:lnSpc>
-              <a:spcBef>
-                <a:spcPts val="1200"/>
-              </a:spcBef>
-              <a:spcAft>
-                <a:spcPts val="1200"/>
-              </a:spcAft>
-              <a:buSzPts val="1656"/>
-              <a:buNone/>
-            </a:pPr>
+              <a:t>El cliente presenta primero el formulario de autenticación y, al validar las credenciales, muestra el menú de conversión.</a:t>
+            </a:r>
             <a:endParaRPr sz="1670" dirty="0">
               <a:latin typeface="Cambria"/>
               <a:ea typeface="Cambria"/>
@@ -39834,7 +38721,7 @@
                 <a:cs typeface="Gill Sans"/>
                 <a:sym typeface="Gill Sans"/>
               </a:rPr>
-              <a:t>CREACIÓN DEL PROYECTO – CLIENTE MOVIL</a:t>
+              <a:t>CREACIÓN DEL PROYECTO – CLIENTE MÓVIL</a:t>
             </a:r>
             <a:endParaRPr sz="1400" b="0" i="0" u="none" strike="noStrike" cap="none">
               <a:solidFill>
@@ -39956,64 +38843,115 @@
           </a:p>
         </p:txBody>
       </p:sp>
-      <p:pic>
-        <p:nvPicPr>
-          <p:cNvPr id="7" name="image8.png">
+      <p:sp>
+        <p:nvSpPr>
+          <p:cNvPr id="2" name="Configuración Maven - consola">
             <a:extLst>
               <a:ext uri="{FF2B5EF4-FFF2-40B4-BE49-F238E27FC236}">
-                <a16:creationId xmlns:a16="http://schemas.microsoft.com/office/drawing/2014/main" id="{E481D2AD-B02B-44A6-8D70-921B2CA394D4}"/>
+                <a16:creationId xmlns:a16="http://schemas.microsoft.com/office/drawing/2014/main" xmlns="" id="{3A7959C0-C4A0-43B5-A418-6987B537CAD0}"/>
               </a:ext>
             </a:extLst>
           </p:cNvPr>
-          <p:cNvPicPr/>
+          <p:cNvSpPr/>
+          <p:nvPr/>
+        </p:nvSpPr>
+        <p:spPr>
+          <a:xfrm>
+            <a:off x="4740234" y="4191000"/>
+            <a:ext cx="4201160" cy="2413000"/>
+          </a:xfrm>
+          <a:prstGeom prst="rect">
+            <a:avLst/>
+          </a:prstGeom>
+          <a:solidFill>
+            <a:srgbClr val="FFFFFF"/>
+          </a:solidFill>
+          <a:ln w="15875">
+            <a:solidFill>
+              <a:srgbClr val="D9D9D9"/>
+            </a:solidFill>
+          </a:ln>
+        </p:spPr>
+        <p:style>
+          <a:lnRef idx="2">
+            <a:schemeClr val="accent1">
+              <a:shade val="50000"/>
+            </a:schemeClr>
+          </a:lnRef>
+          <a:fillRef idx="1">
+            <a:schemeClr val="accent1"/>
+          </a:fillRef>
+          <a:effectRef idx="0">
+            <a:schemeClr val="accent1"/>
+          </a:effectRef>
+          <a:fontRef idx="minor">
+            <a:schemeClr val="lt1"/>
+          </a:fontRef>
+        </p:style>
+        <p:txBody>
+          <a:bodyPr wrap="square" lIns="101600" tIns="63500" rIns="101600" bIns="63500" rtlCol="0" anchor="t">
+            <a:noAutofit/>
+          </a:bodyPr>
+          <a:lstStyle/>
+          <a:p>
+            <a:r>
+              <a:rPr lang="es-ES" sz="850" smtClean="0">
+                <a:solidFill>
+                  <a:srgbClr val="000000"/>
+                </a:solidFill>
+                <a:latin typeface="Consolas" panose="020B0609020204030204" pitchFamily="49" charset="0"/>
+              </a:rPr>
+              <a:t>&lt;artifactId&gt;ClienteConsolaSOAP&lt;/artifactId&gt;
+&lt;version&gt;1.0.0&lt;/version&gt;
+&lt;packaging&gt;jar&lt;/packaging&gt;
+&lt;dependency&gt;
+  &lt;groupId&gt;jakarta.xml.ws&lt;/groupId&gt;
+  &lt;artifactId&gt;jakarta.xml.ws-api&lt;/artifactId&gt;
+  &lt;version&gt;4.0.1&lt;/version&gt;
+&lt;/dependency&gt;
+&lt;dependency&gt;
+  &lt;groupId&gt;com.sun.xml.ws&lt;/groupId&gt;
+  &lt;artifactId&gt;jaxws-rt&lt;/artifactId&gt;
+  &lt;version&gt;4.0.2&lt;/version&gt;
+&lt;/dependency&gt;</a:t>
+            </a:r>
+            <a:endParaRPr lang="en-US" sz="850">
+              <a:solidFill>
+                <a:srgbClr val="000000"/>
+              </a:solidFill>
+              <a:latin typeface="Consolas" panose="020B0609020204030204" pitchFamily="49" charset="0"/>
+            </a:endParaRPr>
+          </a:p>
+        </p:txBody>
+      </p:sp>
+      <p:pic>
+        <p:nvPicPr>
+          <p:cNvPr id="4" name="Captura propia - console-project-tree"/>
+          <p:cNvPicPr>
+            <a:picLocks/>
+          </p:cNvPicPr>
           <p:nvPr/>
         </p:nvPicPr>
         <p:blipFill>
-          <a:blip r:embed="rId3"/>
-          <a:srcRect/>
+          <a:blip r:embed="rId3">
+            <a:extLst>
+              <a:ext uri="{28A0092B-C50C-407E-A947-70E740481C1C}">
+                <a14:useLocalDpi xmlns:a14="http://schemas.microsoft.com/office/drawing/2010/main" val="0"/>
+              </a:ext>
+            </a:extLst>
+          </a:blip>
           <a:stretch>
             <a:fillRect/>
           </a:stretch>
         </p:blipFill>
         <p:spPr>
           <a:xfrm>
-            <a:off x="466506" y="3674580"/>
-            <a:ext cx="4144010" cy="2828290"/>
+            <a:off x="774700" y="4191000"/>
+            <a:ext cx="3530600" cy="2413000"/>
           </a:xfrm>
           <a:prstGeom prst="rect">
             <a:avLst/>
           </a:prstGeom>
-          <a:ln/>
-        </p:spPr>
-      </p:pic>
-      <p:pic>
-        <p:nvPicPr>
-          <p:cNvPr id="8" name="image22.png">
-            <a:extLst>
-              <a:ext uri="{FF2B5EF4-FFF2-40B4-BE49-F238E27FC236}">
-                <a16:creationId xmlns:a16="http://schemas.microsoft.com/office/drawing/2014/main" id="{AADC3830-9F36-4B0B-AAF9-EB9750D45704}"/>
-              </a:ext>
-            </a:extLst>
-          </p:cNvPr>
-          <p:cNvPicPr/>
-          <p:nvPr/>
-        </p:nvPicPr>
-        <p:blipFill>
-          <a:blip r:embed="rId4"/>
-          <a:srcRect/>
-          <a:stretch>
-            <a:fillRect/>
-          </a:stretch>
-        </p:blipFill>
-        <p:spPr>
-          <a:xfrm>
-            <a:off x="4740234" y="3657435"/>
-            <a:ext cx="4201160" cy="2845435"/>
-          </a:xfrm>
-          <a:prstGeom prst="rect">
-            <a:avLst/>
-          </a:prstGeom>
-          <a:ln/>
         </p:spPr>
       </p:pic>
     </p:spTree>
